--- a/fixtures/report.master.pre-naming.pptx
+++ b/fixtures/report.master.pre-naming.pptx
@@ -23542,7 +23542,130 @@
       </p:sp>
       <p:sp>
         <p:nvSpPr>
-          <p:cNvPr id="4" name="slot.title"/>
+          <p:cNvPr id="4" name="decor">
+            <a:extLst>
+              <a:ext uri="{FF2B5EF4-FFF2-40B4-BE49-F238E27FC236}">
+                <a16:creationId xmlns:a16="http://schemas.microsoft.com/office/drawing/2014/main" id="{9BCA9FA9-DC4A-F7F9-6F98-04EFCF05B790}"/>
+              </a:ext>
+            </a:extLst>
+          </p:cNvPr>
+          <p:cNvSpPr/>
+          <p:nvPr userDrawn="1"/>
+        </p:nvSpPr>
+        <p:spPr>
+          <a:xfrm>
+            <a:off x="-64731" y="246322"/>
+            <a:ext cx="512150" cy="423265"/>
+          </a:xfrm>
+          <a:prstGeom prst="pie">
+            <a:avLst>
+              <a:gd name="adj1" fmla="val 16190032"/>
+              <a:gd name="adj2" fmla="val 5400005"/>
+            </a:avLst>
+          </a:prstGeom>
+          <a:solidFill>
+            <a:schemeClr val="tx2"/>
+          </a:solidFill>
+          <a:ln>
+            <a:solidFill>
+              <a:schemeClr val="tx2"/>
+            </a:solidFill>
+          </a:ln>
+        </p:spPr>
+        <p:style>
+          <a:lnRef idx="2">
+            <a:schemeClr val="accent1">
+              <a:shade val="50000"/>
+            </a:schemeClr>
+          </a:lnRef>
+          <a:fillRef idx="1">
+            <a:schemeClr val="accent1"/>
+          </a:fillRef>
+          <a:effectRef idx="0">
+            <a:schemeClr val="accent1"/>
+          </a:effectRef>
+          <a:fontRef idx="minor">
+            <a:schemeClr val="lt1"/>
+          </a:fontRef>
+        </p:style>
+        <p:txBody>
+          <a:bodyPr lIns="36000" tIns="36000" rIns="36000" bIns="36000" rtlCol="0" anchor="ctr"/>
+          <a:lstStyle/>
+          <a:p>
+            <a:pPr algn="l" rtl="0"/>
+            <a:endParaRPr lang="en-US" sz="1200" b="1">
+              <a:solidFill>
+                <a:schemeClr val="bg1"/>
+              </a:solidFill>
+              <a:latin typeface="Arial" panose="020B0604020202020204" pitchFamily="34" charset="0"/>
+              <a:cs typeface="Arial" panose="020B0604020202020204" pitchFamily="34" charset="0"/>
+            </a:endParaRPr>
+          </a:p>
+        </p:txBody>
+      </p:sp>
+      <p:sp>
+        <p:nvSpPr>
+          <p:cNvPr id="5" name="decor">
+            <a:extLst>
+              <a:ext uri="{FF2B5EF4-FFF2-40B4-BE49-F238E27FC236}">
+                <a16:creationId xmlns:a16="http://schemas.microsoft.com/office/drawing/2014/main" id="{5D3B6E37-9E51-E62C-A843-852BEEBE5F2B}"/>
+              </a:ext>
+            </a:extLst>
+          </p:cNvPr>
+          <p:cNvSpPr/>
+          <p:nvPr userDrawn="1"/>
+        </p:nvSpPr>
+        <p:spPr>
+          <a:xfrm>
+            <a:off x="0" y="247761"/>
+            <a:ext cx="191344" cy="423265"/>
+          </a:xfrm>
+          <a:prstGeom prst="rect">
+            <a:avLst/>
+          </a:prstGeom>
+          <a:solidFill>
+            <a:schemeClr val="tx2"/>
+          </a:solidFill>
+          <a:ln>
+            <a:solidFill>
+              <a:schemeClr val="tx2"/>
+            </a:solidFill>
+          </a:ln>
+        </p:spPr>
+        <p:style>
+          <a:lnRef idx="2">
+            <a:schemeClr val="accent1">
+              <a:shade val="50000"/>
+            </a:schemeClr>
+          </a:lnRef>
+          <a:fillRef idx="1">
+            <a:schemeClr val="accent1"/>
+          </a:fillRef>
+          <a:effectRef idx="0">
+            <a:schemeClr val="accent1"/>
+          </a:effectRef>
+          <a:fontRef idx="minor">
+            <a:schemeClr val="lt1"/>
+          </a:fontRef>
+        </p:style>
+        <p:txBody>
+          <a:bodyPr lIns="36000" tIns="36000" rIns="36000" bIns="36000" rtlCol="0" anchor="ctr"/>
+          <a:lstStyle/>
+          <a:p>
+            <a:pPr algn="l" rtl="0"/>
+            <a:endParaRPr lang="en-US" sz="1200" b="1">
+              <a:solidFill>
+                <a:schemeClr val="bg1"/>
+              </a:solidFill>
+              <a:latin typeface="Arial" panose="020B0604020202020204" pitchFamily="34" charset="0"/>
+              <a:cs typeface="Arial" panose="020B0604020202020204" pitchFamily="34" charset="0"/>
+            </a:endParaRPr>
+          </a:p>
+        </p:txBody>
+      </p:sp>
+      <p:sp>
+        <p:nvSpPr>
+          <p:cNvPr id="6" name="slot.title"/>
           <p:cNvSpPr txBox="1"/>
           <p:nvPr/>
         </p:nvSpPr>
@@ -23566,18 +23689,18 @@
             <a:r>
               <a:rPr sz="2200" b="1">
                 <a:solidFill>
-                  <a:schemeClr val="dk1"/>
+                  <a:schemeClr val="accent2"/>
                 </a:solidFill>
                 <a:latin typeface="Futura Medium"/>
               </a:rPr>
-              <a:t>A single headline figure that anchors the slide</a:t>
-            </a:r>
-          </a:p>
-        </p:txBody>
-      </p:sp>
-      <p:sp>
-        <p:nvSpPr>
-          <p:cNvPr id="5" name="slot.big-number"/>
+              <a:t>Action title summarising the takeaway of this slide</a:t>
+            </a:r>
+          </a:p>
+        </p:txBody>
+      </p:sp>
+      <p:sp>
+        <p:nvSpPr>
+          <p:cNvPr id="7" name="slot.big-number"/>
           <p:cNvSpPr txBox="1"/>
           <p:nvPr/>
         </p:nvSpPr>
@@ -23603,7 +23726,7 @@
                 <a:solidFill>
                   <a:schemeClr val="accent2"/>
                 </a:solidFill>
-                <a:latin typeface="Futura Medium"/>
+                <a:latin typeface="Arial"/>
               </a:rPr>
               <a:t>€43M</a:t>
             </a:r>
@@ -23612,7 +23735,7 @@
       </p:sp>
       <p:sp>
         <p:nvSpPr>
-          <p:cNvPr id="6" name="slot.caption"/>
+          <p:cNvPr id="8" name="slot.caption"/>
           <p:cNvSpPr txBox="1"/>
           <p:nvPr/>
         </p:nvSpPr>
@@ -23719,7 +23842,130 @@
       </p:sp>
       <p:sp>
         <p:nvSpPr>
-          <p:cNvPr id="4" name="slot.title"/>
+          <p:cNvPr id="4" name="decor">
+            <a:extLst>
+              <a:ext uri="{FF2B5EF4-FFF2-40B4-BE49-F238E27FC236}">
+                <a16:creationId xmlns:a16="http://schemas.microsoft.com/office/drawing/2014/main" id="{9BCA9FA9-DC4A-F7F9-6F98-04EFCF05B790}"/>
+              </a:ext>
+            </a:extLst>
+          </p:cNvPr>
+          <p:cNvSpPr/>
+          <p:nvPr userDrawn="1"/>
+        </p:nvSpPr>
+        <p:spPr>
+          <a:xfrm>
+            <a:off x="-64731" y="246322"/>
+            <a:ext cx="512150" cy="423265"/>
+          </a:xfrm>
+          <a:prstGeom prst="pie">
+            <a:avLst>
+              <a:gd name="adj1" fmla="val 16190032"/>
+              <a:gd name="adj2" fmla="val 5400005"/>
+            </a:avLst>
+          </a:prstGeom>
+          <a:solidFill>
+            <a:schemeClr val="tx2"/>
+          </a:solidFill>
+          <a:ln>
+            <a:solidFill>
+              <a:schemeClr val="tx2"/>
+            </a:solidFill>
+          </a:ln>
+        </p:spPr>
+        <p:style>
+          <a:lnRef idx="2">
+            <a:schemeClr val="accent1">
+              <a:shade val="50000"/>
+            </a:schemeClr>
+          </a:lnRef>
+          <a:fillRef idx="1">
+            <a:schemeClr val="accent1"/>
+          </a:fillRef>
+          <a:effectRef idx="0">
+            <a:schemeClr val="accent1"/>
+          </a:effectRef>
+          <a:fontRef idx="minor">
+            <a:schemeClr val="lt1"/>
+          </a:fontRef>
+        </p:style>
+        <p:txBody>
+          <a:bodyPr lIns="36000" tIns="36000" rIns="36000" bIns="36000" rtlCol="0" anchor="ctr"/>
+          <a:lstStyle/>
+          <a:p>
+            <a:pPr algn="l" rtl="0"/>
+            <a:endParaRPr lang="en-US" sz="1200" b="1">
+              <a:solidFill>
+                <a:schemeClr val="bg1"/>
+              </a:solidFill>
+              <a:latin typeface="Arial" panose="020B0604020202020204" pitchFamily="34" charset="0"/>
+              <a:cs typeface="Arial" panose="020B0604020202020204" pitchFamily="34" charset="0"/>
+            </a:endParaRPr>
+          </a:p>
+        </p:txBody>
+      </p:sp>
+      <p:sp>
+        <p:nvSpPr>
+          <p:cNvPr id="5" name="decor">
+            <a:extLst>
+              <a:ext uri="{FF2B5EF4-FFF2-40B4-BE49-F238E27FC236}">
+                <a16:creationId xmlns:a16="http://schemas.microsoft.com/office/drawing/2014/main" id="{5D3B6E37-9E51-E62C-A843-852BEEBE5F2B}"/>
+              </a:ext>
+            </a:extLst>
+          </p:cNvPr>
+          <p:cNvSpPr/>
+          <p:nvPr userDrawn="1"/>
+        </p:nvSpPr>
+        <p:spPr>
+          <a:xfrm>
+            <a:off x="0" y="247761"/>
+            <a:ext cx="191344" cy="423265"/>
+          </a:xfrm>
+          <a:prstGeom prst="rect">
+            <a:avLst/>
+          </a:prstGeom>
+          <a:solidFill>
+            <a:schemeClr val="tx2"/>
+          </a:solidFill>
+          <a:ln>
+            <a:solidFill>
+              <a:schemeClr val="tx2"/>
+            </a:solidFill>
+          </a:ln>
+        </p:spPr>
+        <p:style>
+          <a:lnRef idx="2">
+            <a:schemeClr val="accent1">
+              <a:shade val="50000"/>
+            </a:schemeClr>
+          </a:lnRef>
+          <a:fillRef idx="1">
+            <a:schemeClr val="accent1"/>
+          </a:fillRef>
+          <a:effectRef idx="0">
+            <a:schemeClr val="accent1"/>
+          </a:effectRef>
+          <a:fontRef idx="minor">
+            <a:schemeClr val="lt1"/>
+          </a:fontRef>
+        </p:style>
+        <p:txBody>
+          <a:bodyPr lIns="36000" tIns="36000" rIns="36000" bIns="36000" rtlCol="0" anchor="ctr"/>
+          <a:lstStyle/>
+          <a:p>
+            <a:pPr algn="l" rtl="0"/>
+            <a:endParaRPr lang="en-US" sz="1200" b="1">
+              <a:solidFill>
+                <a:schemeClr val="bg1"/>
+              </a:solidFill>
+              <a:latin typeface="Arial" panose="020B0604020202020204" pitchFamily="34" charset="0"/>
+              <a:cs typeface="Arial" panose="020B0604020202020204" pitchFamily="34" charset="0"/>
+            </a:endParaRPr>
+          </a:p>
+        </p:txBody>
+      </p:sp>
+      <p:sp>
+        <p:nvSpPr>
+          <p:cNvPr id="6" name="slot.title"/>
           <p:cNvSpPr txBox="1"/>
           <p:nvPr/>
         </p:nvSpPr>
@@ -23743,7 +23989,7 @@
             <a:r>
               <a:rPr sz="2200" b="1">
                 <a:solidFill>
-                  <a:schemeClr val="dk1"/>
+                  <a:schemeClr val="accent2"/>
                 </a:solidFill>
                 <a:latin typeface="Futura Medium"/>
               </a:rPr>
@@ -23754,7 +24000,7 @@
       </p:sp>
       <p:sp>
         <p:nvSpPr>
-          <p:cNvPr id="5" name="slot.process-step.1.title"/>
+          <p:cNvPr id="7" name="slot.process-step.1.title"/>
           <p:cNvSpPr/>
           <p:nvPr/>
         </p:nvSpPr>
@@ -23797,7 +24043,7 @@
                 <a:solidFill>
                   <a:schemeClr val="accent1"/>
                 </a:solidFill>
-                <a:latin typeface="Futura Medium"/>
+                <a:latin typeface="Arial"/>
               </a:rPr>
               <a:t>Step 1</a:t>
             </a:r>
@@ -23806,7 +24052,7 @@
       </p:sp>
       <p:sp>
         <p:nvSpPr>
-          <p:cNvPr id="6" name="slot.process-step.1.body"/>
+          <p:cNvPr id="8" name="slot.process-step.1.body"/>
           <p:cNvSpPr txBox="1"/>
           <p:nvPr/>
         </p:nvSpPr>
@@ -23841,7 +24087,7 @@
       </p:sp>
       <p:sp>
         <p:nvSpPr>
-          <p:cNvPr id="7" name="decor"/>
+          <p:cNvPr id="9" name="decor"/>
           <p:cNvSpPr/>
           <p:nvPr/>
         </p:nvSpPr>
@@ -23884,7 +24130,7 @@
                 <a:solidFill>
                   <a:schemeClr val="lt1"/>
                 </a:solidFill>
-                <a:latin typeface="Futura Medium"/>
+                <a:latin typeface="Arial"/>
               </a:rPr>
               <a:t>1</a:t>
             </a:r>
@@ -23893,7 +24139,7 @@
       </p:sp>
       <p:sp>
         <p:nvSpPr>
-          <p:cNvPr id="8" name="slot.process-step.2.title"/>
+          <p:cNvPr id="10" name="slot.process-step.2.title"/>
           <p:cNvSpPr/>
           <p:nvPr/>
         </p:nvSpPr>
@@ -23936,7 +24182,7 @@
                 <a:solidFill>
                   <a:schemeClr val="accent1"/>
                 </a:solidFill>
-                <a:latin typeface="Futura Medium"/>
+                <a:latin typeface="Arial"/>
               </a:rPr>
               <a:t>Step 2</a:t>
             </a:r>
@@ -23945,7 +24191,7 @@
       </p:sp>
       <p:sp>
         <p:nvSpPr>
-          <p:cNvPr id="9" name="slot.process-step.2.body"/>
+          <p:cNvPr id="11" name="slot.process-step.2.body"/>
           <p:cNvSpPr txBox="1"/>
           <p:nvPr/>
         </p:nvSpPr>
@@ -23980,7 +24226,7 @@
       </p:sp>
       <p:sp>
         <p:nvSpPr>
-          <p:cNvPr id="10" name="decor"/>
+          <p:cNvPr id="12" name="decor"/>
           <p:cNvSpPr/>
           <p:nvPr/>
         </p:nvSpPr>
@@ -24023,7 +24269,7 @@
                 <a:solidFill>
                   <a:schemeClr val="lt1"/>
                 </a:solidFill>
-                <a:latin typeface="Futura Medium"/>
+                <a:latin typeface="Arial"/>
               </a:rPr>
               <a:t>2</a:t>
             </a:r>
@@ -24032,7 +24278,7 @@
       </p:sp>
       <p:sp>
         <p:nvSpPr>
-          <p:cNvPr id="11" name="slot.process-step.3.title"/>
+          <p:cNvPr id="13" name="slot.process-step.3.title"/>
           <p:cNvSpPr/>
           <p:nvPr/>
         </p:nvSpPr>
@@ -24075,7 +24321,7 @@
                 <a:solidFill>
                   <a:schemeClr val="accent1"/>
                 </a:solidFill>
-                <a:latin typeface="Futura Medium"/>
+                <a:latin typeface="Arial"/>
               </a:rPr>
               <a:t>Step 3</a:t>
             </a:r>
@@ -24084,7 +24330,7 @@
       </p:sp>
       <p:sp>
         <p:nvSpPr>
-          <p:cNvPr id="12" name="slot.process-step.3.body"/>
+          <p:cNvPr id="14" name="slot.process-step.3.body"/>
           <p:cNvSpPr txBox="1"/>
           <p:nvPr/>
         </p:nvSpPr>
@@ -24119,7 +24365,7 @@
       </p:sp>
       <p:sp>
         <p:nvSpPr>
-          <p:cNvPr id="13" name="decor"/>
+          <p:cNvPr id="15" name="decor"/>
           <p:cNvSpPr/>
           <p:nvPr/>
         </p:nvSpPr>
@@ -24162,7 +24408,7 @@
                 <a:solidFill>
                   <a:schemeClr val="lt1"/>
                 </a:solidFill>
-                <a:latin typeface="Futura Medium"/>
+                <a:latin typeface="Arial"/>
               </a:rPr>
               <a:t>3</a:t>
             </a:r>
@@ -24243,7 +24489,130 @@
       </p:sp>
       <p:sp>
         <p:nvSpPr>
-          <p:cNvPr id="4" name="slot.title"/>
+          <p:cNvPr id="4" name="decor">
+            <a:extLst>
+              <a:ext uri="{FF2B5EF4-FFF2-40B4-BE49-F238E27FC236}">
+                <a16:creationId xmlns:a16="http://schemas.microsoft.com/office/drawing/2014/main" id="{9BCA9FA9-DC4A-F7F9-6F98-04EFCF05B790}"/>
+              </a:ext>
+            </a:extLst>
+          </p:cNvPr>
+          <p:cNvSpPr/>
+          <p:nvPr userDrawn="1"/>
+        </p:nvSpPr>
+        <p:spPr>
+          <a:xfrm>
+            <a:off x="-64731" y="246322"/>
+            <a:ext cx="512150" cy="423265"/>
+          </a:xfrm>
+          <a:prstGeom prst="pie">
+            <a:avLst>
+              <a:gd name="adj1" fmla="val 16190032"/>
+              <a:gd name="adj2" fmla="val 5400005"/>
+            </a:avLst>
+          </a:prstGeom>
+          <a:solidFill>
+            <a:schemeClr val="tx2"/>
+          </a:solidFill>
+          <a:ln>
+            <a:solidFill>
+              <a:schemeClr val="tx2"/>
+            </a:solidFill>
+          </a:ln>
+        </p:spPr>
+        <p:style>
+          <a:lnRef idx="2">
+            <a:schemeClr val="accent1">
+              <a:shade val="50000"/>
+            </a:schemeClr>
+          </a:lnRef>
+          <a:fillRef idx="1">
+            <a:schemeClr val="accent1"/>
+          </a:fillRef>
+          <a:effectRef idx="0">
+            <a:schemeClr val="accent1"/>
+          </a:effectRef>
+          <a:fontRef idx="minor">
+            <a:schemeClr val="lt1"/>
+          </a:fontRef>
+        </p:style>
+        <p:txBody>
+          <a:bodyPr lIns="36000" tIns="36000" rIns="36000" bIns="36000" rtlCol="0" anchor="ctr"/>
+          <a:lstStyle/>
+          <a:p>
+            <a:pPr algn="l" rtl="0"/>
+            <a:endParaRPr lang="en-US" sz="1200" b="1">
+              <a:solidFill>
+                <a:schemeClr val="bg1"/>
+              </a:solidFill>
+              <a:latin typeface="Arial" panose="020B0604020202020204" pitchFamily="34" charset="0"/>
+              <a:cs typeface="Arial" panose="020B0604020202020204" pitchFamily="34" charset="0"/>
+            </a:endParaRPr>
+          </a:p>
+        </p:txBody>
+      </p:sp>
+      <p:sp>
+        <p:nvSpPr>
+          <p:cNvPr id="5" name="decor">
+            <a:extLst>
+              <a:ext uri="{FF2B5EF4-FFF2-40B4-BE49-F238E27FC236}">
+                <a16:creationId xmlns:a16="http://schemas.microsoft.com/office/drawing/2014/main" id="{5D3B6E37-9E51-E62C-A843-852BEEBE5F2B}"/>
+              </a:ext>
+            </a:extLst>
+          </p:cNvPr>
+          <p:cNvSpPr/>
+          <p:nvPr userDrawn="1"/>
+        </p:nvSpPr>
+        <p:spPr>
+          <a:xfrm>
+            <a:off x="0" y="247761"/>
+            <a:ext cx="191344" cy="423265"/>
+          </a:xfrm>
+          <a:prstGeom prst="rect">
+            <a:avLst/>
+          </a:prstGeom>
+          <a:solidFill>
+            <a:schemeClr val="tx2"/>
+          </a:solidFill>
+          <a:ln>
+            <a:solidFill>
+              <a:schemeClr val="tx2"/>
+            </a:solidFill>
+          </a:ln>
+        </p:spPr>
+        <p:style>
+          <a:lnRef idx="2">
+            <a:schemeClr val="accent1">
+              <a:shade val="50000"/>
+            </a:schemeClr>
+          </a:lnRef>
+          <a:fillRef idx="1">
+            <a:schemeClr val="accent1"/>
+          </a:fillRef>
+          <a:effectRef idx="0">
+            <a:schemeClr val="accent1"/>
+          </a:effectRef>
+          <a:fontRef idx="minor">
+            <a:schemeClr val="lt1"/>
+          </a:fontRef>
+        </p:style>
+        <p:txBody>
+          <a:bodyPr lIns="36000" tIns="36000" rIns="36000" bIns="36000" rtlCol="0" anchor="ctr"/>
+          <a:lstStyle/>
+          <a:p>
+            <a:pPr algn="l" rtl="0"/>
+            <a:endParaRPr lang="en-US" sz="1200" b="1">
+              <a:solidFill>
+                <a:schemeClr val="bg1"/>
+              </a:solidFill>
+              <a:latin typeface="Arial" panose="020B0604020202020204" pitchFamily="34" charset="0"/>
+              <a:cs typeface="Arial" panose="020B0604020202020204" pitchFamily="34" charset="0"/>
+            </a:endParaRPr>
+          </a:p>
+        </p:txBody>
+      </p:sp>
+      <p:sp>
+        <p:nvSpPr>
+          <p:cNvPr id="6" name="slot.title"/>
           <p:cNvSpPr txBox="1"/>
           <p:nvPr/>
         </p:nvSpPr>
@@ -24267,7 +24636,7 @@
             <a:r>
               <a:rPr sz="2200" b="1">
                 <a:solidFill>
-                  <a:schemeClr val="dk1"/>
+                  <a:schemeClr val="accent2"/>
                 </a:solidFill>
                 <a:latin typeface="Futura Medium"/>
               </a:rPr>
@@ -24278,7 +24647,7 @@
       </p:sp>
       <p:sp>
         <p:nvSpPr>
-          <p:cNvPr id="5" name="slot.process-step.1.title"/>
+          <p:cNvPr id="7" name="slot.process-step.1.title"/>
           <p:cNvSpPr/>
           <p:nvPr/>
         </p:nvSpPr>
@@ -24321,7 +24690,7 @@
                 <a:solidFill>
                   <a:schemeClr val="accent1"/>
                 </a:solidFill>
-                <a:latin typeface="Futura Medium"/>
+                <a:latin typeface="Arial"/>
               </a:rPr>
               <a:t>Step 1</a:t>
             </a:r>
@@ -24330,7 +24699,7 @@
       </p:sp>
       <p:sp>
         <p:nvSpPr>
-          <p:cNvPr id="6" name="slot.process-step.1.body"/>
+          <p:cNvPr id="8" name="slot.process-step.1.body"/>
           <p:cNvSpPr txBox="1"/>
           <p:nvPr/>
         </p:nvSpPr>
@@ -24365,7 +24734,7 @@
       </p:sp>
       <p:sp>
         <p:nvSpPr>
-          <p:cNvPr id="7" name="decor"/>
+          <p:cNvPr id="9" name="decor"/>
           <p:cNvSpPr/>
           <p:nvPr/>
         </p:nvSpPr>
@@ -24408,7 +24777,7 @@
                 <a:solidFill>
                   <a:schemeClr val="lt1"/>
                 </a:solidFill>
-                <a:latin typeface="Futura Medium"/>
+                <a:latin typeface="Arial"/>
               </a:rPr>
               <a:t>1</a:t>
             </a:r>
@@ -24417,7 +24786,7 @@
       </p:sp>
       <p:sp>
         <p:nvSpPr>
-          <p:cNvPr id="8" name="slot.process-step.2.title"/>
+          <p:cNvPr id="10" name="slot.process-step.2.title"/>
           <p:cNvSpPr/>
           <p:nvPr/>
         </p:nvSpPr>
@@ -24460,7 +24829,7 @@
                 <a:solidFill>
                   <a:schemeClr val="accent1"/>
                 </a:solidFill>
-                <a:latin typeface="Futura Medium"/>
+                <a:latin typeface="Arial"/>
               </a:rPr>
               <a:t>Step 2</a:t>
             </a:r>
@@ -24469,7 +24838,7 @@
       </p:sp>
       <p:sp>
         <p:nvSpPr>
-          <p:cNvPr id="9" name="slot.process-step.2.body"/>
+          <p:cNvPr id="11" name="slot.process-step.2.body"/>
           <p:cNvSpPr txBox="1"/>
           <p:nvPr/>
         </p:nvSpPr>
@@ -24504,7 +24873,7 @@
       </p:sp>
       <p:sp>
         <p:nvSpPr>
-          <p:cNvPr id="10" name="decor"/>
+          <p:cNvPr id="12" name="decor"/>
           <p:cNvSpPr/>
           <p:nvPr/>
         </p:nvSpPr>
@@ -24547,7 +24916,7 @@
                 <a:solidFill>
                   <a:schemeClr val="lt1"/>
                 </a:solidFill>
-                <a:latin typeface="Futura Medium"/>
+                <a:latin typeface="Arial"/>
               </a:rPr>
               <a:t>2</a:t>
             </a:r>
@@ -24556,7 +24925,7 @@
       </p:sp>
       <p:sp>
         <p:nvSpPr>
-          <p:cNvPr id="11" name="slot.process-step.3.title"/>
+          <p:cNvPr id="13" name="slot.process-step.3.title"/>
           <p:cNvSpPr/>
           <p:nvPr/>
         </p:nvSpPr>
@@ -24599,7 +24968,7 @@
                 <a:solidFill>
                   <a:schemeClr val="accent1"/>
                 </a:solidFill>
-                <a:latin typeface="Futura Medium"/>
+                <a:latin typeface="Arial"/>
               </a:rPr>
               <a:t>Step 3</a:t>
             </a:r>
@@ -24608,7 +24977,7 @@
       </p:sp>
       <p:sp>
         <p:nvSpPr>
-          <p:cNvPr id="12" name="slot.process-step.3.body"/>
+          <p:cNvPr id="14" name="slot.process-step.3.body"/>
           <p:cNvSpPr txBox="1"/>
           <p:nvPr/>
         </p:nvSpPr>
@@ -24643,7 +25012,7 @@
       </p:sp>
       <p:sp>
         <p:nvSpPr>
-          <p:cNvPr id="13" name="decor"/>
+          <p:cNvPr id="15" name="decor"/>
           <p:cNvSpPr/>
           <p:nvPr/>
         </p:nvSpPr>
@@ -24686,7 +25055,7 @@
                 <a:solidFill>
                   <a:schemeClr val="lt1"/>
                 </a:solidFill>
-                <a:latin typeface="Futura Medium"/>
+                <a:latin typeface="Arial"/>
               </a:rPr>
               <a:t>3</a:t>
             </a:r>
@@ -24695,7 +25064,7 @@
       </p:sp>
       <p:sp>
         <p:nvSpPr>
-          <p:cNvPr id="14" name="slot.process-step.4.title"/>
+          <p:cNvPr id="16" name="slot.process-step.4.title"/>
           <p:cNvSpPr/>
           <p:nvPr/>
         </p:nvSpPr>
@@ -24738,7 +25107,7 @@
                 <a:solidFill>
                   <a:schemeClr val="accent1"/>
                 </a:solidFill>
-                <a:latin typeface="Futura Medium"/>
+                <a:latin typeface="Arial"/>
               </a:rPr>
               <a:t>Step 4</a:t>
             </a:r>
@@ -24747,7 +25116,7 @@
       </p:sp>
       <p:sp>
         <p:nvSpPr>
-          <p:cNvPr id="15" name="slot.process-step.4.body"/>
+          <p:cNvPr id="17" name="slot.process-step.4.body"/>
           <p:cNvSpPr txBox="1"/>
           <p:nvPr/>
         </p:nvSpPr>
@@ -24782,7 +25151,7 @@
       </p:sp>
       <p:sp>
         <p:nvSpPr>
-          <p:cNvPr id="16" name="decor"/>
+          <p:cNvPr id="18" name="decor"/>
           <p:cNvSpPr/>
           <p:nvPr/>
         </p:nvSpPr>
@@ -24825,7 +25194,7 @@
                 <a:solidFill>
                   <a:schemeClr val="lt1"/>
                 </a:solidFill>
-                <a:latin typeface="Futura Medium"/>
+                <a:latin typeface="Arial"/>
               </a:rPr>
               <a:t>4</a:t>
             </a:r>
@@ -25016,7 +25385,130 @@
       </p:sp>
       <p:sp>
         <p:nvSpPr>
-          <p:cNvPr id="4" name="slot.title"/>
+          <p:cNvPr id="4" name="decor">
+            <a:extLst>
+              <a:ext uri="{FF2B5EF4-FFF2-40B4-BE49-F238E27FC236}">
+                <a16:creationId xmlns:a16="http://schemas.microsoft.com/office/drawing/2014/main" id="{9BCA9FA9-DC4A-F7F9-6F98-04EFCF05B790}"/>
+              </a:ext>
+            </a:extLst>
+          </p:cNvPr>
+          <p:cNvSpPr/>
+          <p:nvPr userDrawn="1"/>
+        </p:nvSpPr>
+        <p:spPr>
+          <a:xfrm>
+            <a:off x="-64731" y="246322"/>
+            <a:ext cx="512150" cy="423265"/>
+          </a:xfrm>
+          <a:prstGeom prst="pie">
+            <a:avLst>
+              <a:gd name="adj1" fmla="val 16190032"/>
+              <a:gd name="adj2" fmla="val 5400005"/>
+            </a:avLst>
+          </a:prstGeom>
+          <a:solidFill>
+            <a:schemeClr val="tx2"/>
+          </a:solidFill>
+          <a:ln>
+            <a:solidFill>
+              <a:schemeClr val="tx2"/>
+            </a:solidFill>
+          </a:ln>
+        </p:spPr>
+        <p:style>
+          <a:lnRef idx="2">
+            <a:schemeClr val="accent1">
+              <a:shade val="50000"/>
+            </a:schemeClr>
+          </a:lnRef>
+          <a:fillRef idx="1">
+            <a:schemeClr val="accent1"/>
+          </a:fillRef>
+          <a:effectRef idx="0">
+            <a:schemeClr val="accent1"/>
+          </a:effectRef>
+          <a:fontRef idx="minor">
+            <a:schemeClr val="lt1"/>
+          </a:fontRef>
+        </p:style>
+        <p:txBody>
+          <a:bodyPr lIns="36000" tIns="36000" rIns="36000" bIns="36000" rtlCol="0" anchor="ctr"/>
+          <a:lstStyle/>
+          <a:p>
+            <a:pPr algn="l" rtl="0"/>
+            <a:endParaRPr lang="en-US" sz="1200" b="1">
+              <a:solidFill>
+                <a:schemeClr val="bg1"/>
+              </a:solidFill>
+              <a:latin typeface="Arial" panose="020B0604020202020204" pitchFamily="34" charset="0"/>
+              <a:cs typeface="Arial" panose="020B0604020202020204" pitchFamily="34" charset="0"/>
+            </a:endParaRPr>
+          </a:p>
+        </p:txBody>
+      </p:sp>
+      <p:sp>
+        <p:nvSpPr>
+          <p:cNvPr id="5" name="decor">
+            <a:extLst>
+              <a:ext uri="{FF2B5EF4-FFF2-40B4-BE49-F238E27FC236}">
+                <a16:creationId xmlns:a16="http://schemas.microsoft.com/office/drawing/2014/main" id="{5D3B6E37-9E51-E62C-A843-852BEEBE5F2B}"/>
+              </a:ext>
+            </a:extLst>
+          </p:cNvPr>
+          <p:cNvSpPr/>
+          <p:nvPr userDrawn="1"/>
+        </p:nvSpPr>
+        <p:spPr>
+          <a:xfrm>
+            <a:off x="0" y="247761"/>
+            <a:ext cx="191344" cy="423265"/>
+          </a:xfrm>
+          <a:prstGeom prst="rect">
+            <a:avLst/>
+          </a:prstGeom>
+          <a:solidFill>
+            <a:schemeClr val="tx2"/>
+          </a:solidFill>
+          <a:ln>
+            <a:solidFill>
+              <a:schemeClr val="tx2"/>
+            </a:solidFill>
+          </a:ln>
+        </p:spPr>
+        <p:style>
+          <a:lnRef idx="2">
+            <a:schemeClr val="accent1">
+              <a:shade val="50000"/>
+            </a:schemeClr>
+          </a:lnRef>
+          <a:fillRef idx="1">
+            <a:schemeClr val="accent1"/>
+          </a:fillRef>
+          <a:effectRef idx="0">
+            <a:schemeClr val="accent1"/>
+          </a:effectRef>
+          <a:fontRef idx="minor">
+            <a:schemeClr val="lt1"/>
+          </a:fontRef>
+        </p:style>
+        <p:txBody>
+          <a:bodyPr lIns="36000" tIns="36000" rIns="36000" bIns="36000" rtlCol="0" anchor="ctr"/>
+          <a:lstStyle/>
+          <a:p>
+            <a:pPr algn="l" rtl="0"/>
+            <a:endParaRPr lang="en-US" sz="1200" b="1">
+              <a:solidFill>
+                <a:schemeClr val="bg1"/>
+              </a:solidFill>
+              <a:latin typeface="Arial" panose="020B0604020202020204" pitchFamily="34" charset="0"/>
+              <a:cs typeface="Arial" panose="020B0604020202020204" pitchFamily="34" charset="0"/>
+            </a:endParaRPr>
+          </a:p>
+        </p:txBody>
+      </p:sp>
+      <p:sp>
+        <p:nvSpPr>
+          <p:cNvPr id="6" name="slot.title"/>
           <p:cNvSpPr txBox="1"/>
           <p:nvPr/>
         </p:nvSpPr>
@@ -25040,7 +25532,7 @@
             <a:r>
               <a:rPr sz="2200" b="1">
                 <a:solidFill>
-                  <a:schemeClr val="dk1"/>
+                  <a:schemeClr val="accent2"/>
                 </a:solidFill>
                 <a:latin typeface="Futura Medium"/>
               </a:rPr>
@@ -25051,7 +25543,7 @@
       </p:sp>
       <p:sp>
         <p:nvSpPr>
-          <p:cNvPr id="5" name="slot.process-step.1.title"/>
+          <p:cNvPr id="7" name="slot.process-step.1.title"/>
           <p:cNvSpPr/>
           <p:nvPr/>
         </p:nvSpPr>
@@ -25094,7 +25586,7 @@
                 <a:solidFill>
                   <a:schemeClr val="accent1"/>
                 </a:solidFill>
-                <a:latin typeface="Futura Medium"/>
+                <a:latin typeface="Arial"/>
               </a:rPr>
               <a:t>Step 1</a:t>
             </a:r>
@@ -25103,7 +25595,7 @@
       </p:sp>
       <p:sp>
         <p:nvSpPr>
-          <p:cNvPr id="6" name="slot.process-step.1.body"/>
+          <p:cNvPr id="8" name="slot.process-step.1.body"/>
           <p:cNvSpPr txBox="1"/>
           <p:nvPr/>
         </p:nvSpPr>
@@ -25138,7 +25630,7 @@
       </p:sp>
       <p:sp>
         <p:nvSpPr>
-          <p:cNvPr id="7" name="decor"/>
+          <p:cNvPr id="9" name="decor"/>
           <p:cNvSpPr/>
           <p:nvPr/>
         </p:nvSpPr>
@@ -25181,7 +25673,7 @@
                 <a:solidFill>
                   <a:schemeClr val="lt1"/>
                 </a:solidFill>
-                <a:latin typeface="Futura Medium"/>
+                <a:latin typeface="Arial"/>
               </a:rPr>
               <a:t>1</a:t>
             </a:r>
@@ -25190,7 +25682,7 @@
       </p:sp>
       <p:sp>
         <p:nvSpPr>
-          <p:cNvPr id="8" name="slot.process-step.2.title"/>
+          <p:cNvPr id="10" name="slot.process-step.2.title"/>
           <p:cNvSpPr/>
           <p:nvPr/>
         </p:nvSpPr>
@@ -25233,7 +25725,7 @@
                 <a:solidFill>
                   <a:schemeClr val="accent1"/>
                 </a:solidFill>
-                <a:latin typeface="Futura Medium"/>
+                <a:latin typeface="Arial"/>
               </a:rPr>
               <a:t>Step 2</a:t>
             </a:r>
@@ -25242,7 +25734,7 @@
       </p:sp>
       <p:sp>
         <p:nvSpPr>
-          <p:cNvPr id="9" name="slot.process-step.2.body"/>
+          <p:cNvPr id="11" name="slot.process-step.2.body"/>
           <p:cNvSpPr txBox="1"/>
           <p:nvPr/>
         </p:nvSpPr>
@@ -25277,7 +25769,7 @@
       </p:sp>
       <p:sp>
         <p:nvSpPr>
-          <p:cNvPr id="10" name="decor"/>
+          <p:cNvPr id="12" name="decor"/>
           <p:cNvSpPr/>
           <p:nvPr/>
         </p:nvSpPr>
@@ -25320,7 +25812,7 @@
                 <a:solidFill>
                   <a:schemeClr val="lt1"/>
                 </a:solidFill>
-                <a:latin typeface="Futura Medium"/>
+                <a:latin typeface="Arial"/>
               </a:rPr>
               <a:t>2</a:t>
             </a:r>
@@ -25329,7 +25821,7 @@
       </p:sp>
       <p:sp>
         <p:nvSpPr>
-          <p:cNvPr id="11" name="slot.process-step.3.title"/>
+          <p:cNvPr id="13" name="slot.process-step.3.title"/>
           <p:cNvSpPr/>
           <p:nvPr/>
         </p:nvSpPr>
@@ -25372,7 +25864,7 @@
                 <a:solidFill>
                   <a:schemeClr val="accent1"/>
                 </a:solidFill>
-                <a:latin typeface="Futura Medium"/>
+                <a:latin typeface="Arial"/>
               </a:rPr>
               <a:t>Step 3</a:t>
             </a:r>
@@ -25381,7 +25873,7 @@
       </p:sp>
       <p:sp>
         <p:nvSpPr>
-          <p:cNvPr id="12" name="slot.process-step.3.body"/>
+          <p:cNvPr id="14" name="slot.process-step.3.body"/>
           <p:cNvSpPr txBox="1"/>
           <p:nvPr/>
         </p:nvSpPr>
@@ -25416,7 +25908,7 @@
       </p:sp>
       <p:sp>
         <p:nvSpPr>
-          <p:cNvPr id="13" name="decor"/>
+          <p:cNvPr id="15" name="decor"/>
           <p:cNvSpPr/>
           <p:nvPr/>
         </p:nvSpPr>
@@ -25459,7 +25951,7 @@
                 <a:solidFill>
                   <a:schemeClr val="lt1"/>
                 </a:solidFill>
-                <a:latin typeface="Futura Medium"/>
+                <a:latin typeface="Arial"/>
               </a:rPr>
               <a:t>3</a:t>
             </a:r>
@@ -25468,7 +25960,7 @@
       </p:sp>
       <p:sp>
         <p:nvSpPr>
-          <p:cNvPr id="14" name="slot.process-step.4.title"/>
+          <p:cNvPr id="16" name="slot.process-step.4.title"/>
           <p:cNvSpPr/>
           <p:nvPr/>
         </p:nvSpPr>
@@ -25511,7 +26003,7 @@
                 <a:solidFill>
                   <a:schemeClr val="accent1"/>
                 </a:solidFill>
-                <a:latin typeface="Futura Medium"/>
+                <a:latin typeface="Arial"/>
               </a:rPr>
               <a:t>Step 4</a:t>
             </a:r>
@@ -25520,7 +26012,7 @@
       </p:sp>
       <p:sp>
         <p:nvSpPr>
-          <p:cNvPr id="15" name="slot.process-step.4.body"/>
+          <p:cNvPr id="17" name="slot.process-step.4.body"/>
           <p:cNvSpPr txBox="1"/>
           <p:nvPr/>
         </p:nvSpPr>
@@ -25555,7 +26047,7 @@
       </p:sp>
       <p:sp>
         <p:nvSpPr>
-          <p:cNvPr id="16" name="decor"/>
+          <p:cNvPr id="18" name="decor"/>
           <p:cNvSpPr/>
           <p:nvPr/>
         </p:nvSpPr>
@@ -25598,7 +26090,7 @@
                 <a:solidFill>
                   <a:schemeClr val="lt1"/>
                 </a:solidFill>
-                <a:latin typeface="Futura Medium"/>
+                <a:latin typeface="Arial"/>
               </a:rPr>
               <a:t>4</a:t>
             </a:r>
@@ -25607,7 +26099,7 @@
       </p:sp>
       <p:sp>
         <p:nvSpPr>
-          <p:cNvPr id="17" name="slot.process-step.5.title"/>
+          <p:cNvPr id="19" name="slot.process-step.5.title"/>
           <p:cNvSpPr/>
           <p:nvPr/>
         </p:nvSpPr>
@@ -25650,7 +26142,7 @@
                 <a:solidFill>
                   <a:schemeClr val="accent1"/>
                 </a:solidFill>
-                <a:latin typeface="Futura Medium"/>
+                <a:latin typeface="Arial"/>
               </a:rPr>
               <a:t>Step 5</a:t>
             </a:r>
@@ -25659,7 +26151,7 @@
       </p:sp>
       <p:sp>
         <p:nvSpPr>
-          <p:cNvPr id="18" name="slot.process-step.5.body"/>
+          <p:cNvPr id="20" name="slot.process-step.5.body"/>
           <p:cNvSpPr txBox="1"/>
           <p:nvPr/>
         </p:nvSpPr>
@@ -25694,7 +26186,7 @@
       </p:sp>
       <p:sp>
         <p:nvSpPr>
-          <p:cNvPr id="19" name="decor"/>
+          <p:cNvPr id="21" name="decor"/>
           <p:cNvSpPr/>
           <p:nvPr/>
         </p:nvSpPr>
@@ -25737,7 +26229,7 @@
                 <a:solidFill>
                   <a:schemeClr val="lt1"/>
                 </a:solidFill>
-                <a:latin typeface="Futura Medium"/>
+                <a:latin typeface="Arial"/>
               </a:rPr>
               <a:t>5</a:t>
             </a:r>
@@ -25818,7 +26310,130 @@
       </p:sp>
       <p:sp>
         <p:nvSpPr>
-          <p:cNvPr id="4" name="slot.title"/>
+          <p:cNvPr id="4" name="decor">
+            <a:extLst>
+              <a:ext uri="{FF2B5EF4-FFF2-40B4-BE49-F238E27FC236}">
+                <a16:creationId xmlns:a16="http://schemas.microsoft.com/office/drawing/2014/main" id="{9BCA9FA9-DC4A-F7F9-6F98-04EFCF05B790}"/>
+              </a:ext>
+            </a:extLst>
+          </p:cNvPr>
+          <p:cNvSpPr/>
+          <p:nvPr userDrawn="1"/>
+        </p:nvSpPr>
+        <p:spPr>
+          <a:xfrm>
+            <a:off x="-64731" y="246322"/>
+            <a:ext cx="512150" cy="423265"/>
+          </a:xfrm>
+          <a:prstGeom prst="pie">
+            <a:avLst>
+              <a:gd name="adj1" fmla="val 16190032"/>
+              <a:gd name="adj2" fmla="val 5400005"/>
+            </a:avLst>
+          </a:prstGeom>
+          <a:solidFill>
+            <a:schemeClr val="tx2"/>
+          </a:solidFill>
+          <a:ln>
+            <a:solidFill>
+              <a:schemeClr val="tx2"/>
+            </a:solidFill>
+          </a:ln>
+        </p:spPr>
+        <p:style>
+          <a:lnRef idx="2">
+            <a:schemeClr val="accent1">
+              <a:shade val="50000"/>
+            </a:schemeClr>
+          </a:lnRef>
+          <a:fillRef idx="1">
+            <a:schemeClr val="accent1"/>
+          </a:fillRef>
+          <a:effectRef idx="0">
+            <a:schemeClr val="accent1"/>
+          </a:effectRef>
+          <a:fontRef idx="minor">
+            <a:schemeClr val="lt1"/>
+          </a:fontRef>
+        </p:style>
+        <p:txBody>
+          <a:bodyPr lIns="36000" tIns="36000" rIns="36000" bIns="36000" rtlCol="0" anchor="ctr"/>
+          <a:lstStyle/>
+          <a:p>
+            <a:pPr algn="l" rtl="0"/>
+            <a:endParaRPr lang="en-US" sz="1200" b="1">
+              <a:solidFill>
+                <a:schemeClr val="bg1"/>
+              </a:solidFill>
+              <a:latin typeface="Arial" panose="020B0604020202020204" pitchFamily="34" charset="0"/>
+              <a:cs typeface="Arial" panose="020B0604020202020204" pitchFamily="34" charset="0"/>
+            </a:endParaRPr>
+          </a:p>
+        </p:txBody>
+      </p:sp>
+      <p:sp>
+        <p:nvSpPr>
+          <p:cNvPr id="5" name="decor">
+            <a:extLst>
+              <a:ext uri="{FF2B5EF4-FFF2-40B4-BE49-F238E27FC236}">
+                <a16:creationId xmlns:a16="http://schemas.microsoft.com/office/drawing/2014/main" id="{5D3B6E37-9E51-E62C-A843-852BEEBE5F2B}"/>
+              </a:ext>
+            </a:extLst>
+          </p:cNvPr>
+          <p:cNvSpPr/>
+          <p:nvPr userDrawn="1"/>
+        </p:nvSpPr>
+        <p:spPr>
+          <a:xfrm>
+            <a:off x="0" y="247761"/>
+            <a:ext cx="191344" cy="423265"/>
+          </a:xfrm>
+          <a:prstGeom prst="rect">
+            <a:avLst/>
+          </a:prstGeom>
+          <a:solidFill>
+            <a:schemeClr val="tx2"/>
+          </a:solidFill>
+          <a:ln>
+            <a:solidFill>
+              <a:schemeClr val="tx2"/>
+            </a:solidFill>
+          </a:ln>
+        </p:spPr>
+        <p:style>
+          <a:lnRef idx="2">
+            <a:schemeClr val="accent1">
+              <a:shade val="50000"/>
+            </a:schemeClr>
+          </a:lnRef>
+          <a:fillRef idx="1">
+            <a:schemeClr val="accent1"/>
+          </a:fillRef>
+          <a:effectRef idx="0">
+            <a:schemeClr val="accent1"/>
+          </a:effectRef>
+          <a:fontRef idx="minor">
+            <a:schemeClr val="lt1"/>
+          </a:fontRef>
+        </p:style>
+        <p:txBody>
+          <a:bodyPr lIns="36000" tIns="36000" rIns="36000" bIns="36000" rtlCol="0" anchor="ctr"/>
+          <a:lstStyle/>
+          <a:p>
+            <a:pPr algn="l" rtl="0"/>
+            <a:endParaRPr lang="en-US" sz="1200" b="1">
+              <a:solidFill>
+                <a:schemeClr val="bg1"/>
+              </a:solidFill>
+              <a:latin typeface="Arial" panose="020B0604020202020204" pitchFamily="34" charset="0"/>
+              <a:cs typeface="Arial" panose="020B0604020202020204" pitchFamily="34" charset="0"/>
+            </a:endParaRPr>
+          </a:p>
+        </p:txBody>
+      </p:sp>
+      <p:sp>
+        <p:nvSpPr>
+          <p:cNvPr id="6" name="slot.title"/>
           <p:cNvSpPr txBox="1"/>
           <p:nvPr/>
         </p:nvSpPr>
@@ -25842,7 +26457,7 @@
             <a:r>
               <a:rPr sz="2200" b="1">
                 <a:solidFill>
-                  <a:schemeClr val="dk1"/>
+                  <a:schemeClr val="accent2"/>
                 </a:solidFill>
                 <a:latin typeface="Futura Medium"/>
               </a:rPr>
@@ -25853,7 +26468,7 @@
       </p:sp>
       <p:sp>
         <p:nvSpPr>
-          <p:cNvPr id="5" name="slot.kpi.1.value"/>
+          <p:cNvPr id="7" name="slot.kpi.1.value"/>
           <p:cNvSpPr txBox="1"/>
           <p:nvPr/>
         </p:nvSpPr>
@@ -25879,7 +26494,7 @@
                 <a:solidFill>
                   <a:schemeClr val="accent2"/>
                 </a:solidFill>
-                <a:latin typeface="Futura Medium"/>
+                <a:latin typeface="Arial"/>
               </a:rPr>
               <a:t>42%</a:t>
             </a:r>
@@ -25888,7 +26503,7 @@
       </p:sp>
       <p:sp>
         <p:nvSpPr>
-          <p:cNvPr id="6" name="slot.kpi.1.label"/>
+          <p:cNvPr id="8" name="slot.kpi.1.label"/>
           <p:cNvSpPr txBox="1"/>
           <p:nvPr/>
         </p:nvSpPr>
@@ -25914,7 +26529,7 @@
                 <a:solidFill>
                   <a:schemeClr val="dk1"/>
                 </a:solidFill>
-                <a:latin typeface="Futura Medium"/>
+                <a:latin typeface="Arial"/>
               </a:rPr>
               <a:t>Metric label</a:t>
             </a:r>
@@ -25923,7 +26538,7 @@
       </p:sp>
       <p:sp>
         <p:nvSpPr>
-          <p:cNvPr id="7" name="slot.kpi.1.body"/>
+          <p:cNvPr id="9" name="slot.kpi.1.body"/>
           <p:cNvSpPr txBox="1"/>
           <p:nvPr/>
         </p:nvSpPr>
@@ -25958,7 +26573,7 @@
       </p:sp>
       <p:sp>
         <p:nvSpPr>
-          <p:cNvPr id="8" name="decor"/>
+          <p:cNvPr id="10" name="decor"/>
           <p:cNvSpPr/>
           <p:nvPr/>
         </p:nvSpPr>
@@ -26001,7 +26616,7 @@
                 <a:solidFill>
                   <a:schemeClr val="lt1"/>
                 </a:solidFill>
-                <a:latin typeface="Futura Medium"/>
+                <a:latin typeface="Arial"/>
               </a:rPr>
               <a:t/>
             </a:r>
@@ -26010,7 +26625,7 @@
       </p:sp>
       <p:sp>
         <p:nvSpPr>
-          <p:cNvPr id="9" name="slot.kpi.2.value"/>
+          <p:cNvPr id="11" name="slot.kpi.2.value"/>
           <p:cNvSpPr txBox="1"/>
           <p:nvPr/>
         </p:nvSpPr>
@@ -26036,7 +26651,7 @@
                 <a:solidFill>
                   <a:schemeClr val="accent2"/>
                 </a:solidFill>
-                <a:latin typeface="Futura Medium"/>
+                <a:latin typeface="Arial"/>
               </a:rPr>
               <a:t>42%</a:t>
             </a:r>
@@ -26045,7 +26660,7 @@
       </p:sp>
       <p:sp>
         <p:nvSpPr>
-          <p:cNvPr id="10" name="slot.kpi.2.label"/>
+          <p:cNvPr id="12" name="slot.kpi.2.label"/>
           <p:cNvSpPr txBox="1"/>
           <p:nvPr/>
         </p:nvSpPr>
@@ -26071,7 +26686,7 @@
                 <a:solidFill>
                   <a:schemeClr val="dk1"/>
                 </a:solidFill>
-                <a:latin typeface="Futura Medium"/>
+                <a:latin typeface="Arial"/>
               </a:rPr>
               <a:t>Metric label</a:t>
             </a:r>
@@ -26080,7 +26695,7 @@
       </p:sp>
       <p:sp>
         <p:nvSpPr>
-          <p:cNvPr id="11" name="slot.kpi.2.body"/>
+          <p:cNvPr id="13" name="slot.kpi.2.body"/>
           <p:cNvSpPr txBox="1"/>
           <p:nvPr/>
         </p:nvSpPr>
@@ -26115,7 +26730,7 @@
       </p:sp>
       <p:sp>
         <p:nvSpPr>
-          <p:cNvPr id="12" name="decor"/>
+          <p:cNvPr id="14" name="decor"/>
           <p:cNvSpPr/>
           <p:nvPr/>
         </p:nvSpPr>
@@ -26158,7 +26773,7 @@
                 <a:solidFill>
                   <a:schemeClr val="lt1"/>
                 </a:solidFill>
-                <a:latin typeface="Futura Medium"/>
+                <a:latin typeface="Arial"/>
               </a:rPr>
               <a:t/>
             </a:r>
@@ -26167,7 +26782,7 @@
       </p:sp>
       <p:sp>
         <p:nvSpPr>
-          <p:cNvPr id="13" name="slot.kpi.3.value"/>
+          <p:cNvPr id="15" name="slot.kpi.3.value"/>
           <p:cNvSpPr txBox="1"/>
           <p:nvPr/>
         </p:nvSpPr>
@@ -26193,7 +26808,7 @@
                 <a:solidFill>
                   <a:schemeClr val="accent2"/>
                 </a:solidFill>
-                <a:latin typeface="Futura Medium"/>
+                <a:latin typeface="Arial"/>
               </a:rPr>
               <a:t>42%</a:t>
             </a:r>
@@ -26202,7 +26817,7 @@
       </p:sp>
       <p:sp>
         <p:nvSpPr>
-          <p:cNvPr id="14" name="slot.kpi.3.label"/>
+          <p:cNvPr id="16" name="slot.kpi.3.label"/>
           <p:cNvSpPr txBox="1"/>
           <p:nvPr/>
         </p:nvSpPr>
@@ -26228,7 +26843,7 @@
                 <a:solidFill>
                   <a:schemeClr val="dk1"/>
                 </a:solidFill>
-                <a:latin typeface="Futura Medium"/>
+                <a:latin typeface="Arial"/>
               </a:rPr>
               <a:t>Metric label</a:t>
             </a:r>
@@ -26237,7 +26852,7 @@
       </p:sp>
       <p:sp>
         <p:nvSpPr>
-          <p:cNvPr id="15" name="slot.kpi.3.body"/>
+          <p:cNvPr id="17" name="slot.kpi.3.body"/>
           <p:cNvSpPr txBox="1"/>
           <p:nvPr/>
         </p:nvSpPr>
@@ -26344,7 +26959,130 @@
       </p:sp>
       <p:sp>
         <p:nvSpPr>
-          <p:cNvPr id="4" name="slot.title"/>
+          <p:cNvPr id="4" name="decor">
+            <a:extLst>
+              <a:ext uri="{FF2B5EF4-FFF2-40B4-BE49-F238E27FC236}">
+                <a16:creationId xmlns:a16="http://schemas.microsoft.com/office/drawing/2014/main" id="{9BCA9FA9-DC4A-F7F9-6F98-04EFCF05B790}"/>
+              </a:ext>
+            </a:extLst>
+          </p:cNvPr>
+          <p:cNvSpPr/>
+          <p:nvPr userDrawn="1"/>
+        </p:nvSpPr>
+        <p:spPr>
+          <a:xfrm>
+            <a:off x="-64731" y="246322"/>
+            <a:ext cx="512150" cy="423265"/>
+          </a:xfrm>
+          <a:prstGeom prst="pie">
+            <a:avLst>
+              <a:gd name="adj1" fmla="val 16190032"/>
+              <a:gd name="adj2" fmla="val 5400005"/>
+            </a:avLst>
+          </a:prstGeom>
+          <a:solidFill>
+            <a:schemeClr val="tx2"/>
+          </a:solidFill>
+          <a:ln>
+            <a:solidFill>
+              <a:schemeClr val="tx2"/>
+            </a:solidFill>
+          </a:ln>
+        </p:spPr>
+        <p:style>
+          <a:lnRef idx="2">
+            <a:schemeClr val="accent1">
+              <a:shade val="50000"/>
+            </a:schemeClr>
+          </a:lnRef>
+          <a:fillRef idx="1">
+            <a:schemeClr val="accent1"/>
+          </a:fillRef>
+          <a:effectRef idx="0">
+            <a:schemeClr val="accent1"/>
+          </a:effectRef>
+          <a:fontRef idx="minor">
+            <a:schemeClr val="lt1"/>
+          </a:fontRef>
+        </p:style>
+        <p:txBody>
+          <a:bodyPr lIns="36000" tIns="36000" rIns="36000" bIns="36000" rtlCol="0" anchor="ctr"/>
+          <a:lstStyle/>
+          <a:p>
+            <a:pPr algn="l" rtl="0"/>
+            <a:endParaRPr lang="en-US" sz="1200" b="1">
+              <a:solidFill>
+                <a:schemeClr val="bg1"/>
+              </a:solidFill>
+              <a:latin typeface="Arial" panose="020B0604020202020204" pitchFamily="34" charset="0"/>
+              <a:cs typeface="Arial" panose="020B0604020202020204" pitchFamily="34" charset="0"/>
+            </a:endParaRPr>
+          </a:p>
+        </p:txBody>
+      </p:sp>
+      <p:sp>
+        <p:nvSpPr>
+          <p:cNvPr id="5" name="decor">
+            <a:extLst>
+              <a:ext uri="{FF2B5EF4-FFF2-40B4-BE49-F238E27FC236}">
+                <a16:creationId xmlns:a16="http://schemas.microsoft.com/office/drawing/2014/main" id="{5D3B6E37-9E51-E62C-A843-852BEEBE5F2B}"/>
+              </a:ext>
+            </a:extLst>
+          </p:cNvPr>
+          <p:cNvSpPr/>
+          <p:nvPr userDrawn="1"/>
+        </p:nvSpPr>
+        <p:spPr>
+          <a:xfrm>
+            <a:off x="0" y="247761"/>
+            <a:ext cx="191344" cy="423265"/>
+          </a:xfrm>
+          <a:prstGeom prst="rect">
+            <a:avLst/>
+          </a:prstGeom>
+          <a:solidFill>
+            <a:schemeClr val="tx2"/>
+          </a:solidFill>
+          <a:ln>
+            <a:solidFill>
+              <a:schemeClr val="tx2"/>
+            </a:solidFill>
+          </a:ln>
+        </p:spPr>
+        <p:style>
+          <a:lnRef idx="2">
+            <a:schemeClr val="accent1">
+              <a:shade val="50000"/>
+            </a:schemeClr>
+          </a:lnRef>
+          <a:fillRef idx="1">
+            <a:schemeClr val="accent1"/>
+          </a:fillRef>
+          <a:effectRef idx="0">
+            <a:schemeClr val="accent1"/>
+          </a:effectRef>
+          <a:fontRef idx="minor">
+            <a:schemeClr val="lt1"/>
+          </a:fontRef>
+        </p:style>
+        <p:txBody>
+          <a:bodyPr lIns="36000" tIns="36000" rIns="36000" bIns="36000" rtlCol="0" anchor="ctr"/>
+          <a:lstStyle/>
+          <a:p>
+            <a:pPr algn="l" rtl="0"/>
+            <a:endParaRPr lang="en-US" sz="1200" b="1">
+              <a:solidFill>
+                <a:schemeClr val="bg1"/>
+              </a:solidFill>
+              <a:latin typeface="Arial" panose="020B0604020202020204" pitchFamily="34" charset="0"/>
+              <a:cs typeface="Arial" panose="020B0604020202020204" pitchFamily="34" charset="0"/>
+            </a:endParaRPr>
+          </a:p>
+        </p:txBody>
+      </p:sp>
+      <p:sp>
+        <p:nvSpPr>
+          <p:cNvPr id="6" name="slot.title"/>
           <p:cNvSpPr txBox="1"/>
           <p:nvPr/>
         </p:nvSpPr>
@@ -26368,7 +27106,7 @@
             <a:r>
               <a:rPr sz="2200" b="1">
                 <a:solidFill>
-                  <a:schemeClr val="dk1"/>
+                  <a:schemeClr val="accent2"/>
                 </a:solidFill>
                 <a:latin typeface="Futura Medium"/>
               </a:rPr>
@@ -26379,7 +27117,7 @@
       </p:sp>
       <p:sp>
         <p:nvSpPr>
-          <p:cNvPr id="5" name="slot.kpi.1.value"/>
+          <p:cNvPr id="7" name="slot.kpi.1.value"/>
           <p:cNvSpPr txBox="1"/>
           <p:nvPr/>
         </p:nvSpPr>
@@ -26405,7 +27143,7 @@
                 <a:solidFill>
                   <a:schemeClr val="accent2"/>
                 </a:solidFill>
-                <a:latin typeface="Futura Medium"/>
+                <a:latin typeface="Arial"/>
               </a:rPr>
               <a:t>42%</a:t>
             </a:r>
@@ -26414,7 +27152,7 @@
       </p:sp>
       <p:sp>
         <p:nvSpPr>
-          <p:cNvPr id="6" name="slot.kpi.1.label"/>
+          <p:cNvPr id="8" name="slot.kpi.1.label"/>
           <p:cNvSpPr txBox="1"/>
           <p:nvPr/>
         </p:nvSpPr>
@@ -26440,7 +27178,7 @@
                 <a:solidFill>
                   <a:schemeClr val="dk1"/>
                 </a:solidFill>
-                <a:latin typeface="Futura Medium"/>
+                <a:latin typeface="Arial"/>
               </a:rPr>
               <a:t>Metric label</a:t>
             </a:r>
@@ -26449,7 +27187,7 @@
       </p:sp>
       <p:sp>
         <p:nvSpPr>
-          <p:cNvPr id="7" name="slot.kpi.1.body"/>
+          <p:cNvPr id="9" name="slot.kpi.1.body"/>
           <p:cNvSpPr txBox="1"/>
           <p:nvPr/>
         </p:nvSpPr>
@@ -26484,7 +27222,7 @@
       </p:sp>
       <p:sp>
         <p:nvSpPr>
-          <p:cNvPr id="8" name="decor"/>
+          <p:cNvPr id="10" name="decor"/>
           <p:cNvSpPr/>
           <p:nvPr/>
         </p:nvSpPr>
@@ -26527,7 +27265,7 @@
                 <a:solidFill>
                   <a:schemeClr val="lt1"/>
                 </a:solidFill>
-                <a:latin typeface="Futura Medium"/>
+                <a:latin typeface="Arial"/>
               </a:rPr>
               <a:t/>
             </a:r>
@@ -26536,7 +27274,7 @@
       </p:sp>
       <p:sp>
         <p:nvSpPr>
-          <p:cNvPr id="9" name="slot.kpi.2.value"/>
+          <p:cNvPr id="11" name="slot.kpi.2.value"/>
           <p:cNvSpPr txBox="1"/>
           <p:nvPr/>
         </p:nvSpPr>
@@ -26562,7 +27300,7 @@
                 <a:solidFill>
                   <a:schemeClr val="accent2"/>
                 </a:solidFill>
-                <a:latin typeface="Futura Medium"/>
+                <a:latin typeface="Arial"/>
               </a:rPr>
               <a:t>42%</a:t>
             </a:r>
@@ -26571,7 +27309,7 @@
       </p:sp>
       <p:sp>
         <p:nvSpPr>
-          <p:cNvPr id="10" name="slot.kpi.2.label"/>
+          <p:cNvPr id="12" name="slot.kpi.2.label"/>
           <p:cNvSpPr txBox="1"/>
           <p:nvPr/>
         </p:nvSpPr>
@@ -26597,7 +27335,7 @@
                 <a:solidFill>
                   <a:schemeClr val="dk1"/>
                 </a:solidFill>
-                <a:latin typeface="Futura Medium"/>
+                <a:latin typeface="Arial"/>
               </a:rPr>
               <a:t>Metric label</a:t>
             </a:r>
@@ -26606,7 +27344,7 @@
       </p:sp>
       <p:sp>
         <p:nvSpPr>
-          <p:cNvPr id="11" name="slot.kpi.2.body"/>
+          <p:cNvPr id="13" name="slot.kpi.2.body"/>
           <p:cNvSpPr txBox="1"/>
           <p:nvPr/>
         </p:nvSpPr>
@@ -26641,7 +27379,7 @@
       </p:sp>
       <p:sp>
         <p:nvSpPr>
-          <p:cNvPr id="12" name="decor"/>
+          <p:cNvPr id="14" name="decor"/>
           <p:cNvSpPr/>
           <p:nvPr/>
         </p:nvSpPr>
@@ -26684,7 +27422,7 @@
                 <a:solidFill>
                   <a:schemeClr val="lt1"/>
                 </a:solidFill>
-                <a:latin typeface="Futura Medium"/>
+                <a:latin typeface="Arial"/>
               </a:rPr>
               <a:t/>
             </a:r>
@@ -26693,7 +27431,7 @@
       </p:sp>
       <p:sp>
         <p:nvSpPr>
-          <p:cNvPr id="13" name="slot.kpi.3.value"/>
+          <p:cNvPr id="15" name="slot.kpi.3.value"/>
           <p:cNvSpPr txBox="1"/>
           <p:nvPr/>
         </p:nvSpPr>
@@ -26719,7 +27457,7 @@
                 <a:solidFill>
                   <a:schemeClr val="accent2"/>
                 </a:solidFill>
-                <a:latin typeface="Futura Medium"/>
+                <a:latin typeface="Arial"/>
               </a:rPr>
               <a:t>42%</a:t>
             </a:r>
@@ -26728,7 +27466,7 @@
       </p:sp>
       <p:sp>
         <p:nvSpPr>
-          <p:cNvPr id="14" name="slot.kpi.3.label"/>
+          <p:cNvPr id="16" name="slot.kpi.3.label"/>
           <p:cNvSpPr txBox="1"/>
           <p:nvPr/>
         </p:nvSpPr>
@@ -26754,7 +27492,7 @@
                 <a:solidFill>
                   <a:schemeClr val="dk1"/>
                 </a:solidFill>
-                <a:latin typeface="Futura Medium"/>
+                <a:latin typeface="Arial"/>
               </a:rPr>
               <a:t>Metric label</a:t>
             </a:r>
@@ -26763,7 +27501,7 @@
       </p:sp>
       <p:sp>
         <p:nvSpPr>
-          <p:cNvPr id="15" name="slot.kpi.3.body"/>
+          <p:cNvPr id="17" name="slot.kpi.3.body"/>
           <p:cNvSpPr txBox="1"/>
           <p:nvPr/>
         </p:nvSpPr>
@@ -26798,7 +27536,7 @@
       </p:sp>
       <p:sp>
         <p:nvSpPr>
-          <p:cNvPr id="16" name="decor"/>
+          <p:cNvPr id="18" name="decor"/>
           <p:cNvSpPr/>
           <p:nvPr/>
         </p:nvSpPr>
@@ -26841,7 +27579,7 @@
                 <a:solidFill>
                   <a:schemeClr val="lt1"/>
                 </a:solidFill>
-                <a:latin typeface="Futura Medium"/>
+                <a:latin typeface="Arial"/>
               </a:rPr>
               <a:t/>
             </a:r>
@@ -26850,7 +27588,7 @@
       </p:sp>
       <p:sp>
         <p:nvSpPr>
-          <p:cNvPr id="17" name="slot.kpi.4.value"/>
+          <p:cNvPr id="19" name="slot.kpi.4.value"/>
           <p:cNvSpPr txBox="1"/>
           <p:nvPr/>
         </p:nvSpPr>
@@ -26876,7 +27614,7 @@
                 <a:solidFill>
                   <a:schemeClr val="accent2"/>
                 </a:solidFill>
-                <a:latin typeface="Futura Medium"/>
+                <a:latin typeface="Arial"/>
               </a:rPr>
               <a:t>42%</a:t>
             </a:r>
@@ -26885,7 +27623,7 @@
       </p:sp>
       <p:sp>
         <p:nvSpPr>
-          <p:cNvPr id="18" name="slot.kpi.4.label"/>
+          <p:cNvPr id="20" name="slot.kpi.4.label"/>
           <p:cNvSpPr txBox="1"/>
           <p:nvPr/>
         </p:nvSpPr>
@@ -26911,7 +27649,7 @@
                 <a:solidFill>
                   <a:schemeClr val="dk1"/>
                 </a:solidFill>
-                <a:latin typeface="Futura Medium"/>
+                <a:latin typeface="Arial"/>
               </a:rPr>
               <a:t>Metric label</a:t>
             </a:r>
@@ -26920,7 +27658,7 @@
       </p:sp>
       <p:sp>
         <p:nvSpPr>
-          <p:cNvPr id="19" name="slot.kpi.4.body"/>
+          <p:cNvPr id="21" name="slot.kpi.4.body"/>
           <p:cNvSpPr txBox="1"/>
           <p:nvPr/>
         </p:nvSpPr>
@@ -27027,7 +27765,130 @@
       </p:sp>
       <p:sp>
         <p:nvSpPr>
-          <p:cNvPr id="4" name="slot.title"/>
+          <p:cNvPr id="4" name="decor">
+            <a:extLst>
+              <a:ext uri="{FF2B5EF4-FFF2-40B4-BE49-F238E27FC236}">
+                <a16:creationId xmlns:a16="http://schemas.microsoft.com/office/drawing/2014/main" id="{9BCA9FA9-DC4A-F7F9-6F98-04EFCF05B790}"/>
+              </a:ext>
+            </a:extLst>
+          </p:cNvPr>
+          <p:cNvSpPr/>
+          <p:nvPr userDrawn="1"/>
+        </p:nvSpPr>
+        <p:spPr>
+          <a:xfrm>
+            <a:off x="-64731" y="246322"/>
+            <a:ext cx="512150" cy="423265"/>
+          </a:xfrm>
+          <a:prstGeom prst="pie">
+            <a:avLst>
+              <a:gd name="adj1" fmla="val 16190032"/>
+              <a:gd name="adj2" fmla="val 5400005"/>
+            </a:avLst>
+          </a:prstGeom>
+          <a:solidFill>
+            <a:schemeClr val="tx2"/>
+          </a:solidFill>
+          <a:ln>
+            <a:solidFill>
+              <a:schemeClr val="tx2"/>
+            </a:solidFill>
+          </a:ln>
+        </p:spPr>
+        <p:style>
+          <a:lnRef idx="2">
+            <a:schemeClr val="accent1">
+              <a:shade val="50000"/>
+            </a:schemeClr>
+          </a:lnRef>
+          <a:fillRef idx="1">
+            <a:schemeClr val="accent1"/>
+          </a:fillRef>
+          <a:effectRef idx="0">
+            <a:schemeClr val="accent1"/>
+          </a:effectRef>
+          <a:fontRef idx="minor">
+            <a:schemeClr val="lt1"/>
+          </a:fontRef>
+        </p:style>
+        <p:txBody>
+          <a:bodyPr lIns="36000" tIns="36000" rIns="36000" bIns="36000" rtlCol="0" anchor="ctr"/>
+          <a:lstStyle/>
+          <a:p>
+            <a:pPr algn="l" rtl="0"/>
+            <a:endParaRPr lang="en-US" sz="1200" b="1">
+              <a:solidFill>
+                <a:schemeClr val="bg1"/>
+              </a:solidFill>
+              <a:latin typeface="Arial" panose="020B0604020202020204" pitchFamily="34" charset="0"/>
+              <a:cs typeface="Arial" panose="020B0604020202020204" pitchFamily="34" charset="0"/>
+            </a:endParaRPr>
+          </a:p>
+        </p:txBody>
+      </p:sp>
+      <p:sp>
+        <p:nvSpPr>
+          <p:cNvPr id="5" name="decor">
+            <a:extLst>
+              <a:ext uri="{FF2B5EF4-FFF2-40B4-BE49-F238E27FC236}">
+                <a16:creationId xmlns:a16="http://schemas.microsoft.com/office/drawing/2014/main" id="{5D3B6E37-9E51-E62C-A843-852BEEBE5F2B}"/>
+              </a:ext>
+            </a:extLst>
+          </p:cNvPr>
+          <p:cNvSpPr/>
+          <p:nvPr userDrawn="1"/>
+        </p:nvSpPr>
+        <p:spPr>
+          <a:xfrm>
+            <a:off x="0" y="247761"/>
+            <a:ext cx="191344" cy="423265"/>
+          </a:xfrm>
+          <a:prstGeom prst="rect">
+            <a:avLst/>
+          </a:prstGeom>
+          <a:solidFill>
+            <a:schemeClr val="tx2"/>
+          </a:solidFill>
+          <a:ln>
+            <a:solidFill>
+              <a:schemeClr val="tx2"/>
+            </a:solidFill>
+          </a:ln>
+        </p:spPr>
+        <p:style>
+          <a:lnRef idx="2">
+            <a:schemeClr val="accent1">
+              <a:shade val="50000"/>
+            </a:schemeClr>
+          </a:lnRef>
+          <a:fillRef idx="1">
+            <a:schemeClr val="accent1"/>
+          </a:fillRef>
+          <a:effectRef idx="0">
+            <a:schemeClr val="accent1"/>
+          </a:effectRef>
+          <a:fontRef idx="minor">
+            <a:schemeClr val="lt1"/>
+          </a:fontRef>
+        </p:style>
+        <p:txBody>
+          <a:bodyPr lIns="36000" tIns="36000" rIns="36000" bIns="36000" rtlCol="0" anchor="ctr"/>
+          <a:lstStyle/>
+          <a:p>
+            <a:pPr algn="l" rtl="0"/>
+            <a:endParaRPr lang="en-US" sz="1200" b="1">
+              <a:solidFill>
+                <a:schemeClr val="bg1"/>
+              </a:solidFill>
+              <a:latin typeface="Arial" panose="020B0604020202020204" pitchFamily="34" charset="0"/>
+              <a:cs typeface="Arial" panose="020B0604020202020204" pitchFamily="34" charset="0"/>
+            </a:endParaRPr>
+          </a:p>
+        </p:txBody>
+      </p:sp>
+      <p:sp>
+        <p:nvSpPr>
+          <p:cNvPr id="6" name="slot.title"/>
           <p:cNvSpPr txBox="1"/>
           <p:nvPr/>
         </p:nvSpPr>
@@ -27051,7 +27912,7 @@
             <a:r>
               <a:rPr sz="2200" b="1">
                 <a:solidFill>
-                  <a:schemeClr val="dk1"/>
+                  <a:schemeClr val="accent2"/>
                 </a:solidFill>
                 <a:latin typeface="Futura Medium"/>
               </a:rPr>
@@ -27062,7 +27923,7 @@
       </p:sp>
       <p:sp>
         <p:nvSpPr>
-          <p:cNvPr id="5" name="slot.kpi.1.value"/>
+          <p:cNvPr id="7" name="slot.kpi.1.value"/>
           <p:cNvSpPr txBox="1"/>
           <p:nvPr/>
         </p:nvSpPr>
@@ -27088,7 +27949,7 @@
                 <a:solidFill>
                   <a:schemeClr val="accent2"/>
                 </a:solidFill>
-                <a:latin typeface="Futura Medium"/>
+                <a:latin typeface="Arial"/>
               </a:rPr>
               <a:t>42%</a:t>
             </a:r>
@@ -27097,7 +27958,7 @@
       </p:sp>
       <p:sp>
         <p:nvSpPr>
-          <p:cNvPr id="6" name="slot.kpi.1.label"/>
+          <p:cNvPr id="8" name="slot.kpi.1.label"/>
           <p:cNvSpPr txBox="1"/>
           <p:nvPr/>
         </p:nvSpPr>
@@ -27123,7 +27984,7 @@
                 <a:solidFill>
                   <a:schemeClr val="dk1"/>
                 </a:solidFill>
-                <a:latin typeface="Futura Medium"/>
+                <a:latin typeface="Arial"/>
               </a:rPr>
               <a:t>Metric label</a:t>
             </a:r>
@@ -27132,7 +27993,7 @@
       </p:sp>
       <p:sp>
         <p:nvSpPr>
-          <p:cNvPr id="7" name="slot.kpi.1.body"/>
+          <p:cNvPr id="9" name="slot.kpi.1.body"/>
           <p:cNvSpPr txBox="1"/>
           <p:nvPr/>
         </p:nvSpPr>
@@ -27167,7 +28028,7 @@
       </p:sp>
       <p:sp>
         <p:nvSpPr>
-          <p:cNvPr id="8" name="decor"/>
+          <p:cNvPr id="10" name="decor"/>
           <p:cNvSpPr/>
           <p:nvPr/>
         </p:nvSpPr>
@@ -27210,7 +28071,7 @@
                 <a:solidFill>
                   <a:schemeClr val="lt1"/>
                 </a:solidFill>
-                <a:latin typeface="Futura Medium"/>
+                <a:latin typeface="Arial"/>
               </a:rPr>
               <a:t/>
             </a:r>
@@ -27219,7 +28080,7 @@
       </p:sp>
       <p:sp>
         <p:nvSpPr>
-          <p:cNvPr id="9" name="slot.kpi.2.value"/>
+          <p:cNvPr id="11" name="slot.kpi.2.value"/>
           <p:cNvSpPr txBox="1"/>
           <p:nvPr/>
         </p:nvSpPr>
@@ -27245,7 +28106,7 @@
                 <a:solidFill>
                   <a:schemeClr val="accent2"/>
                 </a:solidFill>
-                <a:latin typeface="Futura Medium"/>
+                <a:latin typeface="Arial"/>
               </a:rPr>
               <a:t>42%</a:t>
             </a:r>
@@ -27254,7 +28115,7 @@
       </p:sp>
       <p:sp>
         <p:nvSpPr>
-          <p:cNvPr id="10" name="slot.kpi.2.label"/>
+          <p:cNvPr id="12" name="slot.kpi.2.label"/>
           <p:cNvSpPr txBox="1"/>
           <p:nvPr/>
         </p:nvSpPr>
@@ -27280,7 +28141,7 @@
                 <a:solidFill>
                   <a:schemeClr val="dk1"/>
                 </a:solidFill>
-                <a:latin typeface="Futura Medium"/>
+                <a:latin typeface="Arial"/>
               </a:rPr>
               <a:t>Metric label</a:t>
             </a:r>
@@ -27289,7 +28150,7 @@
       </p:sp>
       <p:sp>
         <p:nvSpPr>
-          <p:cNvPr id="11" name="slot.kpi.2.body"/>
+          <p:cNvPr id="13" name="slot.kpi.2.body"/>
           <p:cNvSpPr txBox="1"/>
           <p:nvPr/>
         </p:nvSpPr>
@@ -27324,7 +28185,7 @@
       </p:sp>
       <p:sp>
         <p:nvSpPr>
-          <p:cNvPr id="12" name="decor"/>
+          <p:cNvPr id="14" name="decor"/>
           <p:cNvSpPr/>
           <p:nvPr/>
         </p:nvSpPr>
@@ -27367,7 +28228,7 @@
                 <a:solidFill>
                   <a:schemeClr val="lt1"/>
                 </a:solidFill>
-                <a:latin typeface="Futura Medium"/>
+                <a:latin typeface="Arial"/>
               </a:rPr>
               <a:t/>
             </a:r>
@@ -27376,7 +28237,7 @@
       </p:sp>
       <p:sp>
         <p:nvSpPr>
-          <p:cNvPr id="13" name="slot.kpi.3.value"/>
+          <p:cNvPr id="15" name="slot.kpi.3.value"/>
           <p:cNvSpPr txBox="1"/>
           <p:nvPr/>
         </p:nvSpPr>
@@ -27402,7 +28263,7 @@
                 <a:solidFill>
                   <a:schemeClr val="accent2"/>
                 </a:solidFill>
-                <a:latin typeface="Futura Medium"/>
+                <a:latin typeface="Arial"/>
               </a:rPr>
               <a:t>42%</a:t>
             </a:r>
@@ -27411,7 +28272,7 @@
       </p:sp>
       <p:sp>
         <p:nvSpPr>
-          <p:cNvPr id="14" name="slot.kpi.3.label"/>
+          <p:cNvPr id="16" name="slot.kpi.3.label"/>
           <p:cNvSpPr txBox="1"/>
           <p:nvPr/>
         </p:nvSpPr>
@@ -27437,7 +28298,7 @@
                 <a:solidFill>
                   <a:schemeClr val="dk1"/>
                 </a:solidFill>
-                <a:latin typeface="Futura Medium"/>
+                <a:latin typeface="Arial"/>
               </a:rPr>
               <a:t>Metric label</a:t>
             </a:r>
@@ -27446,7 +28307,7 @@
       </p:sp>
       <p:sp>
         <p:nvSpPr>
-          <p:cNvPr id="15" name="slot.kpi.3.body"/>
+          <p:cNvPr id="17" name="slot.kpi.3.body"/>
           <p:cNvSpPr txBox="1"/>
           <p:nvPr/>
         </p:nvSpPr>
@@ -27481,7 +28342,7 @@
       </p:sp>
       <p:sp>
         <p:nvSpPr>
-          <p:cNvPr id="16" name="decor"/>
+          <p:cNvPr id="18" name="decor"/>
           <p:cNvSpPr/>
           <p:nvPr/>
         </p:nvSpPr>
@@ -27524,7 +28385,7 @@
                 <a:solidFill>
                   <a:schemeClr val="lt1"/>
                 </a:solidFill>
-                <a:latin typeface="Futura Medium"/>
+                <a:latin typeface="Arial"/>
               </a:rPr>
               <a:t/>
             </a:r>
@@ -27533,7 +28394,7 @@
       </p:sp>
       <p:sp>
         <p:nvSpPr>
-          <p:cNvPr id="17" name="slot.kpi.4.value"/>
+          <p:cNvPr id="19" name="slot.kpi.4.value"/>
           <p:cNvSpPr txBox="1"/>
           <p:nvPr/>
         </p:nvSpPr>
@@ -27559,7 +28420,7 @@
                 <a:solidFill>
                   <a:schemeClr val="accent2"/>
                 </a:solidFill>
-                <a:latin typeface="Futura Medium"/>
+                <a:latin typeface="Arial"/>
               </a:rPr>
               <a:t>42%</a:t>
             </a:r>
@@ -27568,7 +28429,7 @@
       </p:sp>
       <p:sp>
         <p:nvSpPr>
-          <p:cNvPr id="18" name="slot.kpi.4.label"/>
+          <p:cNvPr id="20" name="slot.kpi.4.label"/>
           <p:cNvSpPr txBox="1"/>
           <p:nvPr/>
         </p:nvSpPr>
@@ -27594,7 +28455,7 @@
                 <a:solidFill>
                   <a:schemeClr val="dk1"/>
                 </a:solidFill>
-                <a:latin typeface="Futura Medium"/>
+                <a:latin typeface="Arial"/>
               </a:rPr>
               <a:t>Metric label</a:t>
             </a:r>
@@ -27603,7 +28464,7 @@
       </p:sp>
       <p:sp>
         <p:nvSpPr>
-          <p:cNvPr id="19" name="slot.kpi.4.body"/>
+          <p:cNvPr id="21" name="slot.kpi.4.body"/>
           <p:cNvSpPr txBox="1"/>
           <p:nvPr/>
         </p:nvSpPr>
@@ -27638,7 +28499,7 @@
       </p:sp>
       <p:sp>
         <p:nvSpPr>
-          <p:cNvPr id="20" name="decor"/>
+          <p:cNvPr id="22" name="decor"/>
           <p:cNvSpPr/>
           <p:nvPr/>
         </p:nvSpPr>
@@ -27681,7 +28542,7 @@
                 <a:solidFill>
                   <a:schemeClr val="lt1"/>
                 </a:solidFill>
-                <a:latin typeface="Futura Medium"/>
+                <a:latin typeface="Arial"/>
               </a:rPr>
               <a:t/>
             </a:r>
@@ -27690,7 +28551,7 @@
       </p:sp>
       <p:sp>
         <p:nvSpPr>
-          <p:cNvPr id="21" name="slot.kpi.5.value"/>
+          <p:cNvPr id="23" name="slot.kpi.5.value"/>
           <p:cNvSpPr txBox="1"/>
           <p:nvPr/>
         </p:nvSpPr>
@@ -27716,7 +28577,7 @@
                 <a:solidFill>
                   <a:schemeClr val="accent2"/>
                 </a:solidFill>
-                <a:latin typeface="Futura Medium"/>
+                <a:latin typeface="Arial"/>
               </a:rPr>
               <a:t>42%</a:t>
             </a:r>
@@ -27725,7 +28586,7 @@
       </p:sp>
       <p:sp>
         <p:nvSpPr>
-          <p:cNvPr id="22" name="slot.kpi.5.label"/>
+          <p:cNvPr id="24" name="slot.kpi.5.label"/>
           <p:cNvSpPr txBox="1"/>
           <p:nvPr/>
         </p:nvSpPr>
@@ -27751,7 +28612,7 @@
                 <a:solidFill>
                   <a:schemeClr val="dk1"/>
                 </a:solidFill>
-                <a:latin typeface="Futura Medium"/>
+                <a:latin typeface="Arial"/>
               </a:rPr>
               <a:t>Metric label</a:t>
             </a:r>
@@ -27760,7 +28621,7 @@
       </p:sp>
       <p:sp>
         <p:nvSpPr>
-          <p:cNvPr id="23" name="slot.kpi.5.body"/>
+          <p:cNvPr id="25" name="slot.kpi.5.body"/>
           <p:cNvSpPr txBox="1"/>
           <p:nvPr/>
         </p:nvSpPr>
@@ -27867,7 +28728,130 @@
       </p:sp>
       <p:sp>
         <p:nvSpPr>
-          <p:cNvPr id="4" name="slot.title"/>
+          <p:cNvPr id="4" name="decor">
+            <a:extLst>
+              <a:ext uri="{FF2B5EF4-FFF2-40B4-BE49-F238E27FC236}">
+                <a16:creationId xmlns:a16="http://schemas.microsoft.com/office/drawing/2014/main" id="{9BCA9FA9-DC4A-F7F9-6F98-04EFCF05B790}"/>
+              </a:ext>
+            </a:extLst>
+          </p:cNvPr>
+          <p:cNvSpPr/>
+          <p:nvPr userDrawn="1"/>
+        </p:nvSpPr>
+        <p:spPr>
+          <a:xfrm>
+            <a:off x="-64731" y="246322"/>
+            <a:ext cx="512150" cy="423265"/>
+          </a:xfrm>
+          <a:prstGeom prst="pie">
+            <a:avLst>
+              <a:gd name="adj1" fmla="val 16190032"/>
+              <a:gd name="adj2" fmla="val 5400005"/>
+            </a:avLst>
+          </a:prstGeom>
+          <a:solidFill>
+            <a:schemeClr val="tx2"/>
+          </a:solidFill>
+          <a:ln>
+            <a:solidFill>
+              <a:schemeClr val="tx2"/>
+            </a:solidFill>
+          </a:ln>
+        </p:spPr>
+        <p:style>
+          <a:lnRef idx="2">
+            <a:schemeClr val="accent1">
+              <a:shade val="50000"/>
+            </a:schemeClr>
+          </a:lnRef>
+          <a:fillRef idx="1">
+            <a:schemeClr val="accent1"/>
+          </a:fillRef>
+          <a:effectRef idx="0">
+            <a:schemeClr val="accent1"/>
+          </a:effectRef>
+          <a:fontRef idx="minor">
+            <a:schemeClr val="lt1"/>
+          </a:fontRef>
+        </p:style>
+        <p:txBody>
+          <a:bodyPr lIns="36000" tIns="36000" rIns="36000" bIns="36000" rtlCol="0" anchor="ctr"/>
+          <a:lstStyle/>
+          <a:p>
+            <a:pPr algn="l" rtl="0"/>
+            <a:endParaRPr lang="en-US" sz="1200" b="1">
+              <a:solidFill>
+                <a:schemeClr val="bg1"/>
+              </a:solidFill>
+              <a:latin typeface="Arial" panose="020B0604020202020204" pitchFamily="34" charset="0"/>
+              <a:cs typeface="Arial" panose="020B0604020202020204" pitchFamily="34" charset="0"/>
+            </a:endParaRPr>
+          </a:p>
+        </p:txBody>
+      </p:sp>
+      <p:sp>
+        <p:nvSpPr>
+          <p:cNvPr id="5" name="decor">
+            <a:extLst>
+              <a:ext uri="{FF2B5EF4-FFF2-40B4-BE49-F238E27FC236}">
+                <a16:creationId xmlns:a16="http://schemas.microsoft.com/office/drawing/2014/main" id="{5D3B6E37-9E51-E62C-A843-852BEEBE5F2B}"/>
+              </a:ext>
+            </a:extLst>
+          </p:cNvPr>
+          <p:cNvSpPr/>
+          <p:nvPr userDrawn="1"/>
+        </p:nvSpPr>
+        <p:spPr>
+          <a:xfrm>
+            <a:off x="0" y="247761"/>
+            <a:ext cx="191344" cy="423265"/>
+          </a:xfrm>
+          <a:prstGeom prst="rect">
+            <a:avLst/>
+          </a:prstGeom>
+          <a:solidFill>
+            <a:schemeClr val="tx2"/>
+          </a:solidFill>
+          <a:ln>
+            <a:solidFill>
+              <a:schemeClr val="tx2"/>
+            </a:solidFill>
+          </a:ln>
+        </p:spPr>
+        <p:style>
+          <a:lnRef idx="2">
+            <a:schemeClr val="accent1">
+              <a:shade val="50000"/>
+            </a:schemeClr>
+          </a:lnRef>
+          <a:fillRef idx="1">
+            <a:schemeClr val="accent1"/>
+          </a:fillRef>
+          <a:effectRef idx="0">
+            <a:schemeClr val="accent1"/>
+          </a:effectRef>
+          <a:fontRef idx="minor">
+            <a:schemeClr val="lt1"/>
+          </a:fontRef>
+        </p:style>
+        <p:txBody>
+          <a:bodyPr lIns="36000" tIns="36000" rIns="36000" bIns="36000" rtlCol="0" anchor="ctr"/>
+          <a:lstStyle/>
+          <a:p>
+            <a:pPr algn="l" rtl="0"/>
+            <a:endParaRPr lang="en-US" sz="1200" b="1">
+              <a:solidFill>
+                <a:schemeClr val="bg1"/>
+              </a:solidFill>
+              <a:latin typeface="Arial" panose="020B0604020202020204" pitchFamily="34" charset="0"/>
+              <a:cs typeface="Arial" panose="020B0604020202020204" pitchFamily="34" charset="0"/>
+            </a:endParaRPr>
+          </a:p>
+        </p:txBody>
+      </p:sp>
+      <p:sp>
+        <p:nvSpPr>
+          <p:cNvPr id="6" name="slot.title"/>
           <p:cNvSpPr txBox="1"/>
           <p:nvPr/>
         </p:nvSpPr>
@@ -27891,7 +28875,7 @@
             <a:r>
               <a:rPr sz="2200" b="1">
                 <a:solidFill>
-                  <a:schemeClr val="dk1"/>
+                  <a:schemeClr val="accent2"/>
                 </a:solidFill>
                 <a:latin typeface="Futura Medium"/>
               </a:rPr>
@@ -27902,7 +28886,7 @@
       </p:sp>
       <p:sp>
         <p:nvSpPr>
-          <p:cNvPr id="5" name="slot.funnel-stage.1.title"/>
+          <p:cNvPr id="7" name="slot.funnel-stage.1.title"/>
           <p:cNvSpPr/>
           <p:nvPr/>
         </p:nvSpPr>
@@ -27945,7 +28929,7 @@
                 <a:solidFill>
                   <a:schemeClr val="lt1"/>
                 </a:solidFill>
-                <a:latin typeface="Futura Medium"/>
+                <a:latin typeface="Arial"/>
               </a:rPr>
               <a:t>Stage 1</a:t>
             </a:r>
@@ -27954,7 +28938,7 @@
       </p:sp>
       <p:sp>
         <p:nvSpPr>
-          <p:cNvPr id="6" name="slot.funnel-stage.1.body"/>
+          <p:cNvPr id="8" name="slot.funnel-stage.1.body"/>
           <p:cNvSpPr txBox="1"/>
           <p:nvPr/>
         </p:nvSpPr>
@@ -27989,7 +28973,7 @@
       </p:sp>
       <p:sp>
         <p:nvSpPr>
-          <p:cNvPr id="7" name="slot.funnel-stage.2.title"/>
+          <p:cNvPr id="9" name="slot.funnel-stage.2.title"/>
           <p:cNvSpPr/>
           <p:nvPr/>
         </p:nvSpPr>
@@ -28032,7 +29016,7 @@
                 <a:solidFill>
                   <a:schemeClr val="lt1"/>
                 </a:solidFill>
-                <a:latin typeface="Futura Medium"/>
+                <a:latin typeface="Arial"/>
               </a:rPr>
               <a:t>Stage 2</a:t>
             </a:r>
@@ -28041,7 +29025,7 @@
       </p:sp>
       <p:sp>
         <p:nvSpPr>
-          <p:cNvPr id="8" name="slot.funnel-stage.2.body"/>
+          <p:cNvPr id="10" name="slot.funnel-stage.2.body"/>
           <p:cNvSpPr txBox="1"/>
           <p:nvPr/>
         </p:nvSpPr>
@@ -28076,7 +29060,7 @@
       </p:sp>
       <p:sp>
         <p:nvSpPr>
-          <p:cNvPr id="9" name="slot.funnel-stage.3.title"/>
+          <p:cNvPr id="11" name="slot.funnel-stage.3.title"/>
           <p:cNvSpPr/>
           <p:nvPr/>
         </p:nvSpPr>
@@ -28119,7 +29103,7 @@
                 <a:solidFill>
                   <a:schemeClr val="lt1"/>
                 </a:solidFill>
-                <a:latin typeface="Futura Medium"/>
+                <a:latin typeface="Arial"/>
               </a:rPr>
               <a:t>Stage 3</a:t>
             </a:r>
@@ -28128,7 +29112,7 @@
       </p:sp>
       <p:sp>
         <p:nvSpPr>
-          <p:cNvPr id="10" name="slot.funnel-stage.3.body"/>
+          <p:cNvPr id="12" name="slot.funnel-stage.3.body"/>
           <p:cNvSpPr txBox="1"/>
           <p:nvPr/>
         </p:nvSpPr>
@@ -28235,7 +29219,130 @@
       </p:sp>
       <p:sp>
         <p:nvSpPr>
-          <p:cNvPr id="4" name="slot.title"/>
+          <p:cNvPr id="4" name="decor">
+            <a:extLst>
+              <a:ext uri="{FF2B5EF4-FFF2-40B4-BE49-F238E27FC236}">
+                <a16:creationId xmlns:a16="http://schemas.microsoft.com/office/drawing/2014/main" id="{9BCA9FA9-DC4A-F7F9-6F98-04EFCF05B790}"/>
+              </a:ext>
+            </a:extLst>
+          </p:cNvPr>
+          <p:cNvSpPr/>
+          <p:nvPr userDrawn="1"/>
+        </p:nvSpPr>
+        <p:spPr>
+          <a:xfrm>
+            <a:off x="-64731" y="246322"/>
+            <a:ext cx="512150" cy="423265"/>
+          </a:xfrm>
+          <a:prstGeom prst="pie">
+            <a:avLst>
+              <a:gd name="adj1" fmla="val 16190032"/>
+              <a:gd name="adj2" fmla="val 5400005"/>
+            </a:avLst>
+          </a:prstGeom>
+          <a:solidFill>
+            <a:schemeClr val="tx2"/>
+          </a:solidFill>
+          <a:ln>
+            <a:solidFill>
+              <a:schemeClr val="tx2"/>
+            </a:solidFill>
+          </a:ln>
+        </p:spPr>
+        <p:style>
+          <a:lnRef idx="2">
+            <a:schemeClr val="accent1">
+              <a:shade val="50000"/>
+            </a:schemeClr>
+          </a:lnRef>
+          <a:fillRef idx="1">
+            <a:schemeClr val="accent1"/>
+          </a:fillRef>
+          <a:effectRef idx="0">
+            <a:schemeClr val="accent1"/>
+          </a:effectRef>
+          <a:fontRef idx="minor">
+            <a:schemeClr val="lt1"/>
+          </a:fontRef>
+        </p:style>
+        <p:txBody>
+          <a:bodyPr lIns="36000" tIns="36000" rIns="36000" bIns="36000" rtlCol="0" anchor="ctr"/>
+          <a:lstStyle/>
+          <a:p>
+            <a:pPr algn="l" rtl="0"/>
+            <a:endParaRPr lang="en-US" sz="1200" b="1">
+              <a:solidFill>
+                <a:schemeClr val="bg1"/>
+              </a:solidFill>
+              <a:latin typeface="Arial" panose="020B0604020202020204" pitchFamily="34" charset="0"/>
+              <a:cs typeface="Arial" panose="020B0604020202020204" pitchFamily="34" charset="0"/>
+            </a:endParaRPr>
+          </a:p>
+        </p:txBody>
+      </p:sp>
+      <p:sp>
+        <p:nvSpPr>
+          <p:cNvPr id="5" name="decor">
+            <a:extLst>
+              <a:ext uri="{FF2B5EF4-FFF2-40B4-BE49-F238E27FC236}">
+                <a16:creationId xmlns:a16="http://schemas.microsoft.com/office/drawing/2014/main" id="{5D3B6E37-9E51-E62C-A843-852BEEBE5F2B}"/>
+              </a:ext>
+            </a:extLst>
+          </p:cNvPr>
+          <p:cNvSpPr/>
+          <p:nvPr userDrawn="1"/>
+        </p:nvSpPr>
+        <p:spPr>
+          <a:xfrm>
+            <a:off x="0" y="247761"/>
+            <a:ext cx="191344" cy="423265"/>
+          </a:xfrm>
+          <a:prstGeom prst="rect">
+            <a:avLst/>
+          </a:prstGeom>
+          <a:solidFill>
+            <a:schemeClr val="tx2"/>
+          </a:solidFill>
+          <a:ln>
+            <a:solidFill>
+              <a:schemeClr val="tx2"/>
+            </a:solidFill>
+          </a:ln>
+        </p:spPr>
+        <p:style>
+          <a:lnRef idx="2">
+            <a:schemeClr val="accent1">
+              <a:shade val="50000"/>
+            </a:schemeClr>
+          </a:lnRef>
+          <a:fillRef idx="1">
+            <a:schemeClr val="accent1"/>
+          </a:fillRef>
+          <a:effectRef idx="0">
+            <a:schemeClr val="accent1"/>
+          </a:effectRef>
+          <a:fontRef idx="minor">
+            <a:schemeClr val="lt1"/>
+          </a:fontRef>
+        </p:style>
+        <p:txBody>
+          <a:bodyPr lIns="36000" tIns="36000" rIns="36000" bIns="36000" rtlCol="0" anchor="ctr"/>
+          <a:lstStyle/>
+          <a:p>
+            <a:pPr algn="l" rtl="0"/>
+            <a:endParaRPr lang="en-US" sz="1200" b="1">
+              <a:solidFill>
+                <a:schemeClr val="bg1"/>
+              </a:solidFill>
+              <a:latin typeface="Arial" panose="020B0604020202020204" pitchFamily="34" charset="0"/>
+              <a:cs typeface="Arial" panose="020B0604020202020204" pitchFamily="34" charset="0"/>
+            </a:endParaRPr>
+          </a:p>
+        </p:txBody>
+      </p:sp>
+      <p:sp>
+        <p:nvSpPr>
+          <p:cNvPr id="6" name="slot.title"/>
           <p:cNvSpPr txBox="1"/>
           <p:nvPr/>
         </p:nvSpPr>
@@ -28259,7 +29366,7 @@
             <a:r>
               <a:rPr sz="2200" b="1">
                 <a:solidFill>
-                  <a:schemeClr val="dk1"/>
+                  <a:schemeClr val="accent2"/>
                 </a:solidFill>
                 <a:latin typeface="Futura Medium"/>
               </a:rPr>
@@ -28270,7 +29377,7 @@
       </p:sp>
       <p:sp>
         <p:nvSpPr>
-          <p:cNvPr id="5" name="slot.funnel-stage.1.title"/>
+          <p:cNvPr id="7" name="slot.funnel-stage.1.title"/>
           <p:cNvSpPr/>
           <p:nvPr/>
         </p:nvSpPr>
@@ -28313,7 +29420,7 @@
                 <a:solidFill>
                   <a:schemeClr val="lt1"/>
                 </a:solidFill>
-                <a:latin typeface="Futura Medium"/>
+                <a:latin typeface="Arial"/>
               </a:rPr>
               <a:t>Stage 1</a:t>
             </a:r>
@@ -28322,7 +29429,7 @@
       </p:sp>
       <p:sp>
         <p:nvSpPr>
-          <p:cNvPr id="6" name="slot.funnel-stage.1.body"/>
+          <p:cNvPr id="8" name="slot.funnel-stage.1.body"/>
           <p:cNvSpPr txBox="1"/>
           <p:nvPr/>
         </p:nvSpPr>
@@ -28357,7 +29464,7 @@
       </p:sp>
       <p:sp>
         <p:nvSpPr>
-          <p:cNvPr id="7" name="slot.funnel-stage.2.title"/>
+          <p:cNvPr id="9" name="slot.funnel-stage.2.title"/>
           <p:cNvSpPr/>
           <p:nvPr/>
         </p:nvSpPr>
@@ -28400,7 +29507,7 @@
                 <a:solidFill>
                   <a:schemeClr val="lt1"/>
                 </a:solidFill>
-                <a:latin typeface="Futura Medium"/>
+                <a:latin typeface="Arial"/>
               </a:rPr>
               <a:t>Stage 2</a:t>
             </a:r>
@@ -28409,7 +29516,7 @@
       </p:sp>
       <p:sp>
         <p:nvSpPr>
-          <p:cNvPr id="8" name="slot.funnel-stage.2.body"/>
+          <p:cNvPr id="10" name="slot.funnel-stage.2.body"/>
           <p:cNvSpPr txBox="1"/>
           <p:nvPr/>
         </p:nvSpPr>
@@ -28444,7 +29551,7 @@
       </p:sp>
       <p:sp>
         <p:nvSpPr>
-          <p:cNvPr id="9" name="slot.funnel-stage.3.title"/>
+          <p:cNvPr id="11" name="slot.funnel-stage.3.title"/>
           <p:cNvSpPr/>
           <p:nvPr/>
         </p:nvSpPr>
@@ -28487,7 +29594,7 @@
                 <a:solidFill>
                   <a:schemeClr val="lt1"/>
                 </a:solidFill>
-                <a:latin typeface="Futura Medium"/>
+                <a:latin typeface="Arial"/>
               </a:rPr>
               <a:t>Stage 3</a:t>
             </a:r>
@@ -28496,7 +29603,7 @@
       </p:sp>
       <p:sp>
         <p:nvSpPr>
-          <p:cNvPr id="10" name="slot.funnel-stage.3.body"/>
+          <p:cNvPr id="12" name="slot.funnel-stage.3.body"/>
           <p:cNvSpPr txBox="1"/>
           <p:nvPr/>
         </p:nvSpPr>
@@ -28531,7 +29638,7 @@
       </p:sp>
       <p:sp>
         <p:nvSpPr>
-          <p:cNvPr id="11" name="slot.funnel-stage.4.title"/>
+          <p:cNvPr id="13" name="slot.funnel-stage.4.title"/>
           <p:cNvSpPr/>
           <p:nvPr/>
         </p:nvSpPr>
@@ -28574,7 +29681,7 @@
                 <a:solidFill>
                   <a:schemeClr val="lt1"/>
                 </a:solidFill>
-                <a:latin typeface="Futura Medium"/>
+                <a:latin typeface="Arial"/>
               </a:rPr>
               <a:t>Stage 4</a:t>
             </a:r>
@@ -28583,7 +29690,7 @@
       </p:sp>
       <p:sp>
         <p:nvSpPr>
-          <p:cNvPr id="12" name="slot.funnel-stage.4.body"/>
+          <p:cNvPr id="14" name="slot.funnel-stage.4.body"/>
           <p:cNvSpPr txBox="1"/>
           <p:nvPr/>
         </p:nvSpPr>
@@ -28690,7 +29797,130 @@
       </p:sp>
       <p:sp>
         <p:nvSpPr>
-          <p:cNvPr id="4" name="slot.title"/>
+          <p:cNvPr id="4" name="decor">
+            <a:extLst>
+              <a:ext uri="{FF2B5EF4-FFF2-40B4-BE49-F238E27FC236}">
+                <a16:creationId xmlns:a16="http://schemas.microsoft.com/office/drawing/2014/main" id="{9BCA9FA9-DC4A-F7F9-6F98-04EFCF05B790}"/>
+              </a:ext>
+            </a:extLst>
+          </p:cNvPr>
+          <p:cNvSpPr/>
+          <p:nvPr userDrawn="1"/>
+        </p:nvSpPr>
+        <p:spPr>
+          <a:xfrm>
+            <a:off x="-64731" y="246322"/>
+            <a:ext cx="512150" cy="423265"/>
+          </a:xfrm>
+          <a:prstGeom prst="pie">
+            <a:avLst>
+              <a:gd name="adj1" fmla="val 16190032"/>
+              <a:gd name="adj2" fmla="val 5400005"/>
+            </a:avLst>
+          </a:prstGeom>
+          <a:solidFill>
+            <a:schemeClr val="tx2"/>
+          </a:solidFill>
+          <a:ln>
+            <a:solidFill>
+              <a:schemeClr val="tx2"/>
+            </a:solidFill>
+          </a:ln>
+        </p:spPr>
+        <p:style>
+          <a:lnRef idx="2">
+            <a:schemeClr val="accent1">
+              <a:shade val="50000"/>
+            </a:schemeClr>
+          </a:lnRef>
+          <a:fillRef idx="1">
+            <a:schemeClr val="accent1"/>
+          </a:fillRef>
+          <a:effectRef idx="0">
+            <a:schemeClr val="accent1"/>
+          </a:effectRef>
+          <a:fontRef idx="minor">
+            <a:schemeClr val="lt1"/>
+          </a:fontRef>
+        </p:style>
+        <p:txBody>
+          <a:bodyPr lIns="36000" tIns="36000" rIns="36000" bIns="36000" rtlCol="0" anchor="ctr"/>
+          <a:lstStyle/>
+          <a:p>
+            <a:pPr algn="l" rtl="0"/>
+            <a:endParaRPr lang="en-US" sz="1200" b="1">
+              <a:solidFill>
+                <a:schemeClr val="bg1"/>
+              </a:solidFill>
+              <a:latin typeface="Arial" panose="020B0604020202020204" pitchFamily="34" charset="0"/>
+              <a:cs typeface="Arial" panose="020B0604020202020204" pitchFamily="34" charset="0"/>
+            </a:endParaRPr>
+          </a:p>
+        </p:txBody>
+      </p:sp>
+      <p:sp>
+        <p:nvSpPr>
+          <p:cNvPr id="5" name="decor">
+            <a:extLst>
+              <a:ext uri="{FF2B5EF4-FFF2-40B4-BE49-F238E27FC236}">
+                <a16:creationId xmlns:a16="http://schemas.microsoft.com/office/drawing/2014/main" id="{5D3B6E37-9E51-E62C-A843-852BEEBE5F2B}"/>
+              </a:ext>
+            </a:extLst>
+          </p:cNvPr>
+          <p:cNvSpPr/>
+          <p:nvPr userDrawn="1"/>
+        </p:nvSpPr>
+        <p:spPr>
+          <a:xfrm>
+            <a:off x="0" y="247761"/>
+            <a:ext cx="191344" cy="423265"/>
+          </a:xfrm>
+          <a:prstGeom prst="rect">
+            <a:avLst/>
+          </a:prstGeom>
+          <a:solidFill>
+            <a:schemeClr val="tx2"/>
+          </a:solidFill>
+          <a:ln>
+            <a:solidFill>
+              <a:schemeClr val="tx2"/>
+            </a:solidFill>
+          </a:ln>
+        </p:spPr>
+        <p:style>
+          <a:lnRef idx="2">
+            <a:schemeClr val="accent1">
+              <a:shade val="50000"/>
+            </a:schemeClr>
+          </a:lnRef>
+          <a:fillRef idx="1">
+            <a:schemeClr val="accent1"/>
+          </a:fillRef>
+          <a:effectRef idx="0">
+            <a:schemeClr val="accent1"/>
+          </a:effectRef>
+          <a:fontRef idx="minor">
+            <a:schemeClr val="lt1"/>
+          </a:fontRef>
+        </p:style>
+        <p:txBody>
+          <a:bodyPr lIns="36000" tIns="36000" rIns="36000" bIns="36000" rtlCol="0" anchor="ctr"/>
+          <a:lstStyle/>
+          <a:p>
+            <a:pPr algn="l" rtl="0"/>
+            <a:endParaRPr lang="en-US" sz="1200" b="1">
+              <a:solidFill>
+                <a:schemeClr val="bg1"/>
+              </a:solidFill>
+              <a:latin typeface="Arial" panose="020B0604020202020204" pitchFamily="34" charset="0"/>
+              <a:cs typeface="Arial" panose="020B0604020202020204" pitchFamily="34" charset="0"/>
+            </a:endParaRPr>
+          </a:p>
+        </p:txBody>
+      </p:sp>
+      <p:sp>
+        <p:nvSpPr>
+          <p:cNvPr id="6" name="slot.title"/>
           <p:cNvSpPr txBox="1"/>
           <p:nvPr/>
         </p:nvSpPr>
@@ -28714,7 +29944,7 @@
             <a:r>
               <a:rPr sz="2200" b="1">
                 <a:solidFill>
-                  <a:schemeClr val="dk1"/>
+                  <a:schemeClr val="accent2"/>
                 </a:solidFill>
                 <a:latin typeface="Futura Medium"/>
               </a:rPr>
@@ -28725,7 +29955,7 @@
       </p:sp>
       <p:sp>
         <p:nvSpPr>
-          <p:cNvPr id="5" name="slot.funnel-stage.1.title"/>
+          <p:cNvPr id="7" name="slot.funnel-stage.1.title"/>
           <p:cNvSpPr/>
           <p:nvPr/>
         </p:nvSpPr>
@@ -28768,7 +29998,7 @@
                 <a:solidFill>
                   <a:schemeClr val="lt1"/>
                 </a:solidFill>
-                <a:latin typeface="Futura Medium"/>
+                <a:latin typeface="Arial"/>
               </a:rPr>
               <a:t>Stage 1</a:t>
             </a:r>
@@ -28777,7 +30007,7 @@
       </p:sp>
       <p:sp>
         <p:nvSpPr>
-          <p:cNvPr id="6" name="slot.funnel-stage.1.body"/>
+          <p:cNvPr id="8" name="slot.funnel-stage.1.body"/>
           <p:cNvSpPr txBox="1"/>
           <p:nvPr/>
         </p:nvSpPr>
@@ -28812,7 +30042,7 @@
       </p:sp>
       <p:sp>
         <p:nvSpPr>
-          <p:cNvPr id="7" name="slot.funnel-stage.2.title"/>
+          <p:cNvPr id="9" name="slot.funnel-stage.2.title"/>
           <p:cNvSpPr/>
           <p:nvPr/>
         </p:nvSpPr>
@@ -28855,7 +30085,7 @@
                 <a:solidFill>
                   <a:schemeClr val="lt1"/>
                 </a:solidFill>
-                <a:latin typeface="Futura Medium"/>
+                <a:latin typeface="Arial"/>
               </a:rPr>
               <a:t>Stage 2</a:t>
             </a:r>
@@ -28864,7 +30094,7 @@
       </p:sp>
       <p:sp>
         <p:nvSpPr>
-          <p:cNvPr id="8" name="slot.funnel-stage.2.body"/>
+          <p:cNvPr id="10" name="slot.funnel-stage.2.body"/>
           <p:cNvSpPr txBox="1"/>
           <p:nvPr/>
         </p:nvSpPr>
@@ -28899,7 +30129,7 @@
       </p:sp>
       <p:sp>
         <p:nvSpPr>
-          <p:cNvPr id="9" name="slot.funnel-stage.3.title"/>
+          <p:cNvPr id="11" name="slot.funnel-stage.3.title"/>
           <p:cNvSpPr/>
           <p:nvPr/>
         </p:nvSpPr>
@@ -28942,7 +30172,7 @@
                 <a:solidFill>
                   <a:schemeClr val="lt1"/>
                 </a:solidFill>
-                <a:latin typeface="Futura Medium"/>
+                <a:latin typeface="Arial"/>
               </a:rPr>
               <a:t>Stage 3</a:t>
             </a:r>
@@ -28951,7 +30181,7 @@
       </p:sp>
       <p:sp>
         <p:nvSpPr>
-          <p:cNvPr id="10" name="slot.funnel-stage.3.body"/>
+          <p:cNvPr id="12" name="slot.funnel-stage.3.body"/>
           <p:cNvSpPr txBox="1"/>
           <p:nvPr/>
         </p:nvSpPr>
@@ -28986,7 +30216,7 @@
       </p:sp>
       <p:sp>
         <p:nvSpPr>
-          <p:cNvPr id="11" name="slot.funnel-stage.4.title"/>
+          <p:cNvPr id="13" name="slot.funnel-stage.4.title"/>
           <p:cNvSpPr/>
           <p:nvPr/>
         </p:nvSpPr>
@@ -29029,7 +30259,7 @@
                 <a:solidFill>
                   <a:schemeClr val="lt1"/>
                 </a:solidFill>
-                <a:latin typeface="Futura Medium"/>
+                <a:latin typeface="Arial"/>
               </a:rPr>
               <a:t>Stage 4</a:t>
             </a:r>
@@ -29038,7 +30268,7 @@
       </p:sp>
       <p:sp>
         <p:nvSpPr>
-          <p:cNvPr id="12" name="slot.funnel-stage.4.body"/>
+          <p:cNvPr id="14" name="slot.funnel-stage.4.body"/>
           <p:cNvSpPr txBox="1"/>
           <p:nvPr/>
         </p:nvSpPr>
@@ -29073,7 +30303,7 @@
       </p:sp>
       <p:sp>
         <p:nvSpPr>
-          <p:cNvPr id="13" name="slot.funnel-stage.5.title"/>
+          <p:cNvPr id="15" name="slot.funnel-stage.5.title"/>
           <p:cNvSpPr/>
           <p:nvPr/>
         </p:nvSpPr>
@@ -29116,7 +30346,7 @@
                 <a:solidFill>
                   <a:schemeClr val="lt1"/>
                 </a:solidFill>
-                <a:latin typeface="Futura Medium"/>
+                <a:latin typeface="Arial"/>
               </a:rPr>
               <a:t>Stage 5</a:t>
             </a:r>
@@ -29125,7 +30355,7 @@
       </p:sp>
       <p:sp>
         <p:nvSpPr>
-          <p:cNvPr id="14" name="slot.funnel-stage.5.body"/>
+          <p:cNvPr id="16" name="slot.funnel-stage.5.body"/>
           <p:cNvSpPr txBox="1"/>
           <p:nvPr/>
         </p:nvSpPr>
@@ -29232,7 +30462,130 @@
       </p:sp>
       <p:sp>
         <p:nvSpPr>
-          <p:cNvPr id="4" name="slot.title"/>
+          <p:cNvPr id="4" name="decor">
+            <a:extLst>
+              <a:ext uri="{FF2B5EF4-FFF2-40B4-BE49-F238E27FC236}">
+                <a16:creationId xmlns:a16="http://schemas.microsoft.com/office/drawing/2014/main" id="{9BCA9FA9-DC4A-F7F9-6F98-04EFCF05B790}"/>
+              </a:ext>
+            </a:extLst>
+          </p:cNvPr>
+          <p:cNvSpPr/>
+          <p:nvPr userDrawn="1"/>
+        </p:nvSpPr>
+        <p:spPr>
+          <a:xfrm>
+            <a:off x="-64731" y="246322"/>
+            <a:ext cx="512150" cy="423265"/>
+          </a:xfrm>
+          <a:prstGeom prst="pie">
+            <a:avLst>
+              <a:gd name="adj1" fmla="val 16190032"/>
+              <a:gd name="adj2" fmla="val 5400005"/>
+            </a:avLst>
+          </a:prstGeom>
+          <a:solidFill>
+            <a:schemeClr val="tx2"/>
+          </a:solidFill>
+          <a:ln>
+            <a:solidFill>
+              <a:schemeClr val="tx2"/>
+            </a:solidFill>
+          </a:ln>
+        </p:spPr>
+        <p:style>
+          <a:lnRef idx="2">
+            <a:schemeClr val="accent1">
+              <a:shade val="50000"/>
+            </a:schemeClr>
+          </a:lnRef>
+          <a:fillRef idx="1">
+            <a:schemeClr val="accent1"/>
+          </a:fillRef>
+          <a:effectRef idx="0">
+            <a:schemeClr val="accent1"/>
+          </a:effectRef>
+          <a:fontRef idx="minor">
+            <a:schemeClr val="lt1"/>
+          </a:fontRef>
+        </p:style>
+        <p:txBody>
+          <a:bodyPr lIns="36000" tIns="36000" rIns="36000" bIns="36000" rtlCol="0" anchor="ctr"/>
+          <a:lstStyle/>
+          <a:p>
+            <a:pPr algn="l" rtl="0"/>
+            <a:endParaRPr lang="en-US" sz="1200" b="1">
+              <a:solidFill>
+                <a:schemeClr val="bg1"/>
+              </a:solidFill>
+              <a:latin typeface="Arial" panose="020B0604020202020204" pitchFamily="34" charset="0"/>
+              <a:cs typeface="Arial" panose="020B0604020202020204" pitchFamily="34" charset="0"/>
+            </a:endParaRPr>
+          </a:p>
+        </p:txBody>
+      </p:sp>
+      <p:sp>
+        <p:nvSpPr>
+          <p:cNvPr id="5" name="decor">
+            <a:extLst>
+              <a:ext uri="{FF2B5EF4-FFF2-40B4-BE49-F238E27FC236}">
+                <a16:creationId xmlns:a16="http://schemas.microsoft.com/office/drawing/2014/main" id="{5D3B6E37-9E51-E62C-A843-852BEEBE5F2B}"/>
+              </a:ext>
+            </a:extLst>
+          </p:cNvPr>
+          <p:cNvSpPr/>
+          <p:nvPr userDrawn="1"/>
+        </p:nvSpPr>
+        <p:spPr>
+          <a:xfrm>
+            <a:off x="0" y="247761"/>
+            <a:ext cx="191344" cy="423265"/>
+          </a:xfrm>
+          <a:prstGeom prst="rect">
+            <a:avLst/>
+          </a:prstGeom>
+          <a:solidFill>
+            <a:schemeClr val="tx2"/>
+          </a:solidFill>
+          <a:ln>
+            <a:solidFill>
+              <a:schemeClr val="tx2"/>
+            </a:solidFill>
+          </a:ln>
+        </p:spPr>
+        <p:style>
+          <a:lnRef idx="2">
+            <a:schemeClr val="accent1">
+              <a:shade val="50000"/>
+            </a:schemeClr>
+          </a:lnRef>
+          <a:fillRef idx="1">
+            <a:schemeClr val="accent1"/>
+          </a:fillRef>
+          <a:effectRef idx="0">
+            <a:schemeClr val="accent1"/>
+          </a:effectRef>
+          <a:fontRef idx="minor">
+            <a:schemeClr val="lt1"/>
+          </a:fontRef>
+        </p:style>
+        <p:txBody>
+          <a:bodyPr lIns="36000" tIns="36000" rIns="36000" bIns="36000" rtlCol="0" anchor="ctr"/>
+          <a:lstStyle/>
+          <a:p>
+            <a:pPr algn="l" rtl="0"/>
+            <a:endParaRPr lang="en-US" sz="1200" b="1">
+              <a:solidFill>
+                <a:schemeClr val="bg1"/>
+              </a:solidFill>
+              <a:latin typeface="Arial" panose="020B0604020202020204" pitchFamily="34" charset="0"/>
+              <a:cs typeface="Arial" panose="020B0604020202020204" pitchFamily="34" charset="0"/>
+            </a:endParaRPr>
+          </a:p>
+        </p:txBody>
+      </p:sp>
+      <p:sp>
+        <p:nvSpPr>
+          <p:cNvPr id="6" name="slot.title"/>
           <p:cNvSpPr txBox="1"/>
           <p:nvPr/>
         </p:nvSpPr>
@@ -29256,7 +30609,7 @@
             <a:r>
               <a:rPr sz="2200" b="1">
                 <a:solidFill>
-                  <a:schemeClr val="dk1"/>
+                  <a:schemeClr val="accent2"/>
                 </a:solidFill>
                 <a:latin typeface="Futura Medium"/>
               </a:rPr>
@@ -29267,7 +30620,7 @@
       </p:sp>
       <p:sp>
         <p:nvSpPr>
-          <p:cNvPr id="5" name="decor"/>
+          <p:cNvPr id="7" name="decor"/>
           <p:cNvSpPr/>
           <p:nvPr/>
         </p:nvSpPr>
@@ -29310,7 +30663,7 @@
                 <a:solidFill>
                   <a:schemeClr val="lt1"/>
                 </a:solidFill>
-                <a:latin typeface="Futura Medium"/>
+                <a:latin typeface="Arial"/>
               </a:rPr>
               <a:t/>
             </a:r>
@@ -29319,7 +30672,7 @@
       </p:sp>
       <p:sp>
         <p:nvSpPr>
-          <p:cNvPr id="6" name="slot.feature.1.title"/>
+          <p:cNvPr id="8" name="slot.feature.1.title"/>
           <p:cNvSpPr/>
           <p:nvPr/>
         </p:nvSpPr>
@@ -29362,7 +30715,7 @@
                 <a:solidFill>
                   <a:schemeClr val="lt1"/>
                 </a:solidFill>
-                <a:latin typeface="Futura Medium"/>
+                <a:latin typeface="Arial"/>
               </a:rPr>
               <a:t>Feature 1</a:t>
             </a:r>
@@ -29371,7 +30724,7 @@
       </p:sp>
       <p:sp>
         <p:nvSpPr>
-          <p:cNvPr id="7" name="slot.feature.1.body"/>
+          <p:cNvPr id="9" name="slot.feature.1.body"/>
           <p:cNvSpPr txBox="1"/>
           <p:nvPr/>
         </p:nvSpPr>
@@ -29406,7 +30759,7 @@
       </p:sp>
       <p:sp>
         <p:nvSpPr>
-          <p:cNvPr id="8" name="decor"/>
+          <p:cNvPr id="10" name="decor"/>
           <p:cNvSpPr/>
           <p:nvPr/>
         </p:nvSpPr>
@@ -29449,7 +30802,7 @@
                 <a:solidFill>
                   <a:schemeClr val="lt1"/>
                 </a:solidFill>
-                <a:latin typeface="Futura Medium"/>
+                <a:latin typeface="Arial"/>
               </a:rPr>
               <a:t/>
             </a:r>
@@ -29458,7 +30811,7 @@
       </p:sp>
       <p:sp>
         <p:nvSpPr>
-          <p:cNvPr id="9" name="slot.feature.2.title"/>
+          <p:cNvPr id="11" name="slot.feature.2.title"/>
           <p:cNvSpPr/>
           <p:nvPr/>
         </p:nvSpPr>
@@ -29501,7 +30854,7 @@
                 <a:solidFill>
                   <a:schemeClr val="lt1"/>
                 </a:solidFill>
-                <a:latin typeface="Futura Medium"/>
+                <a:latin typeface="Arial"/>
               </a:rPr>
               <a:t>Feature 2</a:t>
             </a:r>
@@ -29510,7 +30863,7 @@
       </p:sp>
       <p:sp>
         <p:nvSpPr>
-          <p:cNvPr id="10" name="slot.feature.2.body"/>
+          <p:cNvPr id="12" name="slot.feature.2.body"/>
           <p:cNvSpPr txBox="1"/>
           <p:nvPr/>
         </p:nvSpPr>
@@ -29545,7 +30898,7 @@
       </p:sp>
       <p:sp>
         <p:nvSpPr>
-          <p:cNvPr id="11" name="decor"/>
+          <p:cNvPr id="13" name="decor"/>
           <p:cNvSpPr/>
           <p:nvPr/>
         </p:nvSpPr>
@@ -29588,7 +30941,7 @@
                 <a:solidFill>
                   <a:schemeClr val="lt1"/>
                 </a:solidFill>
-                <a:latin typeface="Futura Medium"/>
+                <a:latin typeface="Arial"/>
               </a:rPr>
               <a:t/>
             </a:r>
@@ -29597,7 +30950,7 @@
       </p:sp>
       <p:sp>
         <p:nvSpPr>
-          <p:cNvPr id="12" name="slot.feature.3.title"/>
+          <p:cNvPr id="14" name="slot.feature.3.title"/>
           <p:cNvSpPr/>
           <p:nvPr/>
         </p:nvSpPr>
@@ -29640,7 +30993,7 @@
                 <a:solidFill>
                   <a:schemeClr val="lt1"/>
                 </a:solidFill>
-                <a:latin typeface="Futura Medium"/>
+                <a:latin typeface="Arial"/>
               </a:rPr>
               <a:t>Feature 3</a:t>
             </a:r>
@@ -29649,7 +31002,7 @@
       </p:sp>
       <p:sp>
         <p:nvSpPr>
-          <p:cNvPr id="13" name="slot.feature.3.body"/>
+          <p:cNvPr id="15" name="slot.feature.3.body"/>
           <p:cNvSpPr txBox="1"/>
           <p:nvPr/>
         </p:nvSpPr>
@@ -29756,7 +31109,130 @@
       </p:sp>
       <p:sp>
         <p:nvSpPr>
-          <p:cNvPr id="4" name="slot.title"/>
+          <p:cNvPr id="4" name="decor">
+            <a:extLst>
+              <a:ext uri="{FF2B5EF4-FFF2-40B4-BE49-F238E27FC236}">
+                <a16:creationId xmlns:a16="http://schemas.microsoft.com/office/drawing/2014/main" id="{9BCA9FA9-DC4A-F7F9-6F98-04EFCF05B790}"/>
+              </a:ext>
+            </a:extLst>
+          </p:cNvPr>
+          <p:cNvSpPr/>
+          <p:nvPr userDrawn="1"/>
+        </p:nvSpPr>
+        <p:spPr>
+          <a:xfrm>
+            <a:off x="-64731" y="246322"/>
+            <a:ext cx="512150" cy="423265"/>
+          </a:xfrm>
+          <a:prstGeom prst="pie">
+            <a:avLst>
+              <a:gd name="adj1" fmla="val 16190032"/>
+              <a:gd name="adj2" fmla="val 5400005"/>
+            </a:avLst>
+          </a:prstGeom>
+          <a:solidFill>
+            <a:schemeClr val="tx2"/>
+          </a:solidFill>
+          <a:ln>
+            <a:solidFill>
+              <a:schemeClr val="tx2"/>
+            </a:solidFill>
+          </a:ln>
+        </p:spPr>
+        <p:style>
+          <a:lnRef idx="2">
+            <a:schemeClr val="accent1">
+              <a:shade val="50000"/>
+            </a:schemeClr>
+          </a:lnRef>
+          <a:fillRef idx="1">
+            <a:schemeClr val="accent1"/>
+          </a:fillRef>
+          <a:effectRef idx="0">
+            <a:schemeClr val="accent1"/>
+          </a:effectRef>
+          <a:fontRef idx="minor">
+            <a:schemeClr val="lt1"/>
+          </a:fontRef>
+        </p:style>
+        <p:txBody>
+          <a:bodyPr lIns="36000" tIns="36000" rIns="36000" bIns="36000" rtlCol="0" anchor="ctr"/>
+          <a:lstStyle/>
+          <a:p>
+            <a:pPr algn="l" rtl="0"/>
+            <a:endParaRPr lang="en-US" sz="1200" b="1">
+              <a:solidFill>
+                <a:schemeClr val="bg1"/>
+              </a:solidFill>
+              <a:latin typeface="Arial" panose="020B0604020202020204" pitchFamily="34" charset="0"/>
+              <a:cs typeface="Arial" panose="020B0604020202020204" pitchFamily="34" charset="0"/>
+            </a:endParaRPr>
+          </a:p>
+        </p:txBody>
+      </p:sp>
+      <p:sp>
+        <p:nvSpPr>
+          <p:cNvPr id="5" name="decor">
+            <a:extLst>
+              <a:ext uri="{FF2B5EF4-FFF2-40B4-BE49-F238E27FC236}">
+                <a16:creationId xmlns:a16="http://schemas.microsoft.com/office/drawing/2014/main" id="{5D3B6E37-9E51-E62C-A843-852BEEBE5F2B}"/>
+              </a:ext>
+            </a:extLst>
+          </p:cNvPr>
+          <p:cNvSpPr/>
+          <p:nvPr userDrawn="1"/>
+        </p:nvSpPr>
+        <p:spPr>
+          <a:xfrm>
+            <a:off x="0" y="247761"/>
+            <a:ext cx="191344" cy="423265"/>
+          </a:xfrm>
+          <a:prstGeom prst="rect">
+            <a:avLst/>
+          </a:prstGeom>
+          <a:solidFill>
+            <a:schemeClr val="tx2"/>
+          </a:solidFill>
+          <a:ln>
+            <a:solidFill>
+              <a:schemeClr val="tx2"/>
+            </a:solidFill>
+          </a:ln>
+        </p:spPr>
+        <p:style>
+          <a:lnRef idx="2">
+            <a:schemeClr val="accent1">
+              <a:shade val="50000"/>
+            </a:schemeClr>
+          </a:lnRef>
+          <a:fillRef idx="1">
+            <a:schemeClr val="accent1"/>
+          </a:fillRef>
+          <a:effectRef idx="0">
+            <a:schemeClr val="accent1"/>
+          </a:effectRef>
+          <a:fontRef idx="minor">
+            <a:schemeClr val="lt1"/>
+          </a:fontRef>
+        </p:style>
+        <p:txBody>
+          <a:bodyPr lIns="36000" tIns="36000" rIns="36000" bIns="36000" rtlCol="0" anchor="ctr"/>
+          <a:lstStyle/>
+          <a:p>
+            <a:pPr algn="l" rtl="0"/>
+            <a:endParaRPr lang="en-US" sz="1200" b="1">
+              <a:solidFill>
+                <a:schemeClr val="bg1"/>
+              </a:solidFill>
+              <a:latin typeface="Arial" panose="020B0604020202020204" pitchFamily="34" charset="0"/>
+              <a:cs typeface="Arial" panose="020B0604020202020204" pitchFamily="34" charset="0"/>
+            </a:endParaRPr>
+          </a:p>
+        </p:txBody>
+      </p:sp>
+      <p:sp>
+        <p:nvSpPr>
+          <p:cNvPr id="6" name="slot.title"/>
           <p:cNvSpPr txBox="1"/>
           <p:nvPr/>
         </p:nvSpPr>
@@ -29780,7 +31256,7 @@
             <a:r>
               <a:rPr sz="2200" b="1">
                 <a:solidFill>
-                  <a:schemeClr val="dk1"/>
+                  <a:schemeClr val="accent2"/>
                 </a:solidFill>
                 <a:latin typeface="Futura Medium"/>
               </a:rPr>
@@ -29791,7 +31267,7 @@
       </p:sp>
       <p:sp>
         <p:nvSpPr>
-          <p:cNvPr id="5" name="decor"/>
+          <p:cNvPr id="7" name="decor"/>
           <p:cNvSpPr/>
           <p:nvPr/>
         </p:nvSpPr>
@@ -29834,7 +31310,7 @@
                 <a:solidFill>
                   <a:schemeClr val="lt1"/>
                 </a:solidFill>
-                <a:latin typeface="Futura Medium"/>
+                <a:latin typeface="Arial"/>
               </a:rPr>
               <a:t/>
             </a:r>
@@ -29843,7 +31319,7 @@
       </p:sp>
       <p:sp>
         <p:nvSpPr>
-          <p:cNvPr id="6" name="slot.feature.1.title"/>
+          <p:cNvPr id="8" name="slot.feature.1.title"/>
           <p:cNvSpPr/>
           <p:nvPr/>
         </p:nvSpPr>
@@ -29886,7 +31362,7 @@
                 <a:solidFill>
                   <a:schemeClr val="lt1"/>
                 </a:solidFill>
-                <a:latin typeface="Futura Medium"/>
+                <a:latin typeface="Arial"/>
               </a:rPr>
               <a:t>Feature 1</a:t>
             </a:r>
@@ -29895,7 +31371,7 @@
       </p:sp>
       <p:sp>
         <p:nvSpPr>
-          <p:cNvPr id="7" name="slot.feature.1.body"/>
+          <p:cNvPr id="9" name="slot.feature.1.body"/>
           <p:cNvSpPr txBox="1"/>
           <p:nvPr/>
         </p:nvSpPr>
@@ -29930,7 +31406,7 @@
       </p:sp>
       <p:sp>
         <p:nvSpPr>
-          <p:cNvPr id="8" name="decor"/>
+          <p:cNvPr id="10" name="decor"/>
           <p:cNvSpPr/>
           <p:nvPr/>
         </p:nvSpPr>
@@ -29973,7 +31449,7 @@
                 <a:solidFill>
                   <a:schemeClr val="lt1"/>
                 </a:solidFill>
-                <a:latin typeface="Futura Medium"/>
+                <a:latin typeface="Arial"/>
               </a:rPr>
               <a:t/>
             </a:r>
@@ -29982,7 +31458,7 @@
       </p:sp>
       <p:sp>
         <p:nvSpPr>
-          <p:cNvPr id="9" name="slot.feature.2.title"/>
+          <p:cNvPr id="11" name="slot.feature.2.title"/>
           <p:cNvSpPr/>
           <p:nvPr/>
         </p:nvSpPr>
@@ -30025,7 +31501,7 @@
                 <a:solidFill>
                   <a:schemeClr val="lt1"/>
                 </a:solidFill>
-                <a:latin typeface="Futura Medium"/>
+                <a:latin typeface="Arial"/>
               </a:rPr>
               <a:t>Feature 2</a:t>
             </a:r>
@@ -30034,7 +31510,7 @@
       </p:sp>
       <p:sp>
         <p:nvSpPr>
-          <p:cNvPr id="10" name="slot.feature.2.body"/>
+          <p:cNvPr id="12" name="slot.feature.2.body"/>
           <p:cNvSpPr txBox="1"/>
           <p:nvPr/>
         </p:nvSpPr>
@@ -30069,7 +31545,7 @@
       </p:sp>
       <p:sp>
         <p:nvSpPr>
-          <p:cNvPr id="11" name="decor"/>
+          <p:cNvPr id="13" name="decor"/>
           <p:cNvSpPr/>
           <p:nvPr/>
         </p:nvSpPr>
@@ -30112,7 +31588,7 @@
                 <a:solidFill>
                   <a:schemeClr val="lt1"/>
                 </a:solidFill>
-                <a:latin typeface="Futura Medium"/>
+                <a:latin typeface="Arial"/>
               </a:rPr>
               <a:t/>
             </a:r>
@@ -30121,7 +31597,7 @@
       </p:sp>
       <p:sp>
         <p:nvSpPr>
-          <p:cNvPr id="12" name="slot.feature.3.title"/>
+          <p:cNvPr id="14" name="slot.feature.3.title"/>
           <p:cNvSpPr/>
           <p:nvPr/>
         </p:nvSpPr>
@@ -30164,7 +31640,7 @@
                 <a:solidFill>
                   <a:schemeClr val="lt1"/>
                 </a:solidFill>
-                <a:latin typeface="Futura Medium"/>
+                <a:latin typeface="Arial"/>
               </a:rPr>
               <a:t>Feature 3</a:t>
             </a:r>
@@ -30173,7 +31649,7 @@
       </p:sp>
       <p:sp>
         <p:nvSpPr>
-          <p:cNvPr id="13" name="slot.feature.3.body"/>
+          <p:cNvPr id="15" name="slot.feature.3.body"/>
           <p:cNvSpPr txBox="1"/>
           <p:nvPr/>
         </p:nvSpPr>
@@ -30208,7 +31684,7 @@
       </p:sp>
       <p:sp>
         <p:nvSpPr>
-          <p:cNvPr id="14" name="decor"/>
+          <p:cNvPr id="16" name="decor"/>
           <p:cNvSpPr/>
           <p:nvPr/>
         </p:nvSpPr>
@@ -30251,7 +31727,7 @@
                 <a:solidFill>
                   <a:schemeClr val="lt1"/>
                 </a:solidFill>
-                <a:latin typeface="Futura Medium"/>
+                <a:latin typeface="Arial"/>
               </a:rPr>
               <a:t/>
             </a:r>
@@ -30260,7 +31736,7 @@
       </p:sp>
       <p:sp>
         <p:nvSpPr>
-          <p:cNvPr id="15" name="slot.feature.4.title"/>
+          <p:cNvPr id="17" name="slot.feature.4.title"/>
           <p:cNvSpPr/>
           <p:nvPr/>
         </p:nvSpPr>
@@ -30303,7 +31779,7 @@
                 <a:solidFill>
                   <a:schemeClr val="lt1"/>
                 </a:solidFill>
-                <a:latin typeface="Futura Medium"/>
+                <a:latin typeface="Arial"/>
               </a:rPr>
               <a:t>Feature 4</a:t>
             </a:r>
@@ -30312,7 +31788,7 @@
       </p:sp>
       <p:sp>
         <p:nvSpPr>
-          <p:cNvPr id="16" name="slot.feature.4.body"/>
+          <p:cNvPr id="18" name="slot.feature.4.body"/>
           <p:cNvSpPr txBox="1"/>
           <p:nvPr/>
         </p:nvSpPr>
@@ -30419,7 +31895,130 @@
       </p:sp>
       <p:sp>
         <p:nvSpPr>
-          <p:cNvPr id="4" name="slot.title"/>
+          <p:cNvPr id="4" name="decor">
+            <a:extLst>
+              <a:ext uri="{FF2B5EF4-FFF2-40B4-BE49-F238E27FC236}">
+                <a16:creationId xmlns:a16="http://schemas.microsoft.com/office/drawing/2014/main" id="{9BCA9FA9-DC4A-F7F9-6F98-04EFCF05B790}"/>
+              </a:ext>
+            </a:extLst>
+          </p:cNvPr>
+          <p:cNvSpPr/>
+          <p:nvPr userDrawn="1"/>
+        </p:nvSpPr>
+        <p:spPr>
+          <a:xfrm>
+            <a:off x="-64731" y="246322"/>
+            <a:ext cx="512150" cy="423265"/>
+          </a:xfrm>
+          <a:prstGeom prst="pie">
+            <a:avLst>
+              <a:gd name="adj1" fmla="val 16190032"/>
+              <a:gd name="adj2" fmla="val 5400005"/>
+            </a:avLst>
+          </a:prstGeom>
+          <a:solidFill>
+            <a:schemeClr val="tx2"/>
+          </a:solidFill>
+          <a:ln>
+            <a:solidFill>
+              <a:schemeClr val="tx2"/>
+            </a:solidFill>
+          </a:ln>
+        </p:spPr>
+        <p:style>
+          <a:lnRef idx="2">
+            <a:schemeClr val="accent1">
+              <a:shade val="50000"/>
+            </a:schemeClr>
+          </a:lnRef>
+          <a:fillRef idx="1">
+            <a:schemeClr val="accent1"/>
+          </a:fillRef>
+          <a:effectRef idx="0">
+            <a:schemeClr val="accent1"/>
+          </a:effectRef>
+          <a:fontRef idx="minor">
+            <a:schemeClr val="lt1"/>
+          </a:fontRef>
+        </p:style>
+        <p:txBody>
+          <a:bodyPr lIns="36000" tIns="36000" rIns="36000" bIns="36000" rtlCol="0" anchor="ctr"/>
+          <a:lstStyle/>
+          <a:p>
+            <a:pPr algn="l" rtl="0"/>
+            <a:endParaRPr lang="en-US" sz="1200" b="1">
+              <a:solidFill>
+                <a:schemeClr val="bg1"/>
+              </a:solidFill>
+              <a:latin typeface="Arial" panose="020B0604020202020204" pitchFamily="34" charset="0"/>
+              <a:cs typeface="Arial" panose="020B0604020202020204" pitchFamily="34" charset="0"/>
+            </a:endParaRPr>
+          </a:p>
+        </p:txBody>
+      </p:sp>
+      <p:sp>
+        <p:nvSpPr>
+          <p:cNvPr id="5" name="decor">
+            <a:extLst>
+              <a:ext uri="{FF2B5EF4-FFF2-40B4-BE49-F238E27FC236}">
+                <a16:creationId xmlns:a16="http://schemas.microsoft.com/office/drawing/2014/main" id="{5D3B6E37-9E51-E62C-A843-852BEEBE5F2B}"/>
+              </a:ext>
+            </a:extLst>
+          </p:cNvPr>
+          <p:cNvSpPr/>
+          <p:nvPr userDrawn="1"/>
+        </p:nvSpPr>
+        <p:spPr>
+          <a:xfrm>
+            <a:off x="0" y="247761"/>
+            <a:ext cx="191344" cy="423265"/>
+          </a:xfrm>
+          <a:prstGeom prst="rect">
+            <a:avLst/>
+          </a:prstGeom>
+          <a:solidFill>
+            <a:schemeClr val="tx2"/>
+          </a:solidFill>
+          <a:ln>
+            <a:solidFill>
+              <a:schemeClr val="tx2"/>
+            </a:solidFill>
+          </a:ln>
+        </p:spPr>
+        <p:style>
+          <a:lnRef idx="2">
+            <a:schemeClr val="accent1">
+              <a:shade val="50000"/>
+            </a:schemeClr>
+          </a:lnRef>
+          <a:fillRef idx="1">
+            <a:schemeClr val="accent1"/>
+          </a:fillRef>
+          <a:effectRef idx="0">
+            <a:schemeClr val="accent1"/>
+          </a:effectRef>
+          <a:fontRef idx="minor">
+            <a:schemeClr val="lt1"/>
+          </a:fontRef>
+        </p:style>
+        <p:txBody>
+          <a:bodyPr lIns="36000" tIns="36000" rIns="36000" bIns="36000" rtlCol="0" anchor="ctr"/>
+          <a:lstStyle/>
+          <a:p>
+            <a:pPr algn="l" rtl="0"/>
+            <a:endParaRPr lang="en-US" sz="1200" b="1">
+              <a:solidFill>
+                <a:schemeClr val="bg1"/>
+              </a:solidFill>
+              <a:latin typeface="Arial" panose="020B0604020202020204" pitchFamily="34" charset="0"/>
+              <a:cs typeface="Arial" panose="020B0604020202020204" pitchFamily="34" charset="0"/>
+            </a:endParaRPr>
+          </a:p>
+        </p:txBody>
+      </p:sp>
+      <p:sp>
+        <p:nvSpPr>
+          <p:cNvPr id="6" name="slot.title"/>
           <p:cNvSpPr txBox="1"/>
           <p:nvPr/>
         </p:nvSpPr>
@@ -30443,7 +32042,7 @@
             <a:r>
               <a:rPr sz="2200" b="1">
                 <a:solidFill>
-                  <a:schemeClr val="dk1"/>
+                  <a:schemeClr val="accent2"/>
                 </a:solidFill>
                 <a:latin typeface="Futura Medium"/>
               </a:rPr>
@@ -30454,7 +32053,7 @@
       </p:sp>
       <p:sp>
         <p:nvSpPr>
-          <p:cNvPr id="5" name="decor"/>
+          <p:cNvPr id="7" name="decor"/>
           <p:cNvSpPr/>
           <p:nvPr/>
         </p:nvSpPr>
@@ -30497,7 +32096,7 @@
                 <a:solidFill>
                   <a:schemeClr val="lt1"/>
                 </a:solidFill>
-                <a:latin typeface="Futura Medium"/>
+                <a:latin typeface="Arial"/>
               </a:rPr>
               <a:t/>
             </a:r>
@@ -30506,7 +32105,7 @@
       </p:sp>
       <p:sp>
         <p:nvSpPr>
-          <p:cNvPr id="6" name="slot.feature.1.title"/>
+          <p:cNvPr id="8" name="slot.feature.1.title"/>
           <p:cNvSpPr/>
           <p:nvPr/>
         </p:nvSpPr>
@@ -30549,7 +32148,7 @@
                 <a:solidFill>
                   <a:schemeClr val="lt1"/>
                 </a:solidFill>
-                <a:latin typeface="Futura Medium"/>
+                <a:latin typeface="Arial"/>
               </a:rPr>
               <a:t>Feature 1</a:t>
             </a:r>
@@ -30558,7 +32157,7 @@
       </p:sp>
       <p:sp>
         <p:nvSpPr>
-          <p:cNvPr id="7" name="slot.feature.1.body"/>
+          <p:cNvPr id="9" name="slot.feature.1.body"/>
           <p:cNvSpPr txBox="1"/>
           <p:nvPr/>
         </p:nvSpPr>
@@ -30593,7 +32192,7 @@
       </p:sp>
       <p:sp>
         <p:nvSpPr>
-          <p:cNvPr id="8" name="decor"/>
+          <p:cNvPr id="10" name="decor"/>
           <p:cNvSpPr/>
           <p:nvPr/>
         </p:nvSpPr>
@@ -30636,7 +32235,7 @@
                 <a:solidFill>
                   <a:schemeClr val="lt1"/>
                 </a:solidFill>
-                <a:latin typeface="Futura Medium"/>
+                <a:latin typeface="Arial"/>
               </a:rPr>
               <a:t/>
             </a:r>
@@ -30645,7 +32244,7 @@
       </p:sp>
       <p:sp>
         <p:nvSpPr>
-          <p:cNvPr id="9" name="slot.feature.2.title"/>
+          <p:cNvPr id="11" name="slot.feature.2.title"/>
           <p:cNvSpPr/>
           <p:nvPr/>
         </p:nvSpPr>
@@ -30688,7 +32287,7 @@
                 <a:solidFill>
                   <a:schemeClr val="lt1"/>
                 </a:solidFill>
-                <a:latin typeface="Futura Medium"/>
+                <a:latin typeface="Arial"/>
               </a:rPr>
               <a:t>Feature 2</a:t>
             </a:r>
@@ -30697,7 +32296,7 @@
       </p:sp>
       <p:sp>
         <p:nvSpPr>
-          <p:cNvPr id="10" name="slot.feature.2.body"/>
+          <p:cNvPr id="12" name="slot.feature.2.body"/>
           <p:cNvSpPr txBox="1"/>
           <p:nvPr/>
         </p:nvSpPr>
@@ -30732,7 +32331,7 @@
       </p:sp>
       <p:sp>
         <p:nvSpPr>
-          <p:cNvPr id="11" name="decor"/>
+          <p:cNvPr id="13" name="decor"/>
           <p:cNvSpPr/>
           <p:nvPr/>
         </p:nvSpPr>
@@ -30775,7 +32374,7 @@
                 <a:solidFill>
                   <a:schemeClr val="lt1"/>
                 </a:solidFill>
-                <a:latin typeface="Futura Medium"/>
+                <a:latin typeface="Arial"/>
               </a:rPr>
               <a:t/>
             </a:r>
@@ -30784,7 +32383,7 @@
       </p:sp>
       <p:sp>
         <p:nvSpPr>
-          <p:cNvPr id="12" name="slot.feature.3.title"/>
+          <p:cNvPr id="14" name="slot.feature.3.title"/>
           <p:cNvSpPr/>
           <p:nvPr/>
         </p:nvSpPr>
@@ -30827,7 +32426,7 @@
                 <a:solidFill>
                   <a:schemeClr val="lt1"/>
                 </a:solidFill>
-                <a:latin typeface="Futura Medium"/>
+                <a:latin typeface="Arial"/>
               </a:rPr>
               <a:t>Feature 3</a:t>
             </a:r>
@@ -30836,7 +32435,7 @@
       </p:sp>
       <p:sp>
         <p:nvSpPr>
-          <p:cNvPr id="13" name="slot.feature.3.body"/>
+          <p:cNvPr id="15" name="slot.feature.3.body"/>
           <p:cNvSpPr txBox="1"/>
           <p:nvPr/>
         </p:nvSpPr>
@@ -30871,7 +32470,7 @@
       </p:sp>
       <p:sp>
         <p:nvSpPr>
-          <p:cNvPr id="14" name="decor"/>
+          <p:cNvPr id="16" name="decor"/>
           <p:cNvSpPr/>
           <p:nvPr/>
         </p:nvSpPr>
@@ -30914,7 +32513,7 @@
                 <a:solidFill>
                   <a:schemeClr val="lt1"/>
                 </a:solidFill>
-                <a:latin typeface="Futura Medium"/>
+                <a:latin typeface="Arial"/>
               </a:rPr>
               <a:t/>
             </a:r>
@@ -30923,7 +32522,7 @@
       </p:sp>
       <p:sp>
         <p:nvSpPr>
-          <p:cNvPr id="15" name="slot.feature.4.title"/>
+          <p:cNvPr id="17" name="slot.feature.4.title"/>
           <p:cNvSpPr/>
           <p:nvPr/>
         </p:nvSpPr>
@@ -30966,7 +32565,7 @@
                 <a:solidFill>
                   <a:schemeClr val="lt1"/>
                 </a:solidFill>
-                <a:latin typeface="Futura Medium"/>
+                <a:latin typeface="Arial"/>
               </a:rPr>
               <a:t>Feature 4</a:t>
             </a:r>
@@ -30975,7 +32574,7 @@
       </p:sp>
       <p:sp>
         <p:nvSpPr>
-          <p:cNvPr id="16" name="slot.feature.4.body"/>
+          <p:cNvPr id="18" name="slot.feature.4.body"/>
           <p:cNvSpPr txBox="1"/>
           <p:nvPr/>
         </p:nvSpPr>
@@ -31010,7 +32609,7 @@
       </p:sp>
       <p:sp>
         <p:nvSpPr>
-          <p:cNvPr id="17" name="decor"/>
+          <p:cNvPr id="19" name="decor"/>
           <p:cNvSpPr/>
           <p:nvPr/>
         </p:nvSpPr>
@@ -31053,7 +32652,7 @@
                 <a:solidFill>
                   <a:schemeClr val="lt1"/>
                 </a:solidFill>
-                <a:latin typeface="Futura Medium"/>
+                <a:latin typeface="Arial"/>
               </a:rPr>
               <a:t/>
             </a:r>
@@ -31062,7 +32661,7 @@
       </p:sp>
       <p:sp>
         <p:nvSpPr>
-          <p:cNvPr id="18" name="slot.feature.5.title"/>
+          <p:cNvPr id="20" name="slot.feature.5.title"/>
           <p:cNvSpPr/>
           <p:nvPr/>
         </p:nvSpPr>
@@ -31105,7 +32704,7 @@
                 <a:solidFill>
                   <a:schemeClr val="lt1"/>
                 </a:solidFill>
-                <a:latin typeface="Futura Medium"/>
+                <a:latin typeface="Arial"/>
               </a:rPr>
               <a:t>Feature 5</a:t>
             </a:r>
@@ -31114,7 +32713,7 @@
       </p:sp>
       <p:sp>
         <p:nvSpPr>
-          <p:cNvPr id="19" name="slot.feature.5.body"/>
+          <p:cNvPr id="21" name="slot.feature.5.body"/>
           <p:cNvSpPr txBox="1"/>
           <p:nvPr/>
         </p:nvSpPr>
@@ -31355,7 +32954,130 @@
       </p:sp>
       <p:sp>
         <p:nvSpPr>
-          <p:cNvPr id="4" name="slot.title"/>
+          <p:cNvPr id="4" name="decor">
+            <a:extLst>
+              <a:ext uri="{FF2B5EF4-FFF2-40B4-BE49-F238E27FC236}">
+                <a16:creationId xmlns:a16="http://schemas.microsoft.com/office/drawing/2014/main" id="{9BCA9FA9-DC4A-F7F9-6F98-04EFCF05B790}"/>
+              </a:ext>
+            </a:extLst>
+          </p:cNvPr>
+          <p:cNvSpPr/>
+          <p:nvPr userDrawn="1"/>
+        </p:nvSpPr>
+        <p:spPr>
+          <a:xfrm>
+            <a:off x="-64731" y="246322"/>
+            <a:ext cx="512150" cy="423265"/>
+          </a:xfrm>
+          <a:prstGeom prst="pie">
+            <a:avLst>
+              <a:gd name="adj1" fmla="val 16190032"/>
+              <a:gd name="adj2" fmla="val 5400005"/>
+            </a:avLst>
+          </a:prstGeom>
+          <a:solidFill>
+            <a:schemeClr val="tx2"/>
+          </a:solidFill>
+          <a:ln>
+            <a:solidFill>
+              <a:schemeClr val="tx2"/>
+            </a:solidFill>
+          </a:ln>
+        </p:spPr>
+        <p:style>
+          <a:lnRef idx="2">
+            <a:schemeClr val="accent1">
+              <a:shade val="50000"/>
+            </a:schemeClr>
+          </a:lnRef>
+          <a:fillRef idx="1">
+            <a:schemeClr val="accent1"/>
+          </a:fillRef>
+          <a:effectRef idx="0">
+            <a:schemeClr val="accent1"/>
+          </a:effectRef>
+          <a:fontRef idx="minor">
+            <a:schemeClr val="lt1"/>
+          </a:fontRef>
+        </p:style>
+        <p:txBody>
+          <a:bodyPr lIns="36000" tIns="36000" rIns="36000" bIns="36000" rtlCol="0" anchor="ctr"/>
+          <a:lstStyle/>
+          <a:p>
+            <a:pPr algn="l" rtl="0"/>
+            <a:endParaRPr lang="en-US" sz="1200" b="1">
+              <a:solidFill>
+                <a:schemeClr val="bg1"/>
+              </a:solidFill>
+              <a:latin typeface="Arial" panose="020B0604020202020204" pitchFamily="34" charset="0"/>
+              <a:cs typeface="Arial" panose="020B0604020202020204" pitchFamily="34" charset="0"/>
+            </a:endParaRPr>
+          </a:p>
+        </p:txBody>
+      </p:sp>
+      <p:sp>
+        <p:nvSpPr>
+          <p:cNvPr id="5" name="decor">
+            <a:extLst>
+              <a:ext uri="{FF2B5EF4-FFF2-40B4-BE49-F238E27FC236}">
+                <a16:creationId xmlns:a16="http://schemas.microsoft.com/office/drawing/2014/main" id="{5D3B6E37-9E51-E62C-A843-852BEEBE5F2B}"/>
+              </a:ext>
+            </a:extLst>
+          </p:cNvPr>
+          <p:cNvSpPr/>
+          <p:nvPr userDrawn="1"/>
+        </p:nvSpPr>
+        <p:spPr>
+          <a:xfrm>
+            <a:off x="0" y="247761"/>
+            <a:ext cx="191344" cy="423265"/>
+          </a:xfrm>
+          <a:prstGeom prst="rect">
+            <a:avLst/>
+          </a:prstGeom>
+          <a:solidFill>
+            <a:schemeClr val="tx2"/>
+          </a:solidFill>
+          <a:ln>
+            <a:solidFill>
+              <a:schemeClr val="tx2"/>
+            </a:solidFill>
+          </a:ln>
+        </p:spPr>
+        <p:style>
+          <a:lnRef idx="2">
+            <a:schemeClr val="accent1">
+              <a:shade val="50000"/>
+            </a:schemeClr>
+          </a:lnRef>
+          <a:fillRef idx="1">
+            <a:schemeClr val="accent1"/>
+          </a:fillRef>
+          <a:effectRef idx="0">
+            <a:schemeClr val="accent1"/>
+          </a:effectRef>
+          <a:fontRef idx="minor">
+            <a:schemeClr val="lt1"/>
+          </a:fontRef>
+        </p:style>
+        <p:txBody>
+          <a:bodyPr lIns="36000" tIns="36000" rIns="36000" bIns="36000" rtlCol="0" anchor="ctr"/>
+          <a:lstStyle/>
+          <a:p>
+            <a:pPr algn="l" rtl="0"/>
+            <a:endParaRPr lang="en-US" sz="1200" b="1">
+              <a:solidFill>
+                <a:schemeClr val="bg1"/>
+              </a:solidFill>
+              <a:latin typeface="Arial" panose="020B0604020202020204" pitchFamily="34" charset="0"/>
+              <a:cs typeface="Arial" panose="020B0604020202020204" pitchFamily="34" charset="0"/>
+            </a:endParaRPr>
+          </a:p>
+        </p:txBody>
+      </p:sp>
+      <p:sp>
+        <p:nvSpPr>
+          <p:cNvPr id="6" name="slot.title"/>
           <p:cNvSpPr txBox="1"/>
           <p:nvPr/>
         </p:nvSpPr>
@@ -31379,7 +33101,7 @@
             <a:r>
               <a:rPr sz="2200" b="1">
                 <a:solidFill>
-                  <a:schemeClr val="dk1"/>
+                  <a:schemeClr val="accent2"/>
                 </a:solidFill>
                 <a:latin typeface="Futura Medium"/>
               </a:rPr>
@@ -31390,7 +33112,7 @@
       </p:sp>
       <p:sp>
         <p:nvSpPr>
-          <p:cNvPr id="5" name="decor"/>
+          <p:cNvPr id="7" name="decor"/>
           <p:cNvSpPr/>
           <p:nvPr/>
         </p:nvSpPr>
@@ -31433,7 +33155,7 @@
                 <a:solidFill>
                   <a:schemeClr val="lt1"/>
                 </a:solidFill>
-                <a:latin typeface="Futura Medium"/>
+                <a:latin typeface="Arial"/>
               </a:rPr>
               <a:t/>
             </a:r>
@@ -31442,7 +33164,7 @@
       </p:sp>
       <p:sp>
         <p:nvSpPr>
-          <p:cNvPr id="6" name="decor"/>
+          <p:cNvPr id="8" name="decor"/>
           <p:cNvSpPr/>
           <p:nvPr/>
         </p:nvSpPr>
@@ -31485,7 +33207,7 @@
                 <a:solidFill>
                   <a:schemeClr val="lt1"/>
                 </a:solidFill>
-                <a:latin typeface="Futura Medium"/>
+                <a:latin typeface="Arial"/>
               </a:rPr>
               <a:t>1</a:t>
             </a:r>
@@ -31494,7 +33216,7 @@
       </p:sp>
       <p:sp>
         <p:nvSpPr>
-          <p:cNvPr id="7" name="slot.phase.1.caption"/>
+          <p:cNvPr id="9" name="slot.phase.1.caption"/>
           <p:cNvSpPr txBox="1"/>
           <p:nvPr/>
         </p:nvSpPr>
@@ -31520,7 +33242,7 @@
                 <a:solidFill>
                   <a:schemeClr val="accent4"/>
                 </a:solidFill>
-                <a:latin typeface="Futura Medium"/>
+                <a:latin typeface="Arial"/>
               </a:rPr>
               <a:t>Q1 2026</a:t>
             </a:r>
@@ -31529,7 +33251,7 @@
       </p:sp>
       <p:sp>
         <p:nvSpPr>
-          <p:cNvPr id="8" name="slot.phase.1.title"/>
+          <p:cNvPr id="10" name="slot.phase.1.title"/>
           <p:cNvSpPr/>
           <p:nvPr/>
         </p:nvSpPr>
@@ -31572,7 +33294,7 @@
                 <a:solidFill>
                   <a:schemeClr val="accent1"/>
                 </a:solidFill>
-                <a:latin typeface="Futura Medium"/>
+                <a:latin typeface="Arial"/>
               </a:rPr>
               <a:t>Phase 1</a:t>
             </a:r>
@@ -31581,7 +33303,7 @@
       </p:sp>
       <p:sp>
         <p:nvSpPr>
-          <p:cNvPr id="9" name="slot.phase.1.body"/>
+          <p:cNvPr id="11" name="slot.phase.1.body"/>
           <p:cNvSpPr txBox="1"/>
           <p:nvPr/>
         </p:nvSpPr>
@@ -31616,7 +33338,7 @@
       </p:sp>
       <p:sp>
         <p:nvSpPr>
-          <p:cNvPr id="10" name="decor"/>
+          <p:cNvPr id="12" name="decor"/>
           <p:cNvSpPr/>
           <p:nvPr/>
         </p:nvSpPr>
@@ -31659,7 +33381,7 @@
                 <a:solidFill>
                   <a:schemeClr val="lt1"/>
                 </a:solidFill>
-                <a:latin typeface="Futura Medium"/>
+                <a:latin typeface="Arial"/>
               </a:rPr>
               <a:t>2</a:t>
             </a:r>
@@ -31668,7 +33390,7 @@
       </p:sp>
       <p:sp>
         <p:nvSpPr>
-          <p:cNvPr id="11" name="slot.phase.2.caption"/>
+          <p:cNvPr id="13" name="slot.phase.2.caption"/>
           <p:cNvSpPr txBox="1"/>
           <p:nvPr/>
         </p:nvSpPr>
@@ -31694,7 +33416,7 @@
                 <a:solidFill>
                   <a:schemeClr val="accent4"/>
                 </a:solidFill>
-                <a:latin typeface="Futura Medium"/>
+                <a:latin typeface="Arial"/>
               </a:rPr>
               <a:t>Q1 2026</a:t>
             </a:r>
@@ -31703,7 +33425,7 @@
       </p:sp>
       <p:sp>
         <p:nvSpPr>
-          <p:cNvPr id="12" name="slot.phase.2.title"/>
+          <p:cNvPr id="14" name="slot.phase.2.title"/>
           <p:cNvSpPr/>
           <p:nvPr/>
         </p:nvSpPr>
@@ -31746,7 +33468,7 @@
                 <a:solidFill>
                   <a:schemeClr val="accent1"/>
                 </a:solidFill>
-                <a:latin typeface="Futura Medium"/>
+                <a:latin typeface="Arial"/>
               </a:rPr>
               <a:t>Phase 2</a:t>
             </a:r>
@@ -31755,7 +33477,7 @@
       </p:sp>
       <p:sp>
         <p:nvSpPr>
-          <p:cNvPr id="13" name="slot.phase.2.body"/>
+          <p:cNvPr id="15" name="slot.phase.2.body"/>
           <p:cNvSpPr txBox="1"/>
           <p:nvPr/>
         </p:nvSpPr>
@@ -31790,7 +33512,7 @@
       </p:sp>
       <p:sp>
         <p:nvSpPr>
-          <p:cNvPr id="14" name="decor"/>
+          <p:cNvPr id="16" name="decor"/>
           <p:cNvSpPr/>
           <p:nvPr/>
         </p:nvSpPr>
@@ -31833,7 +33555,7 @@
                 <a:solidFill>
                   <a:schemeClr val="lt1"/>
                 </a:solidFill>
-                <a:latin typeface="Futura Medium"/>
+                <a:latin typeface="Arial"/>
               </a:rPr>
               <a:t>3</a:t>
             </a:r>
@@ -31842,7 +33564,7 @@
       </p:sp>
       <p:sp>
         <p:nvSpPr>
-          <p:cNvPr id="15" name="slot.phase.3.caption"/>
+          <p:cNvPr id="17" name="slot.phase.3.caption"/>
           <p:cNvSpPr txBox="1"/>
           <p:nvPr/>
         </p:nvSpPr>
@@ -31868,7 +33590,7 @@
                 <a:solidFill>
                   <a:schemeClr val="accent4"/>
                 </a:solidFill>
-                <a:latin typeface="Futura Medium"/>
+                <a:latin typeface="Arial"/>
               </a:rPr>
               <a:t>Q1 2026</a:t>
             </a:r>
@@ -31877,7 +33599,7 @@
       </p:sp>
       <p:sp>
         <p:nvSpPr>
-          <p:cNvPr id="16" name="slot.phase.3.title"/>
+          <p:cNvPr id="18" name="slot.phase.3.title"/>
           <p:cNvSpPr/>
           <p:nvPr/>
         </p:nvSpPr>
@@ -31920,7 +33642,7 @@
                 <a:solidFill>
                   <a:schemeClr val="accent1"/>
                 </a:solidFill>
-                <a:latin typeface="Futura Medium"/>
+                <a:latin typeface="Arial"/>
               </a:rPr>
               <a:t>Phase 3</a:t>
             </a:r>
@@ -31929,7 +33651,7 @@
       </p:sp>
       <p:sp>
         <p:nvSpPr>
-          <p:cNvPr id="17" name="slot.phase.3.body"/>
+          <p:cNvPr id="19" name="slot.phase.3.body"/>
           <p:cNvSpPr txBox="1"/>
           <p:nvPr/>
         </p:nvSpPr>
@@ -32036,7 +33758,130 @@
       </p:sp>
       <p:sp>
         <p:nvSpPr>
-          <p:cNvPr id="4" name="slot.title"/>
+          <p:cNvPr id="4" name="decor">
+            <a:extLst>
+              <a:ext uri="{FF2B5EF4-FFF2-40B4-BE49-F238E27FC236}">
+                <a16:creationId xmlns:a16="http://schemas.microsoft.com/office/drawing/2014/main" id="{9BCA9FA9-DC4A-F7F9-6F98-04EFCF05B790}"/>
+              </a:ext>
+            </a:extLst>
+          </p:cNvPr>
+          <p:cNvSpPr/>
+          <p:nvPr userDrawn="1"/>
+        </p:nvSpPr>
+        <p:spPr>
+          <a:xfrm>
+            <a:off x="-64731" y="246322"/>
+            <a:ext cx="512150" cy="423265"/>
+          </a:xfrm>
+          <a:prstGeom prst="pie">
+            <a:avLst>
+              <a:gd name="adj1" fmla="val 16190032"/>
+              <a:gd name="adj2" fmla="val 5400005"/>
+            </a:avLst>
+          </a:prstGeom>
+          <a:solidFill>
+            <a:schemeClr val="tx2"/>
+          </a:solidFill>
+          <a:ln>
+            <a:solidFill>
+              <a:schemeClr val="tx2"/>
+            </a:solidFill>
+          </a:ln>
+        </p:spPr>
+        <p:style>
+          <a:lnRef idx="2">
+            <a:schemeClr val="accent1">
+              <a:shade val="50000"/>
+            </a:schemeClr>
+          </a:lnRef>
+          <a:fillRef idx="1">
+            <a:schemeClr val="accent1"/>
+          </a:fillRef>
+          <a:effectRef idx="0">
+            <a:schemeClr val="accent1"/>
+          </a:effectRef>
+          <a:fontRef idx="minor">
+            <a:schemeClr val="lt1"/>
+          </a:fontRef>
+        </p:style>
+        <p:txBody>
+          <a:bodyPr lIns="36000" tIns="36000" rIns="36000" bIns="36000" rtlCol="0" anchor="ctr"/>
+          <a:lstStyle/>
+          <a:p>
+            <a:pPr algn="l" rtl="0"/>
+            <a:endParaRPr lang="en-US" sz="1200" b="1">
+              <a:solidFill>
+                <a:schemeClr val="bg1"/>
+              </a:solidFill>
+              <a:latin typeface="Arial" panose="020B0604020202020204" pitchFamily="34" charset="0"/>
+              <a:cs typeface="Arial" panose="020B0604020202020204" pitchFamily="34" charset="0"/>
+            </a:endParaRPr>
+          </a:p>
+        </p:txBody>
+      </p:sp>
+      <p:sp>
+        <p:nvSpPr>
+          <p:cNvPr id="5" name="decor">
+            <a:extLst>
+              <a:ext uri="{FF2B5EF4-FFF2-40B4-BE49-F238E27FC236}">
+                <a16:creationId xmlns:a16="http://schemas.microsoft.com/office/drawing/2014/main" id="{5D3B6E37-9E51-E62C-A843-852BEEBE5F2B}"/>
+              </a:ext>
+            </a:extLst>
+          </p:cNvPr>
+          <p:cNvSpPr/>
+          <p:nvPr userDrawn="1"/>
+        </p:nvSpPr>
+        <p:spPr>
+          <a:xfrm>
+            <a:off x="0" y="247761"/>
+            <a:ext cx="191344" cy="423265"/>
+          </a:xfrm>
+          <a:prstGeom prst="rect">
+            <a:avLst/>
+          </a:prstGeom>
+          <a:solidFill>
+            <a:schemeClr val="tx2"/>
+          </a:solidFill>
+          <a:ln>
+            <a:solidFill>
+              <a:schemeClr val="tx2"/>
+            </a:solidFill>
+          </a:ln>
+        </p:spPr>
+        <p:style>
+          <a:lnRef idx="2">
+            <a:schemeClr val="accent1">
+              <a:shade val="50000"/>
+            </a:schemeClr>
+          </a:lnRef>
+          <a:fillRef idx="1">
+            <a:schemeClr val="accent1"/>
+          </a:fillRef>
+          <a:effectRef idx="0">
+            <a:schemeClr val="accent1"/>
+          </a:effectRef>
+          <a:fontRef idx="minor">
+            <a:schemeClr val="lt1"/>
+          </a:fontRef>
+        </p:style>
+        <p:txBody>
+          <a:bodyPr lIns="36000" tIns="36000" rIns="36000" bIns="36000" rtlCol="0" anchor="ctr"/>
+          <a:lstStyle/>
+          <a:p>
+            <a:pPr algn="l" rtl="0"/>
+            <a:endParaRPr lang="en-US" sz="1200" b="1">
+              <a:solidFill>
+                <a:schemeClr val="bg1"/>
+              </a:solidFill>
+              <a:latin typeface="Arial" panose="020B0604020202020204" pitchFamily="34" charset="0"/>
+              <a:cs typeface="Arial" panose="020B0604020202020204" pitchFamily="34" charset="0"/>
+            </a:endParaRPr>
+          </a:p>
+        </p:txBody>
+      </p:sp>
+      <p:sp>
+        <p:nvSpPr>
+          <p:cNvPr id="6" name="slot.title"/>
           <p:cNvSpPr txBox="1"/>
           <p:nvPr/>
         </p:nvSpPr>
@@ -32060,7 +33905,7 @@
             <a:r>
               <a:rPr sz="2200" b="1">
                 <a:solidFill>
-                  <a:schemeClr val="dk1"/>
+                  <a:schemeClr val="accent2"/>
                 </a:solidFill>
                 <a:latin typeface="Futura Medium"/>
               </a:rPr>
@@ -32071,7 +33916,7 @@
       </p:sp>
       <p:sp>
         <p:nvSpPr>
-          <p:cNvPr id="5" name="decor"/>
+          <p:cNvPr id="7" name="decor"/>
           <p:cNvSpPr/>
           <p:nvPr/>
         </p:nvSpPr>
@@ -32114,7 +33959,7 @@
                 <a:solidFill>
                   <a:schemeClr val="lt1"/>
                 </a:solidFill>
-                <a:latin typeface="Futura Medium"/>
+                <a:latin typeface="Arial"/>
               </a:rPr>
               <a:t/>
             </a:r>
@@ -32123,7 +33968,7 @@
       </p:sp>
       <p:sp>
         <p:nvSpPr>
-          <p:cNvPr id="6" name="decor"/>
+          <p:cNvPr id="8" name="decor"/>
           <p:cNvSpPr/>
           <p:nvPr/>
         </p:nvSpPr>
@@ -32166,7 +34011,7 @@
                 <a:solidFill>
                   <a:schemeClr val="lt1"/>
                 </a:solidFill>
-                <a:latin typeface="Futura Medium"/>
+                <a:latin typeface="Arial"/>
               </a:rPr>
               <a:t>1</a:t>
             </a:r>
@@ -32175,7 +34020,7 @@
       </p:sp>
       <p:sp>
         <p:nvSpPr>
-          <p:cNvPr id="7" name="slot.phase.1.caption"/>
+          <p:cNvPr id="9" name="slot.phase.1.caption"/>
           <p:cNvSpPr txBox="1"/>
           <p:nvPr/>
         </p:nvSpPr>
@@ -32201,7 +34046,7 @@
                 <a:solidFill>
                   <a:schemeClr val="accent4"/>
                 </a:solidFill>
-                <a:latin typeface="Futura Medium"/>
+                <a:latin typeface="Arial"/>
               </a:rPr>
               <a:t>Q1 2026</a:t>
             </a:r>
@@ -32210,7 +34055,7 @@
       </p:sp>
       <p:sp>
         <p:nvSpPr>
-          <p:cNvPr id="8" name="slot.phase.1.title"/>
+          <p:cNvPr id="10" name="slot.phase.1.title"/>
           <p:cNvSpPr/>
           <p:nvPr/>
         </p:nvSpPr>
@@ -32253,7 +34098,7 @@
                 <a:solidFill>
                   <a:schemeClr val="accent1"/>
                 </a:solidFill>
-                <a:latin typeface="Futura Medium"/>
+                <a:latin typeface="Arial"/>
               </a:rPr>
               <a:t>Phase 1</a:t>
             </a:r>
@@ -32262,7 +34107,7 @@
       </p:sp>
       <p:sp>
         <p:nvSpPr>
-          <p:cNvPr id="9" name="slot.phase.1.body"/>
+          <p:cNvPr id="11" name="slot.phase.1.body"/>
           <p:cNvSpPr txBox="1"/>
           <p:nvPr/>
         </p:nvSpPr>
@@ -32297,7 +34142,7 @@
       </p:sp>
       <p:sp>
         <p:nvSpPr>
-          <p:cNvPr id="10" name="decor"/>
+          <p:cNvPr id="12" name="decor"/>
           <p:cNvSpPr/>
           <p:nvPr/>
         </p:nvSpPr>
@@ -32340,7 +34185,7 @@
                 <a:solidFill>
                   <a:schemeClr val="lt1"/>
                 </a:solidFill>
-                <a:latin typeface="Futura Medium"/>
+                <a:latin typeface="Arial"/>
               </a:rPr>
               <a:t>2</a:t>
             </a:r>
@@ -32349,7 +34194,7 @@
       </p:sp>
       <p:sp>
         <p:nvSpPr>
-          <p:cNvPr id="11" name="slot.phase.2.caption"/>
+          <p:cNvPr id="13" name="slot.phase.2.caption"/>
           <p:cNvSpPr txBox="1"/>
           <p:nvPr/>
         </p:nvSpPr>
@@ -32375,7 +34220,7 @@
                 <a:solidFill>
                   <a:schemeClr val="accent4"/>
                 </a:solidFill>
-                <a:latin typeface="Futura Medium"/>
+                <a:latin typeface="Arial"/>
               </a:rPr>
               <a:t>Q1 2026</a:t>
             </a:r>
@@ -32384,7 +34229,7 @@
       </p:sp>
       <p:sp>
         <p:nvSpPr>
-          <p:cNvPr id="12" name="slot.phase.2.title"/>
+          <p:cNvPr id="14" name="slot.phase.2.title"/>
           <p:cNvSpPr/>
           <p:nvPr/>
         </p:nvSpPr>
@@ -32427,7 +34272,7 @@
                 <a:solidFill>
                   <a:schemeClr val="accent1"/>
                 </a:solidFill>
-                <a:latin typeface="Futura Medium"/>
+                <a:latin typeface="Arial"/>
               </a:rPr>
               <a:t>Phase 2</a:t>
             </a:r>
@@ -32436,7 +34281,7 @@
       </p:sp>
       <p:sp>
         <p:nvSpPr>
-          <p:cNvPr id="13" name="slot.phase.2.body"/>
+          <p:cNvPr id="15" name="slot.phase.2.body"/>
           <p:cNvSpPr txBox="1"/>
           <p:nvPr/>
         </p:nvSpPr>
@@ -32471,7 +34316,7 @@
       </p:sp>
       <p:sp>
         <p:nvSpPr>
-          <p:cNvPr id="14" name="decor"/>
+          <p:cNvPr id="16" name="decor"/>
           <p:cNvSpPr/>
           <p:nvPr/>
         </p:nvSpPr>
@@ -32514,7 +34359,7 @@
                 <a:solidFill>
                   <a:schemeClr val="lt1"/>
                 </a:solidFill>
-                <a:latin typeface="Futura Medium"/>
+                <a:latin typeface="Arial"/>
               </a:rPr>
               <a:t>3</a:t>
             </a:r>
@@ -32523,7 +34368,7 @@
       </p:sp>
       <p:sp>
         <p:nvSpPr>
-          <p:cNvPr id="15" name="slot.phase.3.caption"/>
+          <p:cNvPr id="17" name="slot.phase.3.caption"/>
           <p:cNvSpPr txBox="1"/>
           <p:nvPr/>
         </p:nvSpPr>
@@ -32549,7 +34394,7 @@
                 <a:solidFill>
                   <a:schemeClr val="accent4"/>
                 </a:solidFill>
-                <a:latin typeface="Futura Medium"/>
+                <a:latin typeface="Arial"/>
               </a:rPr>
               <a:t>Q1 2026</a:t>
             </a:r>
@@ -32558,7 +34403,7 @@
       </p:sp>
       <p:sp>
         <p:nvSpPr>
-          <p:cNvPr id="16" name="slot.phase.3.title"/>
+          <p:cNvPr id="18" name="slot.phase.3.title"/>
           <p:cNvSpPr/>
           <p:nvPr/>
         </p:nvSpPr>
@@ -32601,7 +34446,7 @@
                 <a:solidFill>
                   <a:schemeClr val="accent1"/>
                 </a:solidFill>
-                <a:latin typeface="Futura Medium"/>
+                <a:latin typeface="Arial"/>
               </a:rPr>
               <a:t>Phase 3</a:t>
             </a:r>
@@ -32610,7 +34455,7 @@
       </p:sp>
       <p:sp>
         <p:nvSpPr>
-          <p:cNvPr id="17" name="slot.phase.3.body"/>
+          <p:cNvPr id="19" name="slot.phase.3.body"/>
           <p:cNvSpPr txBox="1"/>
           <p:nvPr/>
         </p:nvSpPr>
@@ -32645,7 +34490,7 @@
       </p:sp>
       <p:sp>
         <p:nvSpPr>
-          <p:cNvPr id="18" name="decor"/>
+          <p:cNvPr id="20" name="decor"/>
           <p:cNvSpPr/>
           <p:nvPr/>
         </p:nvSpPr>
@@ -32688,7 +34533,7 @@
                 <a:solidFill>
                   <a:schemeClr val="lt1"/>
                 </a:solidFill>
-                <a:latin typeface="Futura Medium"/>
+                <a:latin typeface="Arial"/>
               </a:rPr>
               <a:t>4</a:t>
             </a:r>
@@ -32697,7 +34542,7 @@
       </p:sp>
       <p:sp>
         <p:nvSpPr>
-          <p:cNvPr id="19" name="slot.phase.4.caption"/>
+          <p:cNvPr id="21" name="slot.phase.4.caption"/>
           <p:cNvSpPr txBox="1"/>
           <p:nvPr/>
         </p:nvSpPr>
@@ -32723,7 +34568,7 @@
                 <a:solidFill>
                   <a:schemeClr val="accent4"/>
                 </a:solidFill>
-                <a:latin typeface="Futura Medium"/>
+                <a:latin typeface="Arial"/>
               </a:rPr>
               <a:t>Q1 2026</a:t>
             </a:r>
@@ -32732,7 +34577,7 @@
       </p:sp>
       <p:sp>
         <p:nvSpPr>
-          <p:cNvPr id="20" name="slot.phase.4.title"/>
+          <p:cNvPr id="22" name="slot.phase.4.title"/>
           <p:cNvSpPr/>
           <p:nvPr/>
         </p:nvSpPr>
@@ -32775,7 +34620,7 @@
                 <a:solidFill>
                   <a:schemeClr val="accent1"/>
                 </a:solidFill>
-                <a:latin typeface="Futura Medium"/>
+                <a:latin typeface="Arial"/>
               </a:rPr>
               <a:t>Phase 4</a:t>
             </a:r>
@@ -32784,7 +34629,7 @@
       </p:sp>
       <p:sp>
         <p:nvSpPr>
-          <p:cNvPr id="21" name="slot.phase.4.body"/>
+          <p:cNvPr id="23" name="slot.phase.4.body"/>
           <p:cNvSpPr txBox="1"/>
           <p:nvPr/>
         </p:nvSpPr>
@@ -32891,7 +34736,130 @@
       </p:sp>
       <p:sp>
         <p:nvSpPr>
-          <p:cNvPr id="4" name="slot.title"/>
+          <p:cNvPr id="4" name="decor">
+            <a:extLst>
+              <a:ext uri="{FF2B5EF4-FFF2-40B4-BE49-F238E27FC236}">
+                <a16:creationId xmlns:a16="http://schemas.microsoft.com/office/drawing/2014/main" id="{9BCA9FA9-DC4A-F7F9-6F98-04EFCF05B790}"/>
+              </a:ext>
+            </a:extLst>
+          </p:cNvPr>
+          <p:cNvSpPr/>
+          <p:nvPr userDrawn="1"/>
+        </p:nvSpPr>
+        <p:spPr>
+          <a:xfrm>
+            <a:off x="-64731" y="246322"/>
+            <a:ext cx="512150" cy="423265"/>
+          </a:xfrm>
+          <a:prstGeom prst="pie">
+            <a:avLst>
+              <a:gd name="adj1" fmla="val 16190032"/>
+              <a:gd name="adj2" fmla="val 5400005"/>
+            </a:avLst>
+          </a:prstGeom>
+          <a:solidFill>
+            <a:schemeClr val="tx2"/>
+          </a:solidFill>
+          <a:ln>
+            <a:solidFill>
+              <a:schemeClr val="tx2"/>
+            </a:solidFill>
+          </a:ln>
+        </p:spPr>
+        <p:style>
+          <a:lnRef idx="2">
+            <a:schemeClr val="accent1">
+              <a:shade val="50000"/>
+            </a:schemeClr>
+          </a:lnRef>
+          <a:fillRef idx="1">
+            <a:schemeClr val="accent1"/>
+          </a:fillRef>
+          <a:effectRef idx="0">
+            <a:schemeClr val="accent1"/>
+          </a:effectRef>
+          <a:fontRef idx="minor">
+            <a:schemeClr val="lt1"/>
+          </a:fontRef>
+        </p:style>
+        <p:txBody>
+          <a:bodyPr lIns="36000" tIns="36000" rIns="36000" bIns="36000" rtlCol="0" anchor="ctr"/>
+          <a:lstStyle/>
+          <a:p>
+            <a:pPr algn="l" rtl="0"/>
+            <a:endParaRPr lang="en-US" sz="1200" b="1">
+              <a:solidFill>
+                <a:schemeClr val="bg1"/>
+              </a:solidFill>
+              <a:latin typeface="Arial" panose="020B0604020202020204" pitchFamily="34" charset="0"/>
+              <a:cs typeface="Arial" panose="020B0604020202020204" pitchFamily="34" charset="0"/>
+            </a:endParaRPr>
+          </a:p>
+        </p:txBody>
+      </p:sp>
+      <p:sp>
+        <p:nvSpPr>
+          <p:cNvPr id="5" name="decor">
+            <a:extLst>
+              <a:ext uri="{FF2B5EF4-FFF2-40B4-BE49-F238E27FC236}">
+                <a16:creationId xmlns:a16="http://schemas.microsoft.com/office/drawing/2014/main" id="{5D3B6E37-9E51-E62C-A843-852BEEBE5F2B}"/>
+              </a:ext>
+            </a:extLst>
+          </p:cNvPr>
+          <p:cNvSpPr/>
+          <p:nvPr userDrawn="1"/>
+        </p:nvSpPr>
+        <p:spPr>
+          <a:xfrm>
+            <a:off x="0" y="247761"/>
+            <a:ext cx="191344" cy="423265"/>
+          </a:xfrm>
+          <a:prstGeom prst="rect">
+            <a:avLst/>
+          </a:prstGeom>
+          <a:solidFill>
+            <a:schemeClr val="tx2"/>
+          </a:solidFill>
+          <a:ln>
+            <a:solidFill>
+              <a:schemeClr val="tx2"/>
+            </a:solidFill>
+          </a:ln>
+        </p:spPr>
+        <p:style>
+          <a:lnRef idx="2">
+            <a:schemeClr val="accent1">
+              <a:shade val="50000"/>
+            </a:schemeClr>
+          </a:lnRef>
+          <a:fillRef idx="1">
+            <a:schemeClr val="accent1"/>
+          </a:fillRef>
+          <a:effectRef idx="0">
+            <a:schemeClr val="accent1"/>
+          </a:effectRef>
+          <a:fontRef idx="minor">
+            <a:schemeClr val="lt1"/>
+          </a:fontRef>
+        </p:style>
+        <p:txBody>
+          <a:bodyPr lIns="36000" tIns="36000" rIns="36000" bIns="36000" rtlCol="0" anchor="ctr"/>
+          <a:lstStyle/>
+          <a:p>
+            <a:pPr algn="l" rtl="0"/>
+            <a:endParaRPr lang="en-US" sz="1200" b="1">
+              <a:solidFill>
+                <a:schemeClr val="bg1"/>
+              </a:solidFill>
+              <a:latin typeface="Arial" panose="020B0604020202020204" pitchFamily="34" charset="0"/>
+              <a:cs typeface="Arial" panose="020B0604020202020204" pitchFamily="34" charset="0"/>
+            </a:endParaRPr>
+          </a:p>
+        </p:txBody>
+      </p:sp>
+      <p:sp>
+        <p:nvSpPr>
+          <p:cNvPr id="6" name="slot.title"/>
           <p:cNvSpPr txBox="1"/>
           <p:nvPr/>
         </p:nvSpPr>
@@ -32915,7 +34883,7 @@
             <a:r>
               <a:rPr sz="2200" b="1">
                 <a:solidFill>
-                  <a:schemeClr val="dk1"/>
+                  <a:schemeClr val="accent2"/>
                 </a:solidFill>
                 <a:latin typeface="Futura Medium"/>
               </a:rPr>
@@ -32926,7 +34894,7 @@
       </p:sp>
       <p:sp>
         <p:nvSpPr>
-          <p:cNvPr id="5" name="decor"/>
+          <p:cNvPr id="7" name="decor"/>
           <p:cNvSpPr/>
           <p:nvPr/>
         </p:nvSpPr>
@@ -32969,7 +34937,7 @@
                 <a:solidFill>
                   <a:schemeClr val="lt1"/>
                 </a:solidFill>
-                <a:latin typeface="Futura Medium"/>
+                <a:latin typeface="Arial"/>
               </a:rPr>
               <a:t/>
             </a:r>
@@ -32978,7 +34946,7 @@
       </p:sp>
       <p:sp>
         <p:nvSpPr>
-          <p:cNvPr id="6" name="decor"/>
+          <p:cNvPr id="8" name="decor"/>
           <p:cNvSpPr/>
           <p:nvPr/>
         </p:nvSpPr>
@@ -33021,7 +34989,7 @@
                 <a:solidFill>
                   <a:schemeClr val="lt1"/>
                 </a:solidFill>
-                <a:latin typeface="Futura Medium"/>
+                <a:latin typeface="Arial"/>
               </a:rPr>
               <a:t>1</a:t>
             </a:r>
@@ -33030,7 +34998,7 @@
       </p:sp>
       <p:sp>
         <p:nvSpPr>
-          <p:cNvPr id="7" name="slot.phase.1.caption"/>
+          <p:cNvPr id="9" name="slot.phase.1.caption"/>
           <p:cNvSpPr txBox="1"/>
           <p:nvPr/>
         </p:nvSpPr>
@@ -33056,7 +35024,7 @@
                 <a:solidFill>
                   <a:schemeClr val="accent4"/>
                 </a:solidFill>
-                <a:latin typeface="Futura Medium"/>
+                <a:latin typeface="Arial"/>
               </a:rPr>
               <a:t>Q1 2026</a:t>
             </a:r>
@@ -33065,7 +35033,7 @@
       </p:sp>
       <p:sp>
         <p:nvSpPr>
-          <p:cNvPr id="8" name="slot.phase.1.title"/>
+          <p:cNvPr id="10" name="slot.phase.1.title"/>
           <p:cNvSpPr/>
           <p:nvPr/>
         </p:nvSpPr>
@@ -33108,7 +35076,7 @@
                 <a:solidFill>
                   <a:schemeClr val="accent1"/>
                 </a:solidFill>
-                <a:latin typeface="Futura Medium"/>
+                <a:latin typeface="Arial"/>
               </a:rPr>
               <a:t>Phase 1</a:t>
             </a:r>
@@ -33117,7 +35085,7 @@
       </p:sp>
       <p:sp>
         <p:nvSpPr>
-          <p:cNvPr id="9" name="slot.phase.1.body"/>
+          <p:cNvPr id="11" name="slot.phase.1.body"/>
           <p:cNvSpPr txBox="1"/>
           <p:nvPr/>
         </p:nvSpPr>
@@ -33152,7 +35120,7 @@
       </p:sp>
       <p:sp>
         <p:nvSpPr>
-          <p:cNvPr id="10" name="decor"/>
+          <p:cNvPr id="12" name="decor"/>
           <p:cNvSpPr/>
           <p:nvPr/>
         </p:nvSpPr>
@@ -33195,7 +35163,7 @@
                 <a:solidFill>
                   <a:schemeClr val="lt1"/>
                 </a:solidFill>
-                <a:latin typeface="Futura Medium"/>
+                <a:latin typeface="Arial"/>
               </a:rPr>
               <a:t>2</a:t>
             </a:r>
@@ -33204,7 +35172,7 @@
       </p:sp>
       <p:sp>
         <p:nvSpPr>
-          <p:cNvPr id="11" name="slot.phase.2.caption"/>
+          <p:cNvPr id="13" name="slot.phase.2.caption"/>
           <p:cNvSpPr txBox="1"/>
           <p:nvPr/>
         </p:nvSpPr>
@@ -33230,7 +35198,7 @@
                 <a:solidFill>
                   <a:schemeClr val="accent4"/>
                 </a:solidFill>
-                <a:latin typeface="Futura Medium"/>
+                <a:latin typeface="Arial"/>
               </a:rPr>
               <a:t>Q1 2026</a:t>
             </a:r>
@@ -33239,7 +35207,7 @@
       </p:sp>
       <p:sp>
         <p:nvSpPr>
-          <p:cNvPr id="12" name="slot.phase.2.title"/>
+          <p:cNvPr id="14" name="slot.phase.2.title"/>
           <p:cNvSpPr/>
           <p:nvPr/>
         </p:nvSpPr>
@@ -33282,7 +35250,7 @@
                 <a:solidFill>
                   <a:schemeClr val="accent1"/>
                 </a:solidFill>
-                <a:latin typeface="Futura Medium"/>
+                <a:latin typeface="Arial"/>
               </a:rPr>
               <a:t>Phase 2</a:t>
             </a:r>
@@ -33291,7 +35259,7 @@
       </p:sp>
       <p:sp>
         <p:nvSpPr>
-          <p:cNvPr id="13" name="slot.phase.2.body"/>
+          <p:cNvPr id="15" name="slot.phase.2.body"/>
           <p:cNvSpPr txBox="1"/>
           <p:nvPr/>
         </p:nvSpPr>
@@ -33326,7 +35294,7 @@
       </p:sp>
       <p:sp>
         <p:nvSpPr>
-          <p:cNvPr id="14" name="decor"/>
+          <p:cNvPr id="16" name="decor"/>
           <p:cNvSpPr/>
           <p:nvPr/>
         </p:nvSpPr>
@@ -33369,7 +35337,7 @@
                 <a:solidFill>
                   <a:schemeClr val="lt1"/>
                 </a:solidFill>
-                <a:latin typeface="Futura Medium"/>
+                <a:latin typeface="Arial"/>
               </a:rPr>
               <a:t>3</a:t>
             </a:r>
@@ -33378,7 +35346,7 @@
       </p:sp>
       <p:sp>
         <p:nvSpPr>
-          <p:cNvPr id="15" name="slot.phase.3.caption"/>
+          <p:cNvPr id="17" name="slot.phase.3.caption"/>
           <p:cNvSpPr txBox="1"/>
           <p:nvPr/>
         </p:nvSpPr>
@@ -33404,7 +35372,7 @@
                 <a:solidFill>
                   <a:schemeClr val="accent4"/>
                 </a:solidFill>
-                <a:latin typeface="Futura Medium"/>
+                <a:latin typeface="Arial"/>
               </a:rPr>
               <a:t>Q1 2026</a:t>
             </a:r>
@@ -33413,7 +35381,7 @@
       </p:sp>
       <p:sp>
         <p:nvSpPr>
-          <p:cNvPr id="16" name="slot.phase.3.title"/>
+          <p:cNvPr id="18" name="slot.phase.3.title"/>
           <p:cNvSpPr/>
           <p:nvPr/>
         </p:nvSpPr>
@@ -33456,7 +35424,7 @@
                 <a:solidFill>
                   <a:schemeClr val="accent1"/>
                 </a:solidFill>
-                <a:latin typeface="Futura Medium"/>
+                <a:latin typeface="Arial"/>
               </a:rPr>
               <a:t>Phase 3</a:t>
             </a:r>
@@ -33465,7 +35433,7 @@
       </p:sp>
       <p:sp>
         <p:nvSpPr>
-          <p:cNvPr id="17" name="slot.phase.3.body"/>
+          <p:cNvPr id="19" name="slot.phase.3.body"/>
           <p:cNvSpPr txBox="1"/>
           <p:nvPr/>
         </p:nvSpPr>
@@ -33500,7 +35468,7 @@
       </p:sp>
       <p:sp>
         <p:nvSpPr>
-          <p:cNvPr id="18" name="decor"/>
+          <p:cNvPr id="20" name="decor"/>
           <p:cNvSpPr/>
           <p:nvPr/>
         </p:nvSpPr>
@@ -33543,7 +35511,7 @@
                 <a:solidFill>
                   <a:schemeClr val="lt1"/>
                 </a:solidFill>
-                <a:latin typeface="Futura Medium"/>
+                <a:latin typeface="Arial"/>
               </a:rPr>
               <a:t>4</a:t>
             </a:r>
@@ -33552,7 +35520,7 @@
       </p:sp>
       <p:sp>
         <p:nvSpPr>
-          <p:cNvPr id="19" name="slot.phase.4.caption"/>
+          <p:cNvPr id="21" name="slot.phase.4.caption"/>
           <p:cNvSpPr txBox="1"/>
           <p:nvPr/>
         </p:nvSpPr>
@@ -33578,7 +35546,7 @@
                 <a:solidFill>
                   <a:schemeClr val="accent4"/>
                 </a:solidFill>
-                <a:latin typeface="Futura Medium"/>
+                <a:latin typeface="Arial"/>
               </a:rPr>
               <a:t>Q1 2026</a:t>
             </a:r>
@@ -33587,7 +35555,7 @@
       </p:sp>
       <p:sp>
         <p:nvSpPr>
-          <p:cNvPr id="20" name="slot.phase.4.title"/>
+          <p:cNvPr id="22" name="slot.phase.4.title"/>
           <p:cNvSpPr/>
           <p:nvPr/>
         </p:nvSpPr>
@@ -33630,7 +35598,7 @@
                 <a:solidFill>
                   <a:schemeClr val="accent1"/>
                 </a:solidFill>
-                <a:latin typeface="Futura Medium"/>
+                <a:latin typeface="Arial"/>
               </a:rPr>
               <a:t>Phase 4</a:t>
             </a:r>
@@ -33639,7 +35607,7 @@
       </p:sp>
       <p:sp>
         <p:nvSpPr>
-          <p:cNvPr id="21" name="slot.phase.4.body"/>
+          <p:cNvPr id="23" name="slot.phase.4.body"/>
           <p:cNvSpPr txBox="1"/>
           <p:nvPr/>
         </p:nvSpPr>
@@ -33674,7 +35642,7 @@
       </p:sp>
       <p:sp>
         <p:nvSpPr>
-          <p:cNvPr id="22" name="decor"/>
+          <p:cNvPr id="24" name="decor"/>
           <p:cNvSpPr/>
           <p:nvPr/>
         </p:nvSpPr>
@@ -33717,7 +35685,7 @@
                 <a:solidFill>
                   <a:schemeClr val="lt1"/>
                 </a:solidFill>
-                <a:latin typeface="Futura Medium"/>
+                <a:latin typeface="Arial"/>
               </a:rPr>
               <a:t>5</a:t>
             </a:r>
@@ -33726,7 +35694,7 @@
       </p:sp>
       <p:sp>
         <p:nvSpPr>
-          <p:cNvPr id="23" name="slot.phase.5.caption"/>
+          <p:cNvPr id="25" name="slot.phase.5.caption"/>
           <p:cNvSpPr txBox="1"/>
           <p:nvPr/>
         </p:nvSpPr>
@@ -33752,7 +35720,7 @@
                 <a:solidFill>
                   <a:schemeClr val="accent4"/>
                 </a:solidFill>
-                <a:latin typeface="Futura Medium"/>
+                <a:latin typeface="Arial"/>
               </a:rPr>
               <a:t>Q1 2026</a:t>
             </a:r>
@@ -33761,7 +35729,7 @@
       </p:sp>
       <p:sp>
         <p:nvSpPr>
-          <p:cNvPr id="24" name="slot.phase.5.title"/>
+          <p:cNvPr id="26" name="slot.phase.5.title"/>
           <p:cNvSpPr/>
           <p:nvPr/>
         </p:nvSpPr>
@@ -33804,7 +35772,7 @@
                 <a:solidFill>
                   <a:schemeClr val="accent1"/>
                 </a:solidFill>
-                <a:latin typeface="Futura Medium"/>
+                <a:latin typeface="Arial"/>
               </a:rPr>
               <a:t>Phase 5</a:t>
             </a:r>
@@ -33813,7 +35781,7 @@
       </p:sp>
       <p:sp>
         <p:nvSpPr>
-          <p:cNvPr id="25" name="slot.phase.5.body"/>
+          <p:cNvPr id="27" name="slot.phase.5.body"/>
           <p:cNvSpPr txBox="1"/>
           <p:nvPr/>
         </p:nvSpPr>
@@ -33920,7 +35888,130 @@
       </p:sp>
       <p:sp>
         <p:nvSpPr>
-          <p:cNvPr id="4" name="slot.title"/>
+          <p:cNvPr id="4" name="decor">
+            <a:extLst>
+              <a:ext uri="{FF2B5EF4-FFF2-40B4-BE49-F238E27FC236}">
+                <a16:creationId xmlns:a16="http://schemas.microsoft.com/office/drawing/2014/main" id="{9BCA9FA9-DC4A-F7F9-6F98-04EFCF05B790}"/>
+              </a:ext>
+            </a:extLst>
+          </p:cNvPr>
+          <p:cNvSpPr/>
+          <p:nvPr userDrawn="1"/>
+        </p:nvSpPr>
+        <p:spPr>
+          <a:xfrm>
+            <a:off x="-64731" y="246322"/>
+            <a:ext cx="512150" cy="423265"/>
+          </a:xfrm>
+          <a:prstGeom prst="pie">
+            <a:avLst>
+              <a:gd name="adj1" fmla="val 16190032"/>
+              <a:gd name="adj2" fmla="val 5400005"/>
+            </a:avLst>
+          </a:prstGeom>
+          <a:solidFill>
+            <a:schemeClr val="tx2"/>
+          </a:solidFill>
+          <a:ln>
+            <a:solidFill>
+              <a:schemeClr val="tx2"/>
+            </a:solidFill>
+          </a:ln>
+        </p:spPr>
+        <p:style>
+          <a:lnRef idx="2">
+            <a:schemeClr val="accent1">
+              <a:shade val="50000"/>
+            </a:schemeClr>
+          </a:lnRef>
+          <a:fillRef idx="1">
+            <a:schemeClr val="accent1"/>
+          </a:fillRef>
+          <a:effectRef idx="0">
+            <a:schemeClr val="accent1"/>
+          </a:effectRef>
+          <a:fontRef idx="minor">
+            <a:schemeClr val="lt1"/>
+          </a:fontRef>
+        </p:style>
+        <p:txBody>
+          <a:bodyPr lIns="36000" tIns="36000" rIns="36000" bIns="36000" rtlCol="0" anchor="ctr"/>
+          <a:lstStyle/>
+          <a:p>
+            <a:pPr algn="l" rtl="0"/>
+            <a:endParaRPr lang="en-US" sz="1200" b="1">
+              <a:solidFill>
+                <a:schemeClr val="bg1"/>
+              </a:solidFill>
+              <a:latin typeface="Arial" panose="020B0604020202020204" pitchFamily="34" charset="0"/>
+              <a:cs typeface="Arial" panose="020B0604020202020204" pitchFamily="34" charset="0"/>
+            </a:endParaRPr>
+          </a:p>
+        </p:txBody>
+      </p:sp>
+      <p:sp>
+        <p:nvSpPr>
+          <p:cNvPr id="5" name="decor">
+            <a:extLst>
+              <a:ext uri="{FF2B5EF4-FFF2-40B4-BE49-F238E27FC236}">
+                <a16:creationId xmlns:a16="http://schemas.microsoft.com/office/drawing/2014/main" id="{5D3B6E37-9E51-E62C-A843-852BEEBE5F2B}"/>
+              </a:ext>
+            </a:extLst>
+          </p:cNvPr>
+          <p:cNvSpPr/>
+          <p:nvPr userDrawn="1"/>
+        </p:nvSpPr>
+        <p:spPr>
+          <a:xfrm>
+            <a:off x="0" y="247761"/>
+            <a:ext cx="191344" cy="423265"/>
+          </a:xfrm>
+          <a:prstGeom prst="rect">
+            <a:avLst/>
+          </a:prstGeom>
+          <a:solidFill>
+            <a:schemeClr val="tx2"/>
+          </a:solidFill>
+          <a:ln>
+            <a:solidFill>
+              <a:schemeClr val="tx2"/>
+            </a:solidFill>
+          </a:ln>
+        </p:spPr>
+        <p:style>
+          <a:lnRef idx="2">
+            <a:schemeClr val="accent1">
+              <a:shade val="50000"/>
+            </a:schemeClr>
+          </a:lnRef>
+          <a:fillRef idx="1">
+            <a:schemeClr val="accent1"/>
+          </a:fillRef>
+          <a:effectRef idx="0">
+            <a:schemeClr val="accent1"/>
+          </a:effectRef>
+          <a:fontRef idx="minor">
+            <a:schemeClr val="lt1"/>
+          </a:fontRef>
+        </p:style>
+        <p:txBody>
+          <a:bodyPr lIns="36000" tIns="36000" rIns="36000" bIns="36000" rtlCol="0" anchor="ctr"/>
+          <a:lstStyle/>
+          <a:p>
+            <a:pPr algn="l" rtl="0"/>
+            <a:endParaRPr lang="en-US" sz="1200" b="1">
+              <a:solidFill>
+                <a:schemeClr val="bg1"/>
+              </a:solidFill>
+              <a:latin typeface="Arial" panose="020B0604020202020204" pitchFamily="34" charset="0"/>
+              <a:cs typeface="Arial" panose="020B0604020202020204" pitchFamily="34" charset="0"/>
+            </a:endParaRPr>
+          </a:p>
+        </p:txBody>
+      </p:sp>
+      <p:sp>
+        <p:nvSpPr>
+          <p:cNvPr id="6" name="slot.title"/>
           <p:cNvSpPr txBox="1"/>
           <p:nvPr/>
         </p:nvSpPr>
@@ -33944,7 +36035,7 @@
             <a:r>
               <a:rPr sz="2200" b="1">
                 <a:solidFill>
-                  <a:schemeClr val="dk1"/>
+                  <a:schemeClr val="accent2"/>
                 </a:solidFill>
                 <a:latin typeface="Futura Medium"/>
               </a:rPr>
@@ -33955,7 +36046,7 @@
       </p:sp>
       <p:sp>
         <p:nvSpPr>
-          <p:cNvPr id="5" name="slot.value-chain.source"/>
+          <p:cNvPr id="7" name="slot.value-chain.source"/>
           <p:cNvSpPr/>
           <p:nvPr/>
         </p:nvSpPr>
@@ -33998,7 +36089,7 @@
                 <a:solidFill>
                   <a:schemeClr val="lt1"/>
                 </a:solidFill>
-                <a:latin typeface="Futura Medium"/>
+                <a:latin typeface="Arial"/>
               </a:rPr>
               <a:t>Source</a:t>
             </a:r>
@@ -34007,7 +36098,7 @@
       </p:sp>
       <p:sp>
         <p:nvSpPr>
-          <p:cNvPr id="6" name="slot.value-chain.stage.1.title"/>
+          <p:cNvPr id="8" name="slot.value-chain.stage.1.title"/>
           <p:cNvSpPr/>
           <p:nvPr/>
         </p:nvSpPr>
@@ -34050,7 +36141,7 @@
                 <a:solidFill>
                   <a:schemeClr val="lt1"/>
                 </a:solidFill>
-                <a:latin typeface="Futura Medium"/>
+                <a:latin typeface="Arial"/>
               </a:rPr>
               <a:t>Stage 1</a:t>
             </a:r>
@@ -34059,7 +36150,7 @@
       </p:sp>
       <p:sp>
         <p:nvSpPr>
-          <p:cNvPr id="7" name="slot.value-chain.stage.2.title"/>
+          <p:cNvPr id="9" name="slot.value-chain.stage.2.title"/>
           <p:cNvSpPr/>
           <p:nvPr/>
         </p:nvSpPr>
@@ -34102,7 +36193,7 @@
                 <a:solidFill>
                   <a:schemeClr val="lt1"/>
                 </a:solidFill>
-                <a:latin typeface="Futura Medium"/>
+                <a:latin typeface="Arial"/>
               </a:rPr>
               <a:t>Stage 2</a:t>
             </a:r>
@@ -34111,7 +36202,7 @@
       </p:sp>
       <p:sp>
         <p:nvSpPr>
-          <p:cNvPr id="8" name="slot.value-chain.stage.3.title"/>
+          <p:cNvPr id="10" name="slot.value-chain.stage.3.title"/>
           <p:cNvSpPr/>
           <p:nvPr/>
         </p:nvSpPr>
@@ -34154,7 +36245,7 @@
                 <a:solidFill>
                   <a:schemeClr val="lt1"/>
                 </a:solidFill>
-                <a:latin typeface="Futura Medium"/>
+                <a:latin typeface="Arial"/>
               </a:rPr>
               <a:t>Stage 3</a:t>
             </a:r>
@@ -34163,7 +36254,7 @@
       </p:sp>
       <p:sp>
         <p:nvSpPr>
-          <p:cNvPr id="9" name="slot.value-chain.stage.4.title"/>
+          <p:cNvPr id="11" name="slot.value-chain.stage.4.title"/>
           <p:cNvSpPr/>
           <p:nvPr/>
         </p:nvSpPr>
@@ -34206,7 +36297,7 @@
                 <a:solidFill>
                   <a:schemeClr val="lt1"/>
                 </a:solidFill>
-                <a:latin typeface="Futura Medium"/>
+                <a:latin typeface="Arial"/>
               </a:rPr>
               <a:t>Stage 4</a:t>
             </a:r>
@@ -34215,7 +36306,7 @@
       </p:sp>
       <p:sp>
         <p:nvSpPr>
-          <p:cNvPr id="10" name="slot.value-chain.stage.5.title"/>
+          <p:cNvPr id="12" name="slot.value-chain.stage.5.title"/>
           <p:cNvSpPr/>
           <p:nvPr/>
         </p:nvSpPr>
@@ -34258,7 +36349,7 @@
                 <a:solidFill>
                   <a:schemeClr val="lt1"/>
                 </a:solidFill>
-                <a:latin typeface="Futura Medium"/>
+                <a:latin typeface="Arial"/>
               </a:rPr>
               <a:t>Stage 5</a:t>
             </a:r>
@@ -34267,7 +36358,7 @@
       </p:sp>
       <p:sp>
         <p:nvSpPr>
-          <p:cNvPr id="11" name="slot.value-chain.customer"/>
+          <p:cNvPr id="13" name="slot.value-chain.customer"/>
           <p:cNvSpPr/>
           <p:nvPr/>
         </p:nvSpPr>
@@ -34310,7 +36401,7 @@
                 <a:solidFill>
                   <a:schemeClr val="lt1"/>
                 </a:solidFill>
-                <a:latin typeface="Futura Medium"/>
+                <a:latin typeface="Arial"/>
               </a:rPr>
               <a:t>Customer</a:t>
             </a:r>
@@ -34319,7 +36410,7 @@
       </p:sp>
       <p:sp>
         <p:nvSpPr>
-          <p:cNvPr id="12" name="slot.value-chain.body"/>
+          <p:cNvPr id="14" name="slot.value-chain.body"/>
           <p:cNvSpPr txBox="1"/>
           <p:nvPr/>
         </p:nvSpPr>
@@ -34426,7 +36517,130 @@
       </p:sp>
       <p:sp>
         <p:nvSpPr>
-          <p:cNvPr id="4" name="slot.title"/>
+          <p:cNvPr id="4" name="decor">
+            <a:extLst>
+              <a:ext uri="{FF2B5EF4-FFF2-40B4-BE49-F238E27FC236}">
+                <a16:creationId xmlns:a16="http://schemas.microsoft.com/office/drawing/2014/main" id="{9BCA9FA9-DC4A-F7F9-6F98-04EFCF05B790}"/>
+              </a:ext>
+            </a:extLst>
+          </p:cNvPr>
+          <p:cNvSpPr/>
+          <p:nvPr userDrawn="1"/>
+        </p:nvSpPr>
+        <p:spPr>
+          <a:xfrm>
+            <a:off x="-64731" y="246322"/>
+            <a:ext cx="512150" cy="423265"/>
+          </a:xfrm>
+          <a:prstGeom prst="pie">
+            <a:avLst>
+              <a:gd name="adj1" fmla="val 16190032"/>
+              <a:gd name="adj2" fmla="val 5400005"/>
+            </a:avLst>
+          </a:prstGeom>
+          <a:solidFill>
+            <a:schemeClr val="tx2"/>
+          </a:solidFill>
+          <a:ln>
+            <a:solidFill>
+              <a:schemeClr val="tx2"/>
+            </a:solidFill>
+          </a:ln>
+        </p:spPr>
+        <p:style>
+          <a:lnRef idx="2">
+            <a:schemeClr val="accent1">
+              <a:shade val="50000"/>
+            </a:schemeClr>
+          </a:lnRef>
+          <a:fillRef idx="1">
+            <a:schemeClr val="accent1"/>
+          </a:fillRef>
+          <a:effectRef idx="0">
+            <a:schemeClr val="accent1"/>
+          </a:effectRef>
+          <a:fontRef idx="minor">
+            <a:schemeClr val="lt1"/>
+          </a:fontRef>
+        </p:style>
+        <p:txBody>
+          <a:bodyPr lIns="36000" tIns="36000" rIns="36000" bIns="36000" rtlCol="0" anchor="ctr"/>
+          <a:lstStyle/>
+          <a:p>
+            <a:pPr algn="l" rtl="0"/>
+            <a:endParaRPr lang="en-US" sz="1200" b="1">
+              <a:solidFill>
+                <a:schemeClr val="bg1"/>
+              </a:solidFill>
+              <a:latin typeface="Arial" panose="020B0604020202020204" pitchFamily="34" charset="0"/>
+              <a:cs typeface="Arial" panose="020B0604020202020204" pitchFamily="34" charset="0"/>
+            </a:endParaRPr>
+          </a:p>
+        </p:txBody>
+      </p:sp>
+      <p:sp>
+        <p:nvSpPr>
+          <p:cNvPr id="5" name="decor">
+            <a:extLst>
+              <a:ext uri="{FF2B5EF4-FFF2-40B4-BE49-F238E27FC236}">
+                <a16:creationId xmlns:a16="http://schemas.microsoft.com/office/drawing/2014/main" id="{5D3B6E37-9E51-E62C-A843-852BEEBE5F2B}"/>
+              </a:ext>
+            </a:extLst>
+          </p:cNvPr>
+          <p:cNvSpPr/>
+          <p:nvPr userDrawn="1"/>
+        </p:nvSpPr>
+        <p:spPr>
+          <a:xfrm>
+            <a:off x="0" y="247761"/>
+            <a:ext cx="191344" cy="423265"/>
+          </a:xfrm>
+          <a:prstGeom prst="rect">
+            <a:avLst/>
+          </a:prstGeom>
+          <a:solidFill>
+            <a:schemeClr val="tx2"/>
+          </a:solidFill>
+          <a:ln>
+            <a:solidFill>
+              <a:schemeClr val="tx2"/>
+            </a:solidFill>
+          </a:ln>
+        </p:spPr>
+        <p:style>
+          <a:lnRef idx="2">
+            <a:schemeClr val="accent1">
+              <a:shade val="50000"/>
+            </a:schemeClr>
+          </a:lnRef>
+          <a:fillRef idx="1">
+            <a:schemeClr val="accent1"/>
+          </a:fillRef>
+          <a:effectRef idx="0">
+            <a:schemeClr val="accent1"/>
+          </a:effectRef>
+          <a:fontRef idx="minor">
+            <a:schemeClr val="lt1"/>
+          </a:fontRef>
+        </p:style>
+        <p:txBody>
+          <a:bodyPr lIns="36000" tIns="36000" rIns="36000" bIns="36000" rtlCol="0" anchor="ctr"/>
+          <a:lstStyle/>
+          <a:p>
+            <a:pPr algn="l" rtl="0"/>
+            <a:endParaRPr lang="en-US" sz="1200" b="1">
+              <a:solidFill>
+                <a:schemeClr val="bg1"/>
+              </a:solidFill>
+              <a:latin typeface="Arial" panose="020B0604020202020204" pitchFamily="34" charset="0"/>
+              <a:cs typeface="Arial" panose="020B0604020202020204" pitchFamily="34" charset="0"/>
+            </a:endParaRPr>
+          </a:p>
+        </p:txBody>
+      </p:sp>
+      <p:sp>
+        <p:nvSpPr>
+          <p:cNvPr id="6" name="slot.title"/>
           <p:cNvSpPr txBox="1"/>
           <p:nvPr/>
         </p:nvSpPr>
@@ -34450,7 +36664,7 @@
             <a:r>
               <a:rPr sz="2200" b="1">
                 <a:solidFill>
-                  <a:schemeClr val="dk1"/>
+                  <a:schemeClr val="accent2"/>
                 </a:solidFill>
                 <a:latin typeface="Futura Medium"/>
               </a:rPr>
@@ -34461,7 +36675,7 @@
       </p:sp>
       <p:sp>
         <p:nvSpPr>
-          <p:cNvPr id="5" name="decor"/>
+          <p:cNvPr id="7" name="decor"/>
           <p:cNvSpPr/>
           <p:nvPr/>
         </p:nvSpPr>
@@ -34504,7 +36718,7 @@
                 <a:solidFill>
                   <a:schemeClr val="accent1"/>
                 </a:solidFill>
-                <a:latin typeface="Futura Medium"/>
+                <a:latin typeface="Arial"/>
               </a:rPr>
               <a:t>H1 2026</a:t>
             </a:r>
@@ -34513,7 +36727,7 @@
       </p:sp>
       <p:sp>
         <p:nvSpPr>
-          <p:cNvPr id="6" name="slot.gantt.lane.1.label"/>
+          <p:cNvPr id="8" name="slot.gantt.lane.1.label"/>
           <p:cNvSpPr/>
           <p:nvPr/>
         </p:nvSpPr>
@@ -34556,7 +36770,7 @@
                 <a:solidFill>
                   <a:schemeClr val="accent1"/>
                 </a:solidFill>
-                <a:latin typeface="Futura Medium"/>
+                <a:latin typeface="Arial"/>
               </a:rPr>
               <a:t>Workstream 1</a:t>
             </a:r>
@@ -34565,7 +36779,7 @@
       </p:sp>
       <p:sp>
         <p:nvSpPr>
-          <p:cNvPr id="7" name="slot.gantt.lane.1.body"/>
+          <p:cNvPr id="9" name="slot.gantt.lane.1.body"/>
           <p:cNvSpPr txBox="1"/>
           <p:nvPr/>
         </p:nvSpPr>
@@ -34600,7 +36814,7 @@
       </p:sp>
       <p:sp>
         <p:nvSpPr>
-          <p:cNvPr id="8" name="decor"/>
+          <p:cNvPr id="10" name="decor"/>
           <p:cNvSpPr/>
           <p:nvPr/>
         </p:nvSpPr>
@@ -34643,7 +36857,7 @@
                 <a:solidFill>
                   <a:schemeClr val="lt1"/>
                 </a:solidFill>
-                <a:latin typeface="Futura Medium"/>
+                <a:latin typeface="Arial"/>
               </a:rPr>
               <a:t/>
             </a:r>
@@ -34652,7 +36866,7 @@
       </p:sp>
       <p:sp>
         <p:nvSpPr>
-          <p:cNvPr id="9" name="slot.gantt.lane.2.label"/>
+          <p:cNvPr id="11" name="slot.gantt.lane.2.label"/>
           <p:cNvSpPr/>
           <p:nvPr/>
         </p:nvSpPr>
@@ -34695,7 +36909,7 @@
                 <a:solidFill>
                   <a:schemeClr val="accent1"/>
                 </a:solidFill>
-                <a:latin typeface="Futura Medium"/>
+                <a:latin typeface="Arial"/>
               </a:rPr>
               <a:t>Workstream 2</a:t>
             </a:r>
@@ -34704,7 +36918,7 @@
       </p:sp>
       <p:sp>
         <p:nvSpPr>
-          <p:cNvPr id="10" name="slot.gantt.lane.2.body"/>
+          <p:cNvPr id="12" name="slot.gantt.lane.2.body"/>
           <p:cNvSpPr txBox="1"/>
           <p:nvPr/>
         </p:nvSpPr>
@@ -34739,7 +36953,7 @@
       </p:sp>
       <p:sp>
         <p:nvSpPr>
-          <p:cNvPr id="11" name="decor"/>
+          <p:cNvPr id="13" name="decor"/>
           <p:cNvSpPr/>
           <p:nvPr/>
         </p:nvSpPr>
@@ -34782,7 +36996,7 @@
                 <a:solidFill>
                   <a:schemeClr val="lt1"/>
                 </a:solidFill>
-                <a:latin typeface="Futura Medium"/>
+                <a:latin typeface="Arial"/>
               </a:rPr>
               <a:t/>
             </a:r>
@@ -34791,7 +37005,7 @@
       </p:sp>
       <p:sp>
         <p:nvSpPr>
-          <p:cNvPr id="12" name="slot.gantt.lane.3.label"/>
+          <p:cNvPr id="14" name="slot.gantt.lane.3.label"/>
           <p:cNvSpPr/>
           <p:nvPr/>
         </p:nvSpPr>
@@ -34834,7 +37048,7 @@
                 <a:solidFill>
                   <a:schemeClr val="accent1"/>
                 </a:solidFill>
-                <a:latin typeface="Futura Medium"/>
+                <a:latin typeface="Arial"/>
               </a:rPr>
               <a:t>Workstream 3</a:t>
             </a:r>
@@ -34843,7 +37057,7 @@
       </p:sp>
       <p:sp>
         <p:nvSpPr>
-          <p:cNvPr id="13" name="slot.gantt.lane.3.body"/>
+          <p:cNvPr id="15" name="slot.gantt.lane.3.body"/>
           <p:cNvSpPr txBox="1"/>
           <p:nvPr/>
         </p:nvSpPr>
@@ -34878,7 +37092,7 @@
       </p:sp>
       <p:sp>
         <p:nvSpPr>
-          <p:cNvPr id="14" name="decor"/>
+          <p:cNvPr id="16" name="decor"/>
           <p:cNvSpPr/>
           <p:nvPr/>
         </p:nvSpPr>
@@ -34921,7 +37135,7 @@
                 <a:solidFill>
                   <a:schemeClr val="lt1"/>
                 </a:solidFill>
-                <a:latin typeface="Futura Medium"/>
+                <a:latin typeface="Arial"/>
               </a:rPr>
               <a:t/>
             </a:r>
@@ -34930,7 +37144,7 @@
       </p:sp>
       <p:sp>
         <p:nvSpPr>
-          <p:cNvPr id="15" name="slot.gantt.lane.4.label"/>
+          <p:cNvPr id="17" name="slot.gantt.lane.4.label"/>
           <p:cNvSpPr/>
           <p:nvPr/>
         </p:nvSpPr>
@@ -34973,7 +37187,7 @@
                 <a:solidFill>
                   <a:schemeClr val="accent1"/>
                 </a:solidFill>
-                <a:latin typeface="Futura Medium"/>
+                <a:latin typeface="Arial"/>
               </a:rPr>
               <a:t>Workstream 4</a:t>
             </a:r>
@@ -34982,7 +37196,7 @@
       </p:sp>
       <p:sp>
         <p:nvSpPr>
-          <p:cNvPr id="16" name="slot.gantt.lane.4.body"/>
+          <p:cNvPr id="18" name="slot.gantt.lane.4.body"/>
           <p:cNvSpPr txBox="1"/>
           <p:nvPr/>
         </p:nvSpPr>
@@ -35017,7 +37231,7 @@
       </p:sp>
       <p:sp>
         <p:nvSpPr>
-          <p:cNvPr id="17" name="decor"/>
+          <p:cNvPr id="19" name="decor"/>
           <p:cNvSpPr/>
           <p:nvPr/>
         </p:nvSpPr>
@@ -35060,7 +37274,7 @@
                 <a:solidFill>
                   <a:schemeClr val="lt1"/>
                 </a:solidFill>
-                <a:latin typeface="Futura Medium"/>
+                <a:latin typeface="Arial"/>
               </a:rPr>
               <a:t/>
             </a:r>
@@ -35141,7 +37355,130 @@
       </p:sp>
       <p:sp>
         <p:nvSpPr>
-          <p:cNvPr id="4" name="slot.title"/>
+          <p:cNvPr id="4" name="decor">
+            <a:extLst>
+              <a:ext uri="{FF2B5EF4-FFF2-40B4-BE49-F238E27FC236}">
+                <a16:creationId xmlns:a16="http://schemas.microsoft.com/office/drawing/2014/main" id="{9BCA9FA9-DC4A-F7F9-6F98-04EFCF05B790}"/>
+              </a:ext>
+            </a:extLst>
+          </p:cNvPr>
+          <p:cNvSpPr/>
+          <p:nvPr userDrawn="1"/>
+        </p:nvSpPr>
+        <p:spPr>
+          <a:xfrm>
+            <a:off x="-64731" y="246322"/>
+            <a:ext cx="512150" cy="423265"/>
+          </a:xfrm>
+          <a:prstGeom prst="pie">
+            <a:avLst>
+              <a:gd name="adj1" fmla="val 16190032"/>
+              <a:gd name="adj2" fmla="val 5400005"/>
+            </a:avLst>
+          </a:prstGeom>
+          <a:solidFill>
+            <a:schemeClr val="tx2"/>
+          </a:solidFill>
+          <a:ln>
+            <a:solidFill>
+              <a:schemeClr val="tx2"/>
+            </a:solidFill>
+          </a:ln>
+        </p:spPr>
+        <p:style>
+          <a:lnRef idx="2">
+            <a:schemeClr val="accent1">
+              <a:shade val="50000"/>
+            </a:schemeClr>
+          </a:lnRef>
+          <a:fillRef idx="1">
+            <a:schemeClr val="accent1"/>
+          </a:fillRef>
+          <a:effectRef idx="0">
+            <a:schemeClr val="accent1"/>
+          </a:effectRef>
+          <a:fontRef idx="minor">
+            <a:schemeClr val="lt1"/>
+          </a:fontRef>
+        </p:style>
+        <p:txBody>
+          <a:bodyPr lIns="36000" tIns="36000" rIns="36000" bIns="36000" rtlCol="0" anchor="ctr"/>
+          <a:lstStyle/>
+          <a:p>
+            <a:pPr algn="l" rtl="0"/>
+            <a:endParaRPr lang="en-US" sz="1200" b="1">
+              <a:solidFill>
+                <a:schemeClr val="bg1"/>
+              </a:solidFill>
+              <a:latin typeface="Arial" panose="020B0604020202020204" pitchFamily="34" charset="0"/>
+              <a:cs typeface="Arial" panose="020B0604020202020204" pitchFamily="34" charset="0"/>
+            </a:endParaRPr>
+          </a:p>
+        </p:txBody>
+      </p:sp>
+      <p:sp>
+        <p:nvSpPr>
+          <p:cNvPr id="5" name="decor">
+            <a:extLst>
+              <a:ext uri="{FF2B5EF4-FFF2-40B4-BE49-F238E27FC236}">
+                <a16:creationId xmlns:a16="http://schemas.microsoft.com/office/drawing/2014/main" id="{5D3B6E37-9E51-E62C-A843-852BEEBE5F2B}"/>
+              </a:ext>
+            </a:extLst>
+          </p:cNvPr>
+          <p:cNvSpPr/>
+          <p:nvPr userDrawn="1"/>
+        </p:nvSpPr>
+        <p:spPr>
+          <a:xfrm>
+            <a:off x="0" y="247761"/>
+            <a:ext cx="191344" cy="423265"/>
+          </a:xfrm>
+          <a:prstGeom prst="rect">
+            <a:avLst/>
+          </a:prstGeom>
+          <a:solidFill>
+            <a:schemeClr val="tx2"/>
+          </a:solidFill>
+          <a:ln>
+            <a:solidFill>
+              <a:schemeClr val="tx2"/>
+            </a:solidFill>
+          </a:ln>
+        </p:spPr>
+        <p:style>
+          <a:lnRef idx="2">
+            <a:schemeClr val="accent1">
+              <a:shade val="50000"/>
+            </a:schemeClr>
+          </a:lnRef>
+          <a:fillRef idx="1">
+            <a:schemeClr val="accent1"/>
+          </a:fillRef>
+          <a:effectRef idx="0">
+            <a:schemeClr val="accent1"/>
+          </a:effectRef>
+          <a:fontRef idx="minor">
+            <a:schemeClr val="lt1"/>
+          </a:fontRef>
+        </p:style>
+        <p:txBody>
+          <a:bodyPr lIns="36000" tIns="36000" rIns="36000" bIns="36000" rtlCol="0" anchor="ctr"/>
+          <a:lstStyle/>
+          <a:p>
+            <a:pPr algn="l" rtl="0"/>
+            <a:endParaRPr lang="en-US" sz="1200" b="1">
+              <a:solidFill>
+                <a:schemeClr val="bg1"/>
+              </a:solidFill>
+              <a:latin typeface="Arial" panose="020B0604020202020204" pitchFamily="34" charset="0"/>
+              <a:cs typeface="Arial" panose="020B0604020202020204" pitchFamily="34" charset="0"/>
+            </a:endParaRPr>
+          </a:p>
+        </p:txBody>
+      </p:sp>
+      <p:sp>
+        <p:nvSpPr>
+          <p:cNvPr id="6" name="slot.title"/>
           <p:cNvSpPr txBox="1"/>
           <p:nvPr/>
         </p:nvSpPr>
@@ -35165,7 +37502,7 @@
             <a:r>
               <a:rPr sz="2200" b="1">
                 <a:solidFill>
-                  <a:schemeClr val="dk1"/>
+                  <a:schemeClr val="accent2"/>
                 </a:solidFill>
                 <a:latin typeface="Futura Medium"/>
               </a:rPr>
@@ -35176,7 +37513,7 @@
       </p:sp>
       <p:sp>
         <p:nvSpPr>
-          <p:cNvPr id="5" name="decor"/>
+          <p:cNvPr id="7" name="decor"/>
           <p:cNvSpPr/>
           <p:nvPr/>
         </p:nvSpPr>
@@ -35219,7 +37556,7 @@
                 <a:solidFill>
                   <a:schemeClr val="lt1"/>
                 </a:solidFill>
-                <a:latin typeface="Futura Medium"/>
+                <a:latin typeface="Arial"/>
               </a:rPr>
               <a:t/>
             </a:r>
@@ -35228,7 +37565,7 @@
       </p:sp>
       <p:sp>
         <p:nvSpPr>
-          <p:cNvPr id="6" name="decor"/>
+          <p:cNvPr id="8" name="decor"/>
           <p:cNvSpPr/>
           <p:nvPr/>
         </p:nvSpPr>
@@ -35271,7 +37608,7 @@
                 <a:solidFill>
                   <a:schemeClr val="lt1"/>
                 </a:solidFill>
-                <a:latin typeface="Futura Medium"/>
+                <a:latin typeface="Arial"/>
               </a:rPr>
               <a:t/>
             </a:r>
@@ -35280,7 +37617,7 @@
       </p:sp>
       <p:sp>
         <p:nvSpPr>
-          <p:cNvPr id="7" name="slot.matrix.axis-y"/>
+          <p:cNvPr id="9" name="slot.matrix.axis-y"/>
           <p:cNvSpPr txBox="1"/>
           <p:nvPr/>
         </p:nvSpPr>
@@ -35306,7 +37643,7 @@
                 <a:solidFill>
                   <a:schemeClr val="accent6"/>
                 </a:solidFill>
-                <a:latin typeface="Futura Medium"/>
+                <a:latin typeface="Arial"/>
               </a:rPr>
               <a:t>Y axis</a:t>
             </a:r>
@@ -35315,7 +37652,7 @@
       </p:sp>
       <p:sp>
         <p:nvSpPr>
-          <p:cNvPr id="8" name="slot.matrix.axis-x"/>
+          <p:cNvPr id="10" name="slot.matrix.axis-x"/>
           <p:cNvSpPr txBox="1"/>
           <p:nvPr/>
         </p:nvSpPr>
@@ -35341,7 +37678,7 @@
                 <a:solidFill>
                   <a:schemeClr val="accent6"/>
                 </a:solidFill>
-                <a:latin typeface="Futura Medium"/>
+                <a:latin typeface="Arial"/>
               </a:rPr>
               <a:t>X axis</a:t>
             </a:r>
@@ -35350,7 +37687,7 @@
       </p:sp>
       <p:sp>
         <p:nvSpPr>
-          <p:cNvPr id="9" name="slot.matrix.quadrant.1.title"/>
+          <p:cNvPr id="11" name="slot.matrix.quadrant.1.title"/>
           <p:cNvSpPr/>
           <p:nvPr/>
         </p:nvSpPr>
@@ -35393,7 +37730,7 @@
                 <a:solidFill>
                   <a:schemeClr val="accent1"/>
                 </a:solidFill>
-                <a:latin typeface="Futura Medium"/>
+                <a:latin typeface="Arial"/>
               </a:rPr>
               <a:t>Quadrant 1</a:t>
             </a:r>
@@ -35402,7 +37739,7 @@
       </p:sp>
       <p:sp>
         <p:nvSpPr>
-          <p:cNvPr id="10" name="slot.matrix.quadrant.1.body"/>
+          <p:cNvPr id="12" name="slot.matrix.quadrant.1.body"/>
           <p:cNvSpPr txBox="1"/>
           <p:nvPr/>
         </p:nvSpPr>
@@ -35437,7 +37774,7 @@
       </p:sp>
       <p:sp>
         <p:nvSpPr>
-          <p:cNvPr id="11" name="slot.matrix.quadrant.2.title"/>
+          <p:cNvPr id="13" name="slot.matrix.quadrant.2.title"/>
           <p:cNvSpPr/>
           <p:nvPr/>
         </p:nvSpPr>
@@ -35480,7 +37817,7 @@
                 <a:solidFill>
                   <a:schemeClr val="accent1"/>
                 </a:solidFill>
-                <a:latin typeface="Futura Medium"/>
+                <a:latin typeface="Arial"/>
               </a:rPr>
               <a:t>Quadrant 2</a:t>
             </a:r>
@@ -35489,7 +37826,7 @@
       </p:sp>
       <p:sp>
         <p:nvSpPr>
-          <p:cNvPr id="12" name="slot.matrix.quadrant.2.body"/>
+          <p:cNvPr id="14" name="slot.matrix.quadrant.2.body"/>
           <p:cNvSpPr txBox="1"/>
           <p:nvPr/>
         </p:nvSpPr>
@@ -35524,7 +37861,7 @@
       </p:sp>
       <p:sp>
         <p:nvSpPr>
-          <p:cNvPr id="13" name="slot.matrix.quadrant.3.title"/>
+          <p:cNvPr id="15" name="slot.matrix.quadrant.3.title"/>
           <p:cNvSpPr/>
           <p:nvPr/>
         </p:nvSpPr>
@@ -35567,7 +37904,7 @@
                 <a:solidFill>
                   <a:schemeClr val="accent1"/>
                 </a:solidFill>
-                <a:latin typeface="Futura Medium"/>
+                <a:latin typeface="Arial"/>
               </a:rPr>
               <a:t>Quadrant 3</a:t>
             </a:r>
@@ -35576,7 +37913,7 @@
       </p:sp>
       <p:sp>
         <p:nvSpPr>
-          <p:cNvPr id="14" name="slot.matrix.quadrant.3.body"/>
+          <p:cNvPr id="16" name="slot.matrix.quadrant.3.body"/>
           <p:cNvSpPr txBox="1"/>
           <p:nvPr/>
         </p:nvSpPr>
@@ -35611,7 +37948,7 @@
       </p:sp>
       <p:sp>
         <p:nvSpPr>
-          <p:cNvPr id="15" name="slot.matrix.quadrant.4.title"/>
+          <p:cNvPr id="17" name="slot.matrix.quadrant.4.title"/>
           <p:cNvSpPr/>
           <p:nvPr/>
         </p:nvSpPr>
@@ -35654,7 +37991,7 @@
                 <a:solidFill>
                   <a:schemeClr val="accent1"/>
                 </a:solidFill>
-                <a:latin typeface="Futura Medium"/>
+                <a:latin typeface="Arial"/>
               </a:rPr>
               <a:t>Quadrant 4</a:t>
             </a:r>
@@ -35663,7 +38000,7 @@
       </p:sp>
       <p:sp>
         <p:nvSpPr>
-          <p:cNvPr id="16" name="slot.matrix.quadrant.4.body"/>
+          <p:cNvPr id="18" name="slot.matrix.quadrant.4.body"/>
           <p:cNvSpPr txBox="1"/>
           <p:nvPr/>
         </p:nvSpPr>
@@ -35770,7 +38107,130 @@
       </p:sp>
       <p:sp>
         <p:nvSpPr>
-          <p:cNvPr id="4" name="slot.title"/>
+          <p:cNvPr id="4" name="decor">
+            <a:extLst>
+              <a:ext uri="{FF2B5EF4-FFF2-40B4-BE49-F238E27FC236}">
+                <a16:creationId xmlns:a16="http://schemas.microsoft.com/office/drawing/2014/main" id="{9BCA9FA9-DC4A-F7F9-6F98-04EFCF05B790}"/>
+              </a:ext>
+            </a:extLst>
+          </p:cNvPr>
+          <p:cNvSpPr/>
+          <p:nvPr userDrawn="1"/>
+        </p:nvSpPr>
+        <p:spPr>
+          <a:xfrm>
+            <a:off x="-64731" y="246322"/>
+            <a:ext cx="512150" cy="423265"/>
+          </a:xfrm>
+          <a:prstGeom prst="pie">
+            <a:avLst>
+              <a:gd name="adj1" fmla="val 16190032"/>
+              <a:gd name="adj2" fmla="val 5400005"/>
+            </a:avLst>
+          </a:prstGeom>
+          <a:solidFill>
+            <a:schemeClr val="tx2"/>
+          </a:solidFill>
+          <a:ln>
+            <a:solidFill>
+              <a:schemeClr val="tx2"/>
+            </a:solidFill>
+          </a:ln>
+        </p:spPr>
+        <p:style>
+          <a:lnRef idx="2">
+            <a:schemeClr val="accent1">
+              <a:shade val="50000"/>
+            </a:schemeClr>
+          </a:lnRef>
+          <a:fillRef idx="1">
+            <a:schemeClr val="accent1"/>
+          </a:fillRef>
+          <a:effectRef idx="0">
+            <a:schemeClr val="accent1"/>
+          </a:effectRef>
+          <a:fontRef idx="minor">
+            <a:schemeClr val="lt1"/>
+          </a:fontRef>
+        </p:style>
+        <p:txBody>
+          <a:bodyPr lIns="36000" tIns="36000" rIns="36000" bIns="36000" rtlCol="0" anchor="ctr"/>
+          <a:lstStyle/>
+          <a:p>
+            <a:pPr algn="l" rtl="0"/>
+            <a:endParaRPr lang="en-US" sz="1200" b="1">
+              <a:solidFill>
+                <a:schemeClr val="bg1"/>
+              </a:solidFill>
+              <a:latin typeface="Arial" panose="020B0604020202020204" pitchFamily="34" charset="0"/>
+              <a:cs typeface="Arial" panose="020B0604020202020204" pitchFamily="34" charset="0"/>
+            </a:endParaRPr>
+          </a:p>
+        </p:txBody>
+      </p:sp>
+      <p:sp>
+        <p:nvSpPr>
+          <p:cNvPr id="5" name="decor">
+            <a:extLst>
+              <a:ext uri="{FF2B5EF4-FFF2-40B4-BE49-F238E27FC236}">
+                <a16:creationId xmlns:a16="http://schemas.microsoft.com/office/drawing/2014/main" id="{5D3B6E37-9E51-E62C-A843-852BEEBE5F2B}"/>
+              </a:ext>
+            </a:extLst>
+          </p:cNvPr>
+          <p:cNvSpPr/>
+          <p:nvPr userDrawn="1"/>
+        </p:nvSpPr>
+        <p:spPr>
+          <a:xfrm>
+            <a:off x="0" y="247761"/>
+            <a:ext cx="191344" cy="423265"/>
+          </a:xfrm>
+          <a:prstGeom prst="rect">
+            <a:avLst/>
+          </a:prstGeom>
+          <a:solidFill>
+            <a:schemeClr val="tx2"/>
+          </a:solidFill>
+          <a:ln>
+            <a:solidFill>
+              <a:schemeClr val="tx2"/>
+            </a:solidFill>
+          </a:ln>
+        </p:spPr>
+        <p:style>
+          <a:lnRef idx="2">
+            <a:schemeClr val="accent1">
+              <a:shade val="50000"/>
+            </a:schemeClr>
+          </a:lnRef>
+          <a:fillRef idx="1">
+            <a:schemeClr val="accent1"/>
+          </a:fillRef>
+          <a:effectRef idx="0">
+            <a:schemeClr val="accent1"/>
+          </a:effectRef>
+          <a:fontRef idx="minor">
+            <a:schemeClr val="lt1"/>
+          </a:fontRef>
+        </p:style>
+        <p:txBody>
+          <a:bodyPr lIns="36000" tIns="36000" rIns="36000" bIns="36000" rtlCol="0" anchor="ctr"/>
+          <a:lstStyle/>
+          <a:p>
+            <a:pPr algn="l" rtl="0"/>
+            <a:endParaRPr lang="en-US" sz="1200" b="1">
+              <a:solidFill>
+                <a:schemeClr val="bg1"/>
+              </a:solidFill>
+              <a:latin typeface="Arial" panose="020B0604020202020204" pitchFamily="34" charset="0"/>
+              <a:cs typeface="Arial" panose="020B0604020202020204" pitchFamily="34" charset="0"/>
+            </a:endParaRPr>
+          </a:p>
+        </p:txBody>
+      </p:sp>
+      <p:sp>
+        <p:nvSpPr>
+          <p:cNvPr id="6" name="slot.title"/>
           <p:cNvSpPr txBox="1"/>
           <p:nvPr/>
         </p:nvSpPr>
@@ -35794,7 +38254,7 @@
             <a:r>
               <a:rPr sz="2200" b="1">
                 <a:solidFill>
-                  <a:schemeClr val="dk1"/>
+                  <a:schemeClr val="accent2"/>
                 </a:solidFill>
                 <a:latin typeface="Futura Medium"/>
               </a:rPr>
@@ -35805,7 +38265,7 @@
       </p:sp>
       <p:sp>
         <p:nvSpPr>
-          <p:cNvPr id="5" name="decor"/>
+          <p:cNvPr id="7" name="decor"/>
           <p:cNvSpPr/>
           <p:nvPr/>
         </p:nvSpPr>
@@ -35848,7 +38308,7 @@
                 <a:solidFill>
                   <a:schemeClr val="lt1"/>
                 </a:solidFill>
-                <a:latin typeface="Futura Medium"/>
+                <a:latin typeface="Arial"/>
               </a:rPr>
               <a:t/>
             </a:r>
@@ -35857,7 +38317,7 @@
       </p:sp>
       <p:sp>
         <p:nvSpPr>
-          <p:cNvPr id="6" name="decor"/>
+          <p:cNvPr id="8" name="decor"/>
           <p:cNvSpPr/>
           <p:nvPr/>
         </p:nvSpPr>
@@ -35900,7 +38360,7 @@
                 <a:solidFill>
                   <a:schemeClr val="lt1"/>
                 </a:solidFill>
-                <a:latin typeface="Futura Medium"/>
+                <a:latin typeface="Arial"/>
               </a:rPr>
               <a:t/>
             </a:r>
@@ -35909,7 +38369,7 @@
       </p:sp>
       <p:sp>
         <p:nvSpPr>
-          <p:cNvPr id="7" name="slot.matrix.axis-y"/>
+          <p:cNvPr id="9" name="slot.matrix.axis-y"/>
           <p:cNvSpPr txBox="1"/>
           <p:nvPr/>
         </p:nvSpPr>
@@ -35935,7 +38395,7 @@
                 <a:solidFill>
                   <a:schemeClr val="accent6"/>
                 </a:solidFill>
-                <a:latin typeface="Futura Medium"/>
+                <a:latin typeface="Arial"/>
               </a:rPr>
               <a:t>Y axis</a:t>
             </a:r>
@@ -35944,7 +38404,7 @@
       </p:sp>
       <p:sp>
         <p:nvSpPr>
-          <p:cNvPr id="8" name="slot.matrix.axis-x"/>
+          <p:cNvPr id="10" name="slot.matrix.axis-x"/>
           <p:cNvSpPr txBox="1"/>
           <p:nvPr/>
         </p:nvSpPr>
@@ -35970,7 +38430,7 @@
                 <a:solidFill>
                   <a:schemeClr val="accent6"/>
                 </a:solidFill>
-                <a:latin typeface="Futura Medium"/>
+                <a:latin typeface="Arial"/>
               </a:rPr>
               <a:t>X axis</a:t>
             </a:r>
@@ -35979,7 +38439,7 @@
       </p:sp>
       <p:sp>
         <p:nvSpPr>
-          <p:cNvPr id="9" name="slot.matrix.cell.1.title"/>
+          <p:cNvPr id="11" name="slot.matrix.cell.1.title"/>
           <p:cNvSpPr/>
           <p:nvPr/>
         </p:nvSpPr>
@@ -36022,7 +38482,7 @@
                 <a:solidFill>
                   <a:schemeClr val="dk1"/>
                 </a:solidFill>
-                <a:latin typeface="Futura Medium"/>
+                <a:latin typeface="Arial"/>
               </a:rPr>
               <a:t>Cell 1</a:t>
             </a:r>
@@ -36031,7 +38491,7 @@
       </p:sp>
       <p:sp>
         <p:nvSpPr>
-          <p:cNvPr id="10" name="slot.matrix.cell.2.title"/>
+          <p:cNvPr id="12" name="slot.matrix.cell.2.title"/>
           <p:cNvSpPr/>
           <p:nvPr/>
         </p:nvSpPr>
@@ -36074,7 +38534,7 @@
                 <a:solidFill>
                   <a:schemeClr val="dk1"/>
                 </a:solidFill>
-                <a:latin typeface="Futura Medium"/>
+                <a:latin typeface="Arial"/>
               </a:rPr>
               <a:t>Cell 2</a:t>
             </a:r>
@@ -36083,7 +38543,7 @@
       </p:sp>
       <p:sp>
         <p:nvSpPr>
-          <p:cNvPr id="11" name="slot.matrix.cell.3.title"/>
+          <p:cNvPr id="13" name="slot.matrix.cell.3.title"/>
           <p:cNvSpPr/>
           <p:nvPr/>
         </p:nvSpPr>
@@ -36126,7 +38586,7 @@
                 <a:solidFill>
                   <a:schemeClr val="dk1"/>
                 </a:solidFill>
-                <a:latin typeface="Futura Medium"/>
+                <a:latin typeface="Arial"/>
               </a:rPr>
               <a:t>Cell 3</a:t>
             </a:r>
@@ -36135,7 +38595,7 @@
       </p:sp>
       <p:sp>
         <p:nvSpPr>
-          <p:cNvPr id="12" name="slot.matrix.cell.4.title"/>
+          <p:cNvPr id="14" name="slot.matrix.cell.4.title"/>
           <p:cNvSpPr/>
           <p:nvPr/>
         </p:nvSpPr>
@@ -36178,7 +38638,7 @@
                 <a:solidFill>
                   <a:schemeClr val="dk1"/>
                 </a:solidFill>
-                <a:latin typeface="Futura Medium"/>
+                <a:latin typeface="Arial"/>
               </a:rPr>
               <a:t>Cell 4</a:t>
             </a:r>
@@ -36187,7 +38647,7 @@
       </p:sp>
       <p:sp>
         <p:nvSpPr>
-          <p:cNvPr id="13" name="slot.matrix.cell.5.title"/>
+          <p:cNvPr id="15" name="slot.matrix.cell.5.title"/>
           <p:cNvSpPr/>
           <p:nvPr/>
         </p:nvSpPr>
@@ -36230,7 +38690,7 @@
                 <a:solidFill>
                   <a:schemeClr val="dk1"/>
                 </a:solidFill>
-                <a:latin typeface="Futura Medium"/>
+                <a:latin typeface="Arial"/>
               </a:rPr>
               <a:t>Cell 5</a:t>
             </a:r>
@@ -36239,7 +38699,7 @@
       </p:sp>
       <p:sp>
         <p:nvSpPr>
-          <p:cNvPr id="14" name="slot.matrix.cell.6.title"/>
+          <p:cNvPr id="16" name="slot.matrix.cell.6.title"/>
           <p:cNvSpPr/>
           <p:nvPr/>
         </p:nvSpPr>
@@ -36282,7 +38742,7 @@
                 <a:solidFill>
                   <a:schemeClr val="dk1"/>
                 </a:solidFill>
-                <a:latin typeface="Futura Medium"/>
+                <a:latin typeface="Arial"/>
               </a:rPr>
               <a:t>Cell 6</a:t>
             </a:r>
@@ -36291,7 +38751,7 @@
       </p:sp>
       <p:sp>
         <p:nvSpPr>
-          <p:cNvPr id="15" name="slot.matrix.cell.7.title"/>
+          <p:cNvPr id="17" name="slot.matrix.cell.7.title"/>
           <p:cNvSpPr/>
           <p:nvPr/>
         </p:nvSpPr>
@@ -36334,7 +38794,7 @@
                 <a:solidFill>
                   <a:schemeClr val="dk1"/>
                 </a:solidFill>
-                <a:latin typeface="Futura Medium"/>
+                <a:latin typeface="Arial"/>
               </a:rPr>
               <a:t>Cell 7</a:t>
             </a:r>
@@ -36343,7 +38803,7 @@
       </p:sp>
       <p:sp>
         <p:nvSpPr>
-          <p:cNvPr id="16" name="slot.matrix.cell.8.title"/>
+          <p:cNvPr id="18" name="slot.matrix.cell.8.title"/>
           <p:cNvSpPr/>
           <p:nvPr/>
         </p:nvSpPr>
@@ -36386,7 +38846,7 @@
                 <a:solidFill>
                   <a:schemeClr val="dk1"/>
                 </a:solidFill>
-                <a:latin typeface="Futura Medium"/>
+                <a:latin typeface="Arial"/>
               </a:rPr>
               <a:t>Cell 8</a:t>
             </a:r>
@@ -36395,7 +38855,7 @@
       </p:sp>
       <p:sp>
         <p:nvSpPr>
-          <p:cNvPr id="17" name="slot.matrix.cell.9.title"/>
+          <p:cNvPr id="19" name="slot.matrix.cell.9.title"/>
           <p:cNvSpPr/>
           <p:nvPr/>
         </p:nvSpPr>
@@ -36438,7 +38898,7 @@
                 <a:solidFill>
                   <a:schemeClr val="dk1"/>
                 </a:solidFill>
-                <a:latin typeface="Futura Medium"/>
+                <a:latin typeface="Arial"/>
               </a:rPr>
               <a:t>Cell 9</a:t>
             </a:r>
@@ -36519,7 +38979,130 @@
       </p:sp>
       <p:sp>
         <p:nvSpPr>
-          <p:cNvPr id="4" name="slot.title"/>
+          <p:cNvPr id="4" name="decor">
+            <a:extLst>
+              <a:ext uri="{FF2B5EF4-FFF2-40B4-BE49-F238E27FC236}">
+                <a16:creationId xmlns:a16="http://schemas.microsoft.com/office/drawing/2014/main" id="{9BCA9FA9-DC4A-F7F9-6F98-04EFCF05B790}"/>
+              </a:ext>
+            </a:extLst>
+          </p:cNvPr>
+          <p:cNvSpPr/>
+          <p:nvPr userDrawn="1"/>
+        </p:nvSpPr>
+        <p:spPr>
+          <a:xfrm>
+            <a:off x="-64731" y="246322"/>
+            <a:ext cx="512150" cy="423265"/>
+          </a:xfrm>
+          <a:prstGeom prst="pie">
+            <a:avLst>
+              <a:gd name="adj1" fmla="val 16190032"/>
+              <a:gd name="adj2" fmla="val 5400005"/>
+            </a:avLst>
+          </a:prstGeom>
+          <a:solidFill>
+            <a:schemeClr val="tx2"/>
+          </a:solidFill>
+          <a:ln>
+            <a:solidFill>
+              <a:schemeClr val="tx2"/>
+            </a:solidFill>
+          </a:ln>
+        </p:spPr>
+        <p:style>
+          <a:lnRef idx="2">
+            <a:schemeClr val="accent1">
+              <a:shade val="50000"/>
+            </a:schemeClr>
+          </a:lnRef>
+          <a:fillRef idx="1">
+            <a:schemeClr val="accent1"/>
+          </a:fillRef>
+          <a:effectRef idx="0">
+            <a:schemeClr val="accent1"/>
+          </a:effectRef>
+          <a:fontRef idx="minor">
+            <a:schemeClr val="lt1"/>
+          </a:fontRef>
+        </p:style>
+        <p:txBody>
+          <a:bodyPr lIns="36000" tIns="36000" rIns="36000" bIns="36000" rtlCol="0" anchor="ctr"/>
+          <a:lstStyle/>
+          <a:p>
+            <a:pPr algn="l" rtl="0"/>
+            <a:endParaRPr lang="en-US" sz="1200" b="1">
+              <a:solidFill>
+                <a:schemeClr val="bg1"/>
+              </a:solidFill>
+              <a:latin typeface="Arial" panose="020B0604020202020204" pitchFamily="34" charset="0"/>
+              <a:cs typeface="Arial" panose="020B0604020202020204" pitchFamily="34" charset="0"/>
+            </a:endParaRPr>
+          </a:p>
+        </p:txBody>
+      </p:sp>
+      <p:sp>
+        <p:nvSpPr>
+          <p:cNvPr id="5" name="decor">
+            <a:extLst>
+              <a:ext uri="{FF2B5EF4-FFF2-40B4-BE49-F238E27FC236}">
+                <a16:creationId xmlns:a16="http://schemas.microsoft.com/office/drawing/2014/main" id="{5D3B6E37-9E51-E62C-A843-852BEEBE5F2B}"/>
+              </a:ext>
+            </a:extLst>
+          </p:cNvPr>
+          <p:cNvSpPr/>
+          <p:nvPr userDrawn="1"/>
+        </p:nvSpPr>
+        <p:spPr>
+          <a:xfrm>
+            <a:off x="0" y="247761"/>
+            <a:ext cx="191344" cy="423265"/>
+          </a:xfrm>
+          <a:prstGeom prst="rect">
+            <a:avLst/>
+          </a:prstGeom>
+          <a:solidFill>
+            <a:schemeClr val="tx2"/>
+          </a:solidFill>
+          <a:ln>
+            <a:solidFill>
+              <a:schemeClr val="tx2"/>
+            </a:solidFill>
+          </a:ln>
+        </p:spPr>
+        <p:style>
+          <a:lnRef idx="2">
+            <a:schemeClr val="accent1">
+              <a:shade val="50000"/>
+            </a:schemeClr>
+          </a:lnRef>
+          <a:fillRef idx="1">
+            <a:schemeClr val="accent1"/>
+          </a:fillRef>
+          <a:effectRef idx="0">
+            <a:schemeClr val="accent1"/>
+          </a:effectRef>
+          <a:fontRef idx="minor">
+            <a:schemeClr val="lt1"/>
+          </a:fontRef>
+        </p:style>
+        <p:txBody>
+          <a:bodyPr lIns="36000" tIns="36000" rIns="36000" bIns="36000" rtlCol="0" anchor="ctr"/>
+          <a:lstStyle/>
+          <a:p>
+            <a:pPr algn="l" rtl="0"/>
+            <a:endParaRPr lang="en-US" sz="1200" b="1">
+              <a:solidFill>
+                <a:schemeClr val="bg1"/>
+              </a:solidFill>
+              <a:latin typeface="Arial" panose="020B0604020202020204" pitchFamily="34" charset="0"/>
+              <a:cs typeface="Arial" panose="020B0604020202020204" pitchFamily="34" charset="0"/>
+            </a:endParaRPr>
+          </a:p>
+        </p:txBody>
+      </p:sp>
+      <p:sp>
+        <p:nvSpPr>
+          <p:cNvPr id="6" name="slot.title"/>
           <p:cNvSpPr txBox="1"/>
           <p:nvPr/>
         </p:nvSpPr>
@@ -36543,7 +39126,7 @@
             <a:r>
               <a:rPr sz="2200" b="1">
                 <a:solidFill>
-                  <a:schemeClr val="dk1"/>
+                  <a:schemeClr val="accent2"/>
                 </a:solidFill>
                 <a:latin typeface="Futura Medium"/>
               </a:rPr>
@@ -36554,7 +39137,7 @@
       </p:sp>
       <p:sp>
         <p:nvSpPr>
-          <p:cNvPr id="5" name="decor"/>
+          <p:cNvPr id="7" name="decor"/>
           <p:cNvSpPr/>
           <p:nvPr/>
         </p:nvSpPr>
@@ -36595,7 +39178,7 @@
                 <a:solidFill>
                   <a:schemeClr val="accent2"/>
                 </a:solidFill>
-                <a:latin typeface="Futura Medium"/>
+                <a:latin typeface="Arial"/>
               </a:rPr>
               <a:t>“</a:t>
             </a:r>
@@ -36604,7 +39187,7 @@
       </p:sp>
       <p:sp>
         <p:nvSpPr>
-          <p:cNvPr id="6" name="slot.quote"/>
+          <p:cNvPr id="8" name="slot.quote"/>
           <p:cNvSpPr txBox="1"/>
           <p:nvPr/>
         </p:nvSpPr>
@@ -36630,7 +39213,7 @@
                 <a:solidFill>
                   <a:schemeClr val="accent1"/>
                 </a:solidFill>
-                <a:latin typeface="Futura Medium"/>
+                <a:latin typeface="Arial"/>
               </a:rPr>
               <a:t>A compelling pull-quote that captures the key insight from the work.</a:t>
             </a:r>
@@ -36639,7 +39222,7 @@
       </p:sp>
       <p:sp>
         <p:nvSpPr>
-          <p:cNvPr id="7" name="slot.attribution"/>
+          <p:cNvPr id="9" name="slot.attribution"/>
           <p:cNvSpPr txBox="1"/>
           <p:nvPr/>
         </p:nvSpPr>
@@ -36746,7 +39329,130 @@
       </p:sp>
       <p:sp>
         <p:nvSpPr>
-          <p:cNvPr id="4" name="slot.title"/>
+          <p:cNvPr id="4" name="decor">
+            <a:extLst>
+              <a:ext uri="{FF2B5EF4-FFF2-40B4-BE49-F238E27FC236}">
+                <a16:creationId xmlns:a16="http://schemas.microsoft.com/office/drawing/2014/main" id="{9BCA9FA9-DC4A-F7F9-6F98-04EFCF05B790}"/>
+              </a:ext>
+            </a:extLst>
+          </p:cNvPr>
+          <p:cNvSpPr/>
+          <p:nvPr userDrawn="1"/>
+        </p:nvSpPr>
+        <p:spPr>
+          <a:xfrm>
+            <a:off x="-64731" y="246322"/>
+            <a:ext cx="512150" cy="423265"/>
+          </a:xfrm>
+          <a:prstGeom prst="pie">
+            <a:avLst>
+              <a:gd name="adj1" fmla="val 16190032"/>
+              <a:gd name="adj2" fmla="val 5400005"/>
+            </a:avLst>
+          </a:prstGeom>
+          <a:solidFill>
+            <a:schemeClr val="tx2"/>
+          </a:solidFill>
+          <a:ln>
+            <a:solidFill>
+              <a:schemeClr val="tx2"/>
+            </a:solidFill>
+          </a:ln>
+        </p:spPr>
+        <p:style>
+          <a:lnRef idx="2">
+            <a:schemeClr val="accent1">
+              <a:shade val="50000"/>
+            </a:schemeClr>
+          </a:lnRef>
+          <a:fillRef idx="1">
+            <a:schemeClr val="accent1"/>
+          </a:fillRef>
+          <a:effectRef idx="0">
+            <a:schemeClr val="accent1"/>
+          </a:effectRef>
+          <a:fontRef idx="minor">
+            <a:schemeClr val="lt1"/>
+          </a:fontRef>
+        </p:style>
+        <p:txBody>
+          <a:bodyPr lIns="36000" tIns="36000" rIns="36000" bIns="36000" rtlCol="0" anchor="ctr"/>
+          <a:lstStyle/>
+          <a:p>
+            <a:pPr algn="l" rtl="0"/>
+            <a:endParaRPr lang="en-US" sz="1200" b="1">
+              <a:solidFill>
+                <a:schemeClr val="bg1"/>
+              </a:solidFill>
+              <a:latin typeface="Arial" panose="020B0604020202020204" pitchFamily="34" charset="0"/>
+              <a:cs typeface="Arial" panose="020B0604020202020204" pitchFamily="34" charset="0"/>
+            </a:endParaRPr>
+          </a:p>
+        </p:txBody>
+      </p:sp>
+      <p:sp>
+        <p:nvSpPr>
+          <p:cNvPr id="5" name="decor">
+            <a:extLst>
+              <a:ext uri="{FF2B5EF4-FFF2-40B4-BE49-F238E27FC236}">
+                <a16:creationId xmlns:a16="http://schemas.microsoft.com/office/drawing/2014/main" id="{5D3B6E37-9E51-E62C-A843-852BEEBE5F2B}"/>
+              </a:ext>
+            </a:extLst>
+          </p:cNvPr>
+          <p:cNvSpPr/>
+          <p:nvPr userDrawn="1"/>
+        </p:nvSpPr>
+        <p:spPr>
+          <a:xfrm>
+            <a:off x="0" y="247761"/>
+            <a:ext cx="191344" cy="423265"/>
+          </a:xfrm>
+          <a:prstGeom prst="rect">
+            <a:avLst/>
+          </a:prstGeom>
+          <a:solidFill>
+            <a:schemeClr val="tx2"/>
+          </a:solidFill>
+          <a:ln>
+            <a:solidFill>
+              <a:schemeClr val="tx2"/>
+            </a:solidFill>
+          </a:ln>
+        </p:spPr>
+        <p:style>
+          <a:lnRef idx="2">
+            <a:schemeClr val="accent1">
+              <a:shade val="50000"/>
+            </a:schemeClr>
+          </a:lnRef>
+          <a:fillRef idx="1">
+            <a:schemeClr val="accent1"/>
+          </a:fillRef>
+          <a:effectRef idx="0">
+            <a:schemeClr val="accent1"/>
+          </a:effectRef>
+          <a:fontRef idx="minor">
+            <a:schemeClr val="lt1"/>
+          </a:fontRef>
+        </p:style>
+        <p:txBody>
+          <a:bodyPr lIns="36000" tIns="36000" rIns="36000" bIns="36000" rtlCol="0" anchor="ctr"/>
+          <a:lstStyle/>
+          <a:p>
+            <a:pPr algn="l" rtl="0"/>
+            <a:endParaRPr lang="en-US" sz="1200" b="1">
+              <a:solidFill>
+                <a:schemeClr val="bg1"/>
+              </a:solidFill>
+              <a:latin typeface="Arial" panose="020B0604020202020204" pitchFamily="34" charset="0"/>
+              <a:cs typeface="Arial" panose="020B0604020202020204" pitchFamily="34" charset="0"/>
+            </a:endParaRPr>
+          </a:p>
+        </p:txBody>
+      </p:sp>
+      <p:sp>
+        <p:nvSpPr>
+          <p:cNvPr id="6" name="slot.title"/>
           <p:cNvSpPr txBox="1"/>
           <p:nvPr/>
         </p:nvSpPr>
@@ -36770,7 +39476,7 @@
             <a:r>
               <a:rPr sz="2200" b="1">
                 <a:solidFill>
-                  <a:schemeClr val="dk1"/>
+                  <a:schemeClr val="accent2"/>
                 </a:solidFill>
                 <a:latin typeface="Futura Medium"/>
               </a:rPr>
@@ -36781,7 +39487,7 @@
       </p:sp>
       <p:graphicFrame>
         <p:nvGraphicFramePr>
-          <p:cNvPr id="5" name="slot.table"/>
+          <p:cNvPr id="7" name="slot.table"/>
           <p:cNvGraphicFramePr>
             <a:graphicFrameLocks noGrp="1"/>
           </p:cNvGraphicFramePr>
@@ -36814,7 +39520,7 @@
                           <a:solidFill>
                             <a:schemeClr val="lt1"/>
                           </a:solidFill>
-                          <a:latin typeface="Futura Medium"/>
+                          <a:latin typeface="Arial"/>
                         </a:rPr>
                         <a:t>Workstream</a:t>
                       </a:r>
@@ -36836,7 +39542,7 @@
                           <a:solidFill>
                             <a:schemeClr val="lt1"/>
                           </a:solidFill>
-                          <a:latin typeface="Futura Medium"/>
+                          <a:latin typeface="Arial"/>
                         </a:rPr>
                         <a:t>Detail</a:t>
                       </a:r>
@@ -36858,7 +39564,7 @@
                           <a:solidFill>
                             <a:schemeClr val="lt1"/>
                           </a:solidFill>
-                          <a:latin typeface="Futura Medium"/>
+                          <a:latin typeface="Arial"/>
                         </a:rPr>
                         <a:t>Owner</a:t>
                       </a:r>
@@ -36880,7 +39586,7 @@
                           <a:solidFill>
                             <a:schemeClr val="lt1"/>
                           </a:solidFill>
-                          <a:latin typeface="Futura Medium"/>
+                          <a:latin typeface="Arial"/>
                         </a:rPr>
                         <a:t>Status</a:t>
                       </a:r>
@@ -37311,7 +40017,130 @@
       </p:sp>
       <p:sp>
         <p:nvSpPr>
-          <p:cNvPr id="4" name="slot.title"/>
+          <p:cNvPr id="4" name="decor">
+            <a:extLst>
+              <a:ext uri="{FF2B5EF4-FFF2-40B4-BE49-F238E27FC236}">
+                <a16:creationId xmlns:a16="http://schemas.microsoft.com/office/drawing/2014/main" id="{9BCA9FA9-DC4A-F7F9-6F98-04EFCF05B790}"/>
+              </a:ext>
+            </a:extLst>
+          </p:cNvPr>
+          <p:cNvSpPr/>
+          <p:nvPr userDrawn="1"/>
+        </p:nvSpPr>
+        <p:spPr>
+          <a:xfrm>
+            <a:off x="-64731" y="246322"/>
+            <a:ext cx="512150" cy="423265"/>
+          </a:xfrm>
+          <a:prstGeom prst="pie">
+            <a:avLst>
+              <a:gd name="adj1" fmla="val 16190032"/>
+              <a:gd name="adj2" fmla="val 5400005"/>
+            </a:avLst>
+          </a:prstGeom>
+          <a:solidFill>
+            <a:schemeClr val="tx2"/>
+          </a:solidFill>
+          <a:ln>
+            <a:solidFill>
+              <a:schemeClr val="tx2"/>
+            </a:solidFill>
+          </a:ln>
+        </p:spPr>
+        <p:style>
+          <a:lnRef idx="2">
+            <a:schemeClr val="accent1">
+              <a:shade val="50000"/>
+            </a:schemeClr>
+          </a:lnRef>
+          <a:fillRef idx="1">
+            <a:schemeClr val="accent1"/>
+          </a:fillRef>
+          <a:effectRef idx="0">
+            <a:schemeClr val="accent1"/>
+          </a:effectRef>
+          <a:fontRef idx="minor">
+            <a:schemeClr val="lt1"/>
+          </a:fontRef>
+        </p:style>
+        <p:txBody>
+          <a:bodyPr lIns="36000" tIns="36000" rIns="36000" bIns="36000" rtlCol="0" anchor="ctr"/>
+          <a:lstStyle/>
+          <a:p>
+            <a:pPr algn="l" rtl="0"/>
+            <a:endParaRPr lang="en-US" sz="1200" b="1">
+              <a:solidFill>
+                <a:schemeClr val="bg1"/>
+              </a:solidFill>
+              <a:latin typeface="Arial" panose="020B0604020202020204" pitchFamily="34" charset="0"/>
+              <a:cs typeface="Arial" panose="020B0604020202020204" pitchFamily="34" charset="0"/>
+            </a:endParaRPr>
+          </a:p>
+        </p:txBody>
+      </p:sp>
+      <p:sp>
+        <p:nvSpPr>
+          <p:cNvPr id="5" name="decor">
+            <a:extLst>
+              <a:ext uri="{FF2B5EF4-FFF2-40B4-BE49-F238E27FC236}">
+                <a16:creationId xmlns:a16="http://schemas.microsoft.com/office/drawing/2014/main" id="{5D3B6E37-9E51-E62C-A843-852BEEBE5F2B}"/>
+              </a:ext>
+            </a:extLst>
+          </p:cNvPr>
+          <p:cNvSpPr/>
+          <p:nvPr userDrawn="1"/>
+        </p:nvSpPr>
+        <p:spPr>
+          <a:xfrm>
+            <a:off x="0" y="247761"/>
+            <a:ext cx="191344" cy="423265"/>
+          </a:xfrm>
+          <a:prstGeom prst="rect">
+            <a:avLst/>
+          </a:prstGeom>
+          <a:solidFill>
+            <a:schemeClr val="tx2"/>
+          </a:solidFill>
+          <a:ln>
+            <a:solidFill>
+              <a:schemeClr val="tx2"/>
+            </a:solidFill>
+          </a:ln>
+        </p:spPr>
+        <p:style>
+          <a:lnRef idx="2">
+            <a:schemeClr val="accent1">
+              <a:shade val="50000"/>
+            </a:schemeClr>
+          </a:lnRef>
+          <a:fillRef idx="1">
+            <a:schemeClr val="accent1"/>
+          </a:fillRef>
+          <a:effectRef idx="0">
+            <a:schemeClr val="accent1"/>
+          </a:effectRef>
+          <a:fontRef idx="minor">
+            <a:schemeClr val="lt1"/>
+          </a:fontRef>
+        </p:style>
+        <p:txBody>
+          <a:bodyPr lIns="36000" tIns="36000" rIns="36000" bIns="36000" rtlCol="0" anchor="ctr"/>
+          <a:lstStyle/>
+          <a:p>
+            <a:pPr algn="l" rtl="0"/>
+            <a:endParaRPr lang="en-US" sz="1200" b="1">
+              <a:solidFill>
+                <a:schemeClr val="bg1"/>
+              </a:solidFill>
+              <a:latin typeface="Arial" panose="020B0604020202020204" pitchFamily="34" charset="0"/>
+              <a:cs typeface="Arial" panose="020B0604020202020204" pitchFamily="34" charset="0"/>
+            </a:endParaRPr>
+          </a:p>
+        </p:txBody>
+      </p:sp>
+      <p:sp>
+        <p:nvSpPr>
+          <p:cNvPr id="6" name="slot.title"/>
           <p:cNvSpPr txBox="1"/>
           <p:nvPr/>
         </p:nvSpPr>
@@ -37335,7 +40164,7 @@
             <a:r>
               <a:rPr sz="2200" b="1">
                 <a:solidFill>
-                  <a:schemeClr val="dk1"/>
+                  <a:schemeClr val="accent2"/>
                 </a:solidFill>
                 <a:latin typeface="Futura Medium"/>
               </a:rPr>
@@ -37346,7 +40175,7 @@
       </p:sp>
       <p:graphicFrame>
         <p:nvGraphicFramePr>
-          <p:cNvPr id="5" name="slot.table"/>
+          <p:cNvPr id="7" name="slot.table"/>
           <p:cNvGraphicFramePr>
             <a:graphicFrameLocks noGrp="1"/>
           </p:cNvGraphicFramePr>
@@ -37379,7 +40208,7 @@
                           <a:solidFill>
                             <a:schemeClr val="lt1"/>
                           </a:solidFill>
-                          <a:latin typeface="Futura Medium"/>
+                          <a:latin typeface="Arial"/>
                         </a:rPr>
                         <a:t>Criterion</a:t>
                       </a:r>
@@ -37401,7 +40230,7 @@
                           <a:solidFill>
                             <a:schemeClr val="lt1"/>
                           </a:solidFill>
-                          <a:latin typeface="Futura Medium"/>
+                          <a:latin typeface="Arial"/>
                         </a:rPr>
                         <a:t>Option A</a:t>
                       </a:r>
@@ -37423,7 +40252,7 @@
                           <a:solidFill>
                             <a:schemeClr val="lt1"/>
                           </a:solidFill>
-                          <a:latin typeface="Futura Medium"/>
+                          <a:latin typeface="Arial"/>
                         </a:rPr>
                         <a:t>Option B</a:t>
                       </a:r>
@@ -37445,7 +40274,7 @@
                           <a:solidFill>
                             <a:schemeClr val="lt1"/>
                           </a:solidFill>
-                          <a:latin typeface="Futura Medium"/>
+                          <a:latin typeface="Arial"/>
                         </a:rPr>
                         <a:t>Option C</a:t>
                       </a:r>
@@ -38015,7 +40844,130 @@
       </p:sp>
       <p:sp>
         <p:nvSpPr>
-          <p:cNvPr id="4" name="slot.title"/>
+          <p:cNvPr id="4" name="decor">
+            <a:extLst>
+              <a:ext uri="{FF2B5EF4-FFF2-40B4-BE49-F238E27FC236}">
+                <a16:creationId xmlns:a16="http://schemas.microsoft.com/office/drawing/2014/main" id="{9BCA9FA9-DC4A-F7F9-6F98-04EFCF05B790}"/>
+              </a:ext>
+            </a:extLst>
+          </p:cNvPr>
+          <p:cNvSpPr/>
+          <p:nvPr userDrawn="1"/>
+        </p:nvSpPr>
+        <p:spPr>
+          <a:xfrm>
+            <a:off x="-64731" y="246322"/>
+            <a:ext cx="512150" cy="423265"/>
+          </a:xfrm>
+          <a:prstGeom prst="pie">
+            <a:avLst>
+              <a:gd name="adj1" fmla="val 16190032"/>
+              <a:gd name="adj2" fmla="val 5400005"/>
+            </a:avLst>
+          </a:prstGeom>
+          <a:solidFill>
+            <a:schemeClr val="tx2"/>
+          </a:solidFill>
+          <a:ln>
+            <a:solidFill>
+              <a:schemeClr val="tx2"/>
+            </a:solidFill>
+          </a:ln>
+        </p:spPr>
+        <p:style>
+          <a:lnRef idx="2">
+            <a:schemeClr val="accent1">
+              <a:shade val="50000"/>
+            </a:schemeClr>
+          </a:lnRef>
+          <a:fillRef idx="1">
+            <a:schemeClr val="accent1"/>
+          </a:fillRef>
+          <a:effectRef idx="0">
+            <a:schemeClr val="accent1"/>
+          </a:effectRef>
+          <a:fontRef idx="minor">
+            <a:schemeClr val="lt1"/>
+          </a:fontRef>
+        </p:style>
+        <p:txBody>
+          <a:bodyPr lIns="36000" tIns="36000" rIns="36000" bIns="36000" rtlCol="0" anchor="ctr"/>
+          <a:lstStyle/>
+          <a:p>
+            <a:pPr algn="l" rtl="0"/>
+            <a:endParaRPr lang="en-US" sz="1200" b="1">
+              <a:solidFill>
+                <a:schemeClr val="bg1"/>
+              </a:solidFill>
+              <a:latin typeface="Arial" panose="020B0604020202020204" pitchFamily="34" charset="0"/>
+              <a:cs typeface="Arial" panose="020B0604020202020204" pitchFamily="34" charset="0"/>
+            </a:endParaRPr>
+          </a:p>
+        </p:txBody>
+      </p:sp>
+      <p:sp>
+        <p:nvSpPr>
+          <p:cNvPr id="5" name="decor">
+            <a:extLst>
+              <a:ext uri="{FF2B5EF4-FFF2-40B4-BE49-F238E27FC236}">
+                <a16:creationId xmlns:a16="http://schemas.microsoft.com/office/drawing/2014/main" id="{5D3B6E37-9E51-E62C-A843-852BEEBE5F2B}"/>
+              </a:ext>
+            </a:extLst>
+          </p:cNvPr>
+          <p:cNvSpPr/>
+          <p:nvPr userDrawn="1"/>
+        </p:nvSpPr>
+        <p:spPr>
+          <a:xfrm>
+            <a:off x="0" y="247761"/>
+            <a:ext cx="191344" cy="423265"/>
+          </a:xfrm>
+          <a:prstGeom prst="rect">
+            <a:avLst/>
+          </a:prstGeom>
+          <a:solidFill>
+            <a:schemeClr val="tx2"/>
+          </a:solidFill>
+          <a:ln>
+            <a:solidFill>
+              <a:schemeClr val="tx2"/>
+            </a:solidFill>
+          </a:ln>
+        </p:spPr>
+        <p:style>
+          <a:lnRef idx="2">
+            <a:schemeClr val="accent1">
+              <a:shade val="50000"/>
+            </a:schemeClr>
+          </a:lnRef>
+          <a:fillRef idx="1">
+            <a:schemeClr val="accent1"/>
+          </a:fillRef>
+          <a:effectRef idx="0">
+            <a:schemeClr val="accent1"/>
+          </a:effectRef>
+          <a:fontRef idx="minor">
+            <a:schemeClr val="lt1"/>
+          </a:fontRef>
+        </p:style>
+        <p:txBody>
+          <a:bodyPr lIns="36000" tIns="36000" rIns="36000" bIns="36000" rtlCol="0" anchor="ctr"/>
+          <a:lstStyle/>
+          <a:p>
+            <a:pPr algn="l" rtl="0"/>
+            <a:endParaRPr lang="en-US" sz="1200" b="1">
+              <a:solidFill>
+                <a:schemeClr val="bg1"/>
+              </a:solidFill>
+              <a:latin typeface="Arial" panose="020B0604020202020204" pitchFamily="34" charset="0"/>
+              <a:cs typeface="Arial" panose="020B0604020202020204" pitchFamily="34" charset="0"/>
+            </a:endParaRPr>
+          </a:p>
+        </p:txBody>
+      </p:sp>
+      <p:sp>
+        <p:nvSpPr>
+          <p:cNvPr id="6" name="slot.title"/>
           <p:cNvSpPr txBox="1"/>
           <p:nvPr/>
         </p:nvSpPr>
@@ -38039,7 +40991,7 @@
             <a:r>
               <a:rPr sz="2200" b="1">
                 <a:solidFill>
-                  <a:schemeClr val="dk1"/>
+                  <a:schemeClr val="accent2"/>
                 </a:solidFill>
                 <a:latin typeface="Futura Medium"/>
               </a:rPr>
@@ -38050,7 +41002,7 @@
       </p:sp>
       <p:graphicFrame>
         <p:nvGraphicFramePr>
-          <p:cNvPr id="5" name="slot.table"/>
+          <p:cNvPr id="7" name="slot.table"/>
           <p:cNvGraphicFramePr>
             <a:graphicFrameLocks noGrp="1"/>
           </p:cNvGraphicFramePr>
@@ -38083,7 +41035,7 @@
                           <a:solidFill>
                             <a:schemeClr val="lt1"/>
                           </a:solidFill>
-                          <a:latin typeface="Futura Medium"/>
+                          <a:latin typeface="Arial"/>
                         </a:rPr>
                         <a:t>Column 1</a:t>
                       </a:r>
@@ -38105,7 +41057,7 @@
                           <a:solidFill>
                             <a:schemeClr val="lt1"/>
                           </a:solidFill>
-                          <a:latin typeface="Futura Medium"/>
+                          <a:latin typeface="Arial"/>
                         </a:rPr>
                         <a:t>Column 2</a:t>
                       </a:r>
@@ -38127,7 +41079,7 @@
                           <a:solidFill>
                             <a:schemeClr val="lt1"/>
                           </a:solidFill>
-                          <a:latin typeface="Futura Medium"/>
+                          <a:latin typeface="Arial"/>
                         </a:rPr>
                         <a:t>Column 3</a:t>
                       </a:r>
@@ -38149,7 +41101,7 @@
                           <a:solidFill>
                             <a:schemeClr val="lt1"/>
                           </a:solidFill>
-                          <a:latin typeface="Futura Medium"/>
+                          <a:latin typeface="Arial"/>
                         </a:rPr>
                         <a:t>Column 4</a:t>
                       </a:r>
